--- a/livro_ia_educacao/saida/pptx/Cap22_slides.pptx
+++ b/livro_ia_educacao/saida/pptx/Cap22_slides.pptx
@@ -29,10 +29,9 @@
     <p:sldId id="277" r:id="rId23"/>
     <p:sldId id="278" r:id="rId24"/>
     <p:sldId id="279" r:id="rId25"/>
-    <p:sldId id="280" r:id="rId26"/>
   </p:sldIdLst>
   <p:notesMasterIdLst>
-    <p:notesMasterId r:id="rId27"/>
+    <p:notesMasterId r:id="rId26"/>
   </p:notesMasterIdLst>
   <p:sldSz cx="12192000" cy="6858000"/>
   <p:notesSz cx="6858000" cy="12192000"/>
@@ -1054,7 +1053,7 @@
           <a:p>
             <a:r>
               <a:rPr lang="en-US" dirty="0"/>
-              <a:t>Frase de impacto sobre feedback que apaga o raciocínio. Quando o comentário entrega a resposta, o estudante copia sem entender. Quando devolve uma pergunta, ele precisa pensar. Peça perguntas e dicas graduais à IA, não reescritas.</a:t>
+              <a:t>Mapa do capítulo. Use para situar o que vem a seguir: atividades, integridade e limites, e evidências.</a:t>
             </a:r>
             <a:endParaRPr lang="en-US" dirty="0"/>
           </a:p>
@@ -1142,7 +1141,7 @@
           <a:p>
             <a:r>
               <a:rPr lang="en-US" dirty="0"/>
-              <a:t>Mapa do capítulo. Use para situar o que vem a seguir: atividades, integridade e limites, e evidências.</a:t>
+              <a:t>O que a pesquisa permite afirmar. Formativa e feedback informativo podem ajudar, com efeito que varia muito. Rubricas: uso formativo é o que mais se associa a ganhos. Feedback por IA: estudos recentes, em contextos específicos, resultados mistos. Detectores: limitações importantes e viés contra escritores não nativos.</a:t>
             </a:r>
             <a:endParaRPr lang="en-US" dirty="0"/>
           </a:p>
@@ -1230,7 +1229,7 @@
           <a:p>
             <a:r>
               <a:rPr lang="en-US" dirty="0"/>
-              <a:t>O que a pesquisa permite afirmar. Formativa e feedback informativo podem ajudar, com efeito que varia muito. Rubricas: uso formativo é o que mais se associa a ganhos. Feedback por IA: estudos recentes, em contextos específicos, resultados mistos. Detectores: limitações importantes e viés contra escritores não nativos.</a:t>
+              <a:t>Atividade 1: diagnóstico de entrada. Escolha um conceito central, liste equívocos prováveis, valide quatro a seis itens, aplique sem nota em 15 minutos, tabule e transforme em plano de ação. IA só na preparação, opcional. Sem recursos: cartões A, B, C e D de folha dobrada.</a:t>
             </a:r>
             <a:endParaRPr lang="en-US" dirty="0"/>
           </a:p>
@@ -1318,7 +1317,7 @@
           <a:p>
             <a:r>
               <a:rPr lang="en-US" dirty="0"/>
-              <a:t>Atividade 1: diagnóstico de entrada. Escolha um conceito central, liste equívocos prováveis, valide quatro a seis itens, aplique sem nota em 15 minutos, tabule e transforme em plano de ação. IA só na preparação, opcional. Sem recursos: cartões A, B, C e D de folha dobrada.</a:t>
+              <a:t>Atividade 2: rubrica construída com a turma e feedback em ciclo. Comece pela ordenação de quatro textos anônimos, extraia critérios, descreva níveis, teste a rubrica, faça feedback de pares e revise. A IA só entra, opcional, para rascunhar descritores que serão comparados com os da turma.</a:t>
             </a:r>
             <a:endParaRPr lang="en-US" dirty="0"/>
           </a:p>
@@ -1406,7 +1405,7 @@
           <a:p>
             <a:r>
               <a:rPr lang="en-US" dirty="0"/>
-              <a:t>Atividade 2: rubrica construída com a turma e feedback em ciclo. Comece pela ordenação de quatro textos anônimos, extraia critérios, descreva níveis, teste a rubrica, faça feedback de pares e revise. A IA só entra, opcional, para rascunhar descritores que serão comparados com os da turma.</a:t>
+              <a:t>Notas automáticas, detectores e decisões consequentes exigem supervisão humana e devido processo. Não delegue a nota. Não use detectores como prova isolada: em caso de suspeita, converse, peça explicação oral e compare com produções em sala. Explique as regras antes de cada tarefa e proteja os dados.</a:t>
             </a:r>
             <a:endParaRPr lang="en-US" dirty="0"/>
           </a:p>
@@ -1582,7 +1581,7 @@
           <a:p>
             <a:r>
               <a:rPr lang="en-US" dirty="0"/>
-              <a:t>Notas automáticas, detectores e decisões consequentes exigem supervisão humana e devido processo. Não delegue a nota. Não use detectores como prova isolada: em caso de suspeita, converse, peça explicação oral e compare com produções em sala. Explique as regras antes de cada tarefa e proteja os dados.</a:t>
+              <a:t>Quando dispensar a IA na avaliação. Notas e aprovação ou reprovação. Feedback em situações sensíveis, como sofrimento ou suspeita de má conduta. Quando não dá para anonimizar. Quando não há tempo de ler e revisar o rascunho. E quando o objetivo é avaliar o estudante sem apoio.</a:t>
             </a:r>
             <a:endParaRPr lang="en-US" dirty="0"/>
           </a:p>
@@ -1670,7 +1669,7 @@
           <a:p>
             <a:r>
               <a:rPr lang="en-US" dirty="0"/>
-              <a:t>Quando dispensar a IA na avaliação. Notas e aprovação ou reprovação. Feedback em situações sensíveis, como sofrimento ou suspeita de má conduta. Quando não dá para anonimizar. Quando não há tempo de ler e revisar o rascunho. E quando o objetivo é avaliar o estudante sem apoio.</a:t>
+              <a:t>Síntese: critérios claros, evidências de aprendizagem, feedback com o próximo passo e ação do estudante, tudo sob a responsabilidade do professor, com a IA como rascunho a ser revisado.</a:t>
             </a:r>
             <a:endParaRPr lang="en-US" dirty="0"/>
           </a:p>
@@ -1758,7 +1757,7 @@
           <a:p>
             <a:r>
               <a:rPr lang="en-US" dirty="0"/>
-              <a:t>Síntese: critérios claros, evidências de aprendizagem, feedback com o próximo passo e ação do estudante, tudo sob a responsabilidade do professor, com a IA como rascunho a ser revisado.</a:t>
+              <a:t>Releia os pontos. Sugira o experimento: cada estudante recebe feedback de um colega e escreve uma resposta: vou mudar X porque, não vou mudar Y porque.</a:t>
             </a:r>
             <a:endParaRPr lang="en-US" dirty="0"/>
           </a:p>
@@ -1846,7 +1845,7 @@
           <a:p>
             <a:r>
               <a:rPr lang="en-US" dirty="0"/>
-              <a:t>Releia os pontos. Sugira o experimento: cada estudante recebe feedback de um colega e escreve uma resposta: vou mudar X porque, não vou mudar Y porque.</a:t>
+              <a:t>Dê 5 minutos de escrita e depois conversa em duplas. Convide a turma a combinar as regras sobre IA nas avaliações do próximo bimestre.</a:t>
             </a:r>
             <a:endParaRPr lang="en-US" dirty="0"/>
           </a:p>
@@ -1934,7 +1933,7 @@
           <a:p>
             <a:r>
               <a:rPr lang="en-US" dirty="0"/>
-              <a:t>Dê 5 minutos de escrita e depois conversa em duplas. Convide a turma a combinar as regras sobre IA nas avaliações do próximo bimestre.</a:t>
+              <a:t>Encerramento. Convide a turma a escolher uma ideia para experimentar nesta semana.</a:t>
             </a:r>
             <a:endParaRPr lang="en-US" dirty="0"/>
           </a:p>
@@ -1958,94 +1957,6 @@
             <a:fld id="{F7021451-1387-4CA6-816F-3879F97B5CBC}" type="slidenum">
               <a:rPr lang="en-US"/>
               <a:t>24</a:t>
-            </a:fld>
-            <a:endParaRPr lang="en-US"/>
-          </a:p>
-        </p:txBody>
-      </p:sp>
-    </p:spTree>
-    <p:extLst>
-      <p:ext uri="{BB962C8B-B14F-4D97-AF65-F5344CB8AC3E}">
-        <p14:creationId xmlns:p14="http://schemas.microsoft.com/office/powerpoint/2010/main" val="1024086991"/>
-      </p:ext>
-    </p:extLst>
-  </p:cSld>
-  <p:clrMapOvr>
-    <a:masterClrMapping/>
-  </p:clrMapOvr>
-</p:notes>
-</file>
-
-<file path=ppt/notesSlides/notesSlide25.xml><?xml version="1.0" encoding="utf-8"?>
-<p:notes xmlns:a="http://schemas.openxmlformats.org/drawingml/2006/main" xmlns:r="http://schemas.openxmlformats.org/officeDocument/2006/relationships" xmlns:p="http://schemas.openxmlformats.org/presentationml/2006/main">
-  <p:cSld>
-    <p:spTree>
-      <p:nvGrpSpPr>
-        <p:cNvPr id="1" name=""/>
-        <p:cNvGrpSpPr/>
-        <p:nvPr/>
-      </p:nvGrpSpPr>
-      <p:grpSpPr>
-        <a:xfrm>
-          <a:off x="0" y="0"/>
-          <a:ext cx="0" cy="0"/>
-          <a:chOff x="0" y="0"/>
-          <a:chExt cx="0" cy="0"/>
-        </a:xfrm>
-      </p:grpSpPr>
-      <p:sp>
-        <p:nvSpPr>
-          <p:cNvPr id="2" name="Slide Image Placeholder 1"/>
-          <p:cNvSpPr>
-            <a:spLocks noGrp="1" noRot="1" noChangeAspect="1"/>
-          </p:cNvSpPr>
-          <p:nvPr>
-            <p:ph type="sldImg"/>
-          </p:nvPr>
-        </p:nvSpPr>
-        <p:spPr/>
-      </p:sp>
-      <p:sp>
-        <p:nvSpPr>
-          <p:cNvPr id="3" name="Notes Placeholder 2"/>
-          <p:cNvSpPr>
-            <a:spLocks noGrp="1"/>
-          </p:cNvSpPr>
-          <p:nvPr>
-            <p:ph type="body" idx="1"/>
-          </p:nvPr>
-        </p:nvSpPr>
-        <p:spPr/>
-        <p:txBody>
-          <a:bodyPr/>
-          <a:lstStyle/>
-          <a:p>
-            <a:r>
-              <a:rPr lang="en-US" dirty="0"/>
-              <a:t>Encerramento. Convide a turma a escolher uma ideia para experimentar nesta semana.</a:t>
-            </a:r>
-            <a:endParaRPr lang="en-US" dirty="0"/>
-          </a:p>
-        </p:txBody>
-      </p:sp>
-      <p:sp>
-        <p:nvSpPr>
-          <p:cNvPr id="4" name="Slide Number Placeholder 3"/>
-          <p:cNvSpPr>
-            <a:spLocks noGrp="1"/>
-          </p:cNvSpPr>
-          <p:nvPr>
-            <p:ph type="sldNum" sz="quarter" idx="10"/>
-          </p:nvPr>
-        </p:nvSpPr>
-        <p:spPr/>
-        <p:txBody>
-          <a:bodyPr/>
-          <a:lstStyle/>
-          <a:p>
-            <a:fld id="{F7021451-1387-4CA6-816F-3879F97B5CBC}" type="slidenum">
-              <a:rPr lang="en-US"/>
-              <a:t>25</a:t>
             </a:fld>
             <a:endParaRPr lang="en-US"/>
           </a:p>
@@ -5946,7 +5857,7 @@
     <p:bg>
       <p:bgPr>
         <a:solidFill>
-          <a:srgbClr val="5A2E2A"/>
+          <a:srgbClr val="FFFFFF"/>
         </a:solidFill>
       </p:bgPr>
     </p:bg>
@@ -5972,47 +5883,71 @@
         </p:nvSpPr>
         <p:spPr>
           <a:xfrm>
-            <a:off x="914400" y="1188720"/>
-            <a:ext cx="10332720" cy="3840480"/>
-          </a:xfrm>
-          <a:prstGeom prst="rect">
-            <a:avLst/>
-          </a:prstGeom>
-          <a:noFill/>
-          <a:ln/>
-        </p:spPr>
-        <p:txBody>
-          <a:bodyPr wrap="square" lIns="0" tIns="0" rIns="0" bIns="0" rtlCol="0" anchor="ctr"/>
-          <a:lstStyle/>
-          <a:p>
-            <a:pPr algn="ctr" indent="0" marL="0">
-              <a:buNone/>
-            </a:pPr>
-            <a:r>
-              <a:rPr lang="en-US" sz="4000" b="1" i="1" dirty="0">
-                <a:solidFill>
-                  <a:srgbClr val="FFFFFF"/>
+            <a:off x="548640" y="365760"/>
+            <a:ext cx="11064240" cy="822960"/>
+          </a:xfrm>
+          <a:prstGeom prst="rect">
+            <a:avLst/>
+          </a:prstGeom>
+          <a:noFill/>
+          <a:ln/>
+        </p:spPr>
+        <p:txBody>
+          <a:bodyPr wrap="square" lIns="0" tIns="0" rIns="0" bIns="0" rtlCol="0" anchor="t"/>
+          <a:lstStyle/>
+          <a:p>
+            <a:pPr indent="0" marL="0">
+              <a:buNone/>
+            </a:pPr>
+            <a:r>
+              <a:rPr lang="en-US" sz="3400" b="1" dirty="0">
+                <a:solidFill>
+                  <a:srgbClr val="5A2E2A"/>
                 </a:solidFill>
                 <a:latin typeface="Cambria" pitchFamily="34" charset="0"/>
                 <a:ea typeface="Cambria" pitchFamily="34" charset="-122"/>
                 <a:cs typeface="Cambria" pitchFamily="34" charset="-120"/>
               </a:rPr>
-              <a:t>“Devolva uma pergunta, não a resposta.”</a:t>
-            </a:r>
-            <a:endParaRPr lang="en-US" sz="4000" dirty="0"/>
-          </a:p>
-        </p:txBody>
-      </p:sp>
-      <p:sp>
-        <p:nvSpPr>
-          <p:cNvPr id="4" name="Text 1"/>
-          <p:cNvSpPr txBox="1"/>
-          <p:nvPr/>
-        </p:nvSpPr>
-        <p:spPr>
-          <a:xfrm>
-            <a:off x="914400" y="5212080"/>
-            <a:ext cx="10332720" cy="822960"/>
+              <a:t>Mapa do capítulo</a:t>
+            </a:r>
+            <a:endParaRPr lang="en-US" sz="3400" dirty="0"/>
+          </a:p>
+        </p:txBody>
+      </p:sp>
+      <p:pic>
+        <p:nvPicPr>
+          <p:cNvPr id="4" name="Image 0" descr="Figura 22.1 — Mapa dos conceitos principais do capítulo.">    </p:cNvPr>
+          <p:cNvPicPr>
+            <a:picLocks noChangeAspect="1"/>
+          </p:cNvPicPr>
+          <p:nvPr/>
+        </p:nvPicPr>
+        <p:blipFill>
+          <a:blip r:embed="rId1"/>
+          <a:stretch>
+            <a:fillRect/>
+          </a:stretch>
+        </p:blipFill>
+        <p:spPr>
+          <a:xfrm>
+            <a:off x="2930290" y="1325880"/>
+            <a:ext cx="6300940" cy="4434840"/>
+          </a:xfrm>
+          <a:prstGeom prst="rect">
+            <a:avLst/>
+          </a:prstGeom>
+        </p:spPr>
+      </p:pic>
+      <p:sp>
+        <p:nvSpPr>
+          <p:cNvPr id="5" name="Text 1"/>
+          <p:cNvSpPr txBox="1"/>
+          <p:nvPr/>
+        </p:nvSpPr>
+        <p:spPr>
+          <a:xfrm>
+            <a:off x="548640" y="5852160"/>
+            <a:ext cx="11064240" cy="548640"/>
           </a:xfrm>
           <a:prstGeom prst="rect">
             <a:avLst/>
@@ -6028,20 +5963,20 @@
               <a:buNone/>
             </a:pPr>
             <a:r>
-              <a:rPr lang="en-US" sz="1800" dirty="0">
-                <a:solidFill>
-                  <a:srgbClr val="F4B860"/>
-                </a:solidFill>
-              </a:rPr>
-              <a:t>Apoiar sem fazer pelo estudante: a lógica do andaime.</a:t>
-            </a:r>
-            <a:endParaRPr lang="en-US" sz="1800" dirty="0"/>
-          </a:p>
-        </p:txBody>
-      </p:sp>
-      <p:sp>
-        <p:nvSpPr>
-          <p:cNvPr id="5" name="Text 2"/>
+              <a:rPr lang="en-US" sz="1400" i="1" dirty="0">
+                <a:solidFill>
+                  <a:srgbClr val="6B5F59"/>
+                </a:solidFill>
+              </a:rPr>
+              <a:t>Figura 22.1 — Mapa dos conceitos principais do capítulo.</a:t>
+            </a:r>
+            <a:endParaRPr lang="en-US" sz="1400" dirty="0"/>
+          </a:p>
+        </p:txBody>
+      </p:sp>
+      <p:sp>
+        <p:nvSpPr>
+          <p:cNvPr id="6" name="Text 2"/>
           <p:cNvSpPr txBox="1"/>
           <p:nvPr/>
         </p:nvSpPr>
@@ -6066,7 +6001,7 @@
             <a:r>
               <a:rPr lang="en-US" sz="1000" dirty="0">
                 <a:solidFill>
-                  <a:srgbClr val="E9D9C8"/>
+                  <a:srgbClr val="6B5F59"/>
                 </a:solidFill>
                 <a:latin typeface="Calibri" pitchFamily="34" charset="0"/>
                 <a:ea typeface="Calibri" pitchFamily="34" charset="-122"/>
@@ -6143,46 +6078,81 @@
                 <a:ea typeface="Cambria" pitchFamily="34" charset="-122"/>
                 <a:cs typeface="Cambria" pitchFamily="34" charset="-120"/>
               </a:rPr>
-              <a:t>Mapa do capítulo</a:t>
+              <a:t>O que a pesquisa permite afirmar</a:t>
             </a:r>
             <a:endParaRPr lang="en-US" sz="3400" dirty="0"/>
           </a:p>
         </p:txBody>
       </p:sp>
-      <p:pic>
-        <p:nvPicPr>
-          <p:cNvPr id="4" name="Image 0" descr="Figura 22.1 — Mapa dos conceitos principais do capítulo.">    </p:cNvPr>
-          <p:cNvPicPr>
-            <a:picLocks noChangeAspect="1"/>
-          </p:cNvPicPr>
-          <p:nvPr/>
-        </p:nvPicPr>
-        <p:blipFill>
-          <a:blip r:embed="rId1"/>
-          <a:stretch>
-            <a:fillRect/>
-          </a:stretch>
-        </p:blipFill>
-        <p:spPr>
-          <a:xfrm>
-            <a:off x="2930290" y="1325880"/>
-            <a:ext cx="6300940" cy="4434840"/>
-          </a:xfrm>
-          <a:prstGeom prst="rect">
-            <a:avLst/>
-          </a:prstGeom>
-        </p:spPr>
-      </p:pic>
-      <p:sp>
-        <p:nvSpPr>
-          <p:cNvPr id="5" name="Text 1"/>
-          <p:cNvSpPr txBox="1"/>
-          <p:nvPr/>
-        </p:nvSpPr>
-        <p:spPr>
-          <a:xfrm>
-            <a:off x="548640" y="5852160"/>
-            <a:ext cx="11064240" cy="548640"/>
+      <p:sp>
+        <p:nvSpPr>
+          <p:cNvPr id="4" name="Shape 1"/>
+          <p:cNvSpPr/>
+          <p:nvPr/>
+        </p:nvSpPr>
+        <p:spPr>
+          <a:xfrm>
+            <a:off x="548640" y="1463040"/>
+            <a:ext cx="2560320" cy="4480560"/>
+          </a:xfrm>
+          <a:prstGeom prst="roundRect">
+            <a:avLst>
+              <a:gd name="adj" fmla="val 5357"/>
+            </a:avLst>
+          </a:prstGeom>
+          <a:solidFill>
+            <a:srgbClr val="F7EFE6"/>
+          </a:solidFill>
+          <a:ln w="12700">
+            <a:solidFill>
+              <a:srgbClr val="F7EFE6"/>
+            </a:solidFill>
+            <a:prstDash val="solid"/>
+          </a:ln>
+          <a:effectLst>
+            <a:outerShdw sx="100000" sy="100000" kx="0" ky="0" algn="bl" rotWithShape="0" blurRad="76200" dist="25400" dir="5400000">
+              <a:srgbClr val="000000">
+                <a:alpha val="12000"/>
+              </a:srgbClr>
+            </a:outerShdw>
+          </a:effectLst>
+        </p:spPr>
+      </p:sp>
+      <p:sp>
+        <p:nvSpPr>
+          <p:cNvPr id="5" name="Shape 2"/>
+          <p:cNvSpPr/>
+          <p:nvPr/>
+        </p:nvSpPr>
+        <p:spPr>
+          <a:xfrm>
+            <a:off x="777240" y="1691640"/>
+            <a:ext cx="640080" cy="640080"/>
+          </a:xfrm>
+          <a:prstGeom prst="ellipse">
+            <a:avLst/>
+          </a:prstGeom>
+          <a:solidFill>
+            <a:srgbClr val="6D3B6E"/>
+          </a:solidFill>
+          <a:ln w="12700">
+            <a:solidFill>
+              <a:srgbClr val="6D3B6E"/>
+            </a:solidFill>
+            <a:prstDash val="solid"/>
+          </a:ln>
+        </p:spPr>
+      </p:sp>
+      <p:sp>
+        <p:nvSpPr>
+          <p:cNvPr id="6" name="Text 3"/>
+          <p:cNvSpPr txBox="1"/>
+          <p:nvPr/>
+        </p:nvSpPr>
+        <p:spPr>
+          <a:xfrm>
+            <a:off x="777240" y="1691640"/>
+            <a:ext cx="640080" cy="640080"/>
           </a:xfrm>
           <a:prstGeom prst="rect">
             <a:avLst/>
@@ -6198,20 +6168,617 @@
               <a:buNone/>
             </a:pPr>
             <a:r>
-              <a:rPr lang="en-US" sz="1400" i="1" dirty="0">
-                <a:solidFill>
-                  <a:srgbClr val="6B5F59"/>
-                </a:solidFill>
-              </a:rPr>
-              <a:t>Figura 22.1 — Mapa dos conceitos principais do capítulo.</a:t>
-            </a:r>
-            <a:endParaRPr lang="en-US" sz="1400" dirty="0"/>
-          </a:p>
-        </p:txBody>
-      </p:sp>
-      <p:sp>
-        <p:nvSpPr>
-          <p:cNvPr id="6" name="Text 2"/>
+              <a:rPr lang="en-US" sz="1600" b="1" dirty="0">
+                <a:solidFill>
+                  <a:srgbClr val="FFFFFF"/>
+                </a:solidFill>
+                <a:latin typeface="Cambria" pitchFamily="34" charset="0"/>
+                <a:ea typeface="Cambria" pitchFamily="34" charset="-122"/>
+                <a:cs typeface="Cambria" pitchFamily="34" charset="-120"/>
+              </a:rPr>
+              <a:t>1</a:t>
+            </a:r>
+            <a:endParaRPr lang="en-US" sz="1600" dirty="0"/>
+          </a:p>
+        </p:txBody>
+      </p:sp>
+      <p:sp>
+        <p:nvSpPr>
+          <p:cNvPr id="7" name="Text 4"/>
+          <p:cNvSpPr txBox="1"/>
+          <p:nvPr/>
+        </p:nvSpPr>
+        <p:spPr>
+          <a:xfrm>
+            <a:off x="777240" y="2468880"/>
+            <a:ext cx="2103120" cy="822960"/>
+          </a:xfrm>
+          <a:prstGeom prst="rect">
+            <a:avLst/>
+          </a:prstGeom>
+          <a:noFill/>
+          <a:ln/>
+        </p:spPr>
+        <p:txBody>
+          <a:bodyPr wrap="square" lIns="0" tIns="0" rIns="0" bIns="0" rtlCol="0" anchor="t"/>
+          <a:lstStyle/>
+          <a:p>
+            <a:pPr indent="0" marL="0">
+              <a:buNone/>
+            </a:pPr>
+            <a:r>
+              <a:rPr lang="en-US" sz="1800" b="1" dirty="0">
+                <a:solidFill>
+                  <a:srgbClr val="5A2E2A"/>
+                </a:solidFill>
+                <a:latin typeface="Cambria" pitchFamily="34" charset="0"/>
+                <a:ea typeface="Cambria" pitchFamily="34" charset="-122"/>
+                <a:cs typeface="Cambria" pitchFamily="34" charset="-120"/>
+              </a:rPr>
+              <a:t>Formativa e feedback</a:t>
+            </a:r>
+            <a:endParaRPr lang="en-US" sz="1800" dirty="0"/>
+          </a:p>
+        </p:txBody>
+      </p:sp>
+      <p:sp>
+        <p:nvSpPr>
+          <p:cNvPr id="8" name="Text 5"/>
+          <p:cNvSpPr txBox="1"/>
+          <p:nvPr/>
+        </p:nvSpPr>
+        <p:spPr>
+          <a:xfrm>
+            <a:off x="777240" y="3337560"/>
+            <a:ext cx="2103120" cy="2468880"/>
+          </a:xfrm>
+          <a:prstGeom prst="rect">
+            <a:avLst/>
+          </a:prstGeom>
+          <a:noFill/>
+          <a:ln/>
+        </p:spPr>
+        <p:txBody>
+          <a:bodyPr wrap="square" lIns="0" tIns="0" rIns="0" bIns="0" rtlCol="0" anchor="t"/>
+          <a:lstStyle/>
+          <a:p>
+            <a:pPr indent="0" marL="0">
+              <a:buNone/>
+            </a:pPr>
+            <a:r>
+              <a:rPr lang="en-US" sz="1500" dirty="0">
+                <a:solidFill>
+                  <a:srgbClr val="3B2A2A"/>
+                </a:solidFill>
+              </a:rPr>
+              <a:t>Podem ajudar a aprender, com grande variação conforme tipo, tarefa e contexto.</a:t>
+            </a:r>
+            <a:endParaRPr lang="en-US" sz="1500" dirty="0"/>
+          </a:p>
+        </p:txBody>
+      </p:sp>
+      <p:sp>
+        <p:nvSpPr>
+          <p:cNvPr id="9" name="Shape 6"/>
+          <p:cNvSpPr/>
+          <p:nvPr/>
+        </p:nvSpPr>
+        <p:spPr>
+          <a:xfrm>
+            <a:off x="3383280" y="1463040"/>
+            <a:ext cx="2560320" cy="4480560"/>
+          </a:xfrm>
+          <a:prstGeom prst="roundRect">
+            <a:avLst>
+              <a:gd name="adj" fmla="val 5357"/>
+            </a:avLst>
+          </a:prstGeom>
+          <a:solidFill>
+            <a:srgbClr val="F7EFE6"/>
+          </a:solidFill>
+          <a:ln w="12700">
+            <a:solidFill>
+              <a:srgbClr val="F7EFE6"/>
+            </a:solidFill>
+            <a:prstDash val="solid"/>
+          </a:ln>
+          <a:effectLst>
+            <a:outerShdw sx="100000" sy="100000" kx="0" ky="0" algn="bl" rotWithShape="0" blurRad="76200" dist="25400" dir="5400000">
+              <a:srgbClr val="000000">
+                <a:alpha val="12000"/>
+              </a:srgbClr>
+            </a:outerShdw>
+          </a:effectLst>
+        </p:spPr>
+      </p:sp>
+      <p:sp>
+        <p:nvSpPr>
+          <p:cNvPr id="10" name="Shape 7"/>
+          <p:cNvSpPr/>
+          <p:nvPr/>
+        </p:nvSpPr>
+        <p:spPr>
+          <a:xfrm>
+            <a:off x="3611880" y="1691640"/>
+            <a:ext cx="640080" cy="640080"/>
+          </a:xfrm>
+          <a:prstGeom prst="ellipse">
+            <a:avLst/>
+          </a:prstGeom>
+          <a:solidFill>
+            <a:srgbClr val="2A9D8F"/>
+          </a:solidFill>
+          <a:ln w="12700">
+            <a:solidFill>
+              <a:srgbClr val="2A9D8F"/>
+            </a:solidFill>
+            <a:prstDash val="solid"/>
+          </a:ln>
+        </p:spPr>
+      </p:sp>
+      <p:sp>
+        <p:nvSpPr>
+          <p:cNvPr id="11" name="Text 8"/>
+          <p:cNvSpPr txBox="1"/>
+          <p:nvPr/>
+        </p:nvSpPr>
+        <p:spPr>
+          <a:xfrm>
+            <a:off x="3611880" y="1691640"/>
+            <a:ext cx="640080" cy="640080"/>
+          </a:xfrm>
+          <a:prstGeom prst="rect">
+            <a:avLst/>
+          </a:prstGeom>
+          <a:noFill/>
+          <a:ln/>
+        </p:spPr>
+        <p:txBody>
+          <a:bodyPr wrap="square" lIns="0" tIns="0" rIns="0" bIns="0" rtlCol="0" anchor="ctr"/>
+          <a:lstStyle/>
+          <a:p>
+            <a:pPr algn="ctr" indent="0" marL="0">
+              <a:buNone/>
+            </a:pPr>
+            <a:r>
+              <a:rPr lang="en-US" sz="1600" b="1" dirty="0">
+                <a:solidFill>
+                  <a:srgbClr val="FFFFFF"/>
+                </a:solidFill>
+                <a:latin typeface="Cambria" pitchFamily="34" charset="0"/>
+                <a:ea typeface="Cambria" pitchFamily="34" charset="-122"/>
+                <a:cs typeface="Cambria" pitchFamily="34" charset="-120"/>
+              </a:rPr>
+              <a:t>2</a:t>
+            </a:r>
+            <a:endParaRPr lang="en-US" sz="1600" dirty="0"/>
+          </a:p>
+        </p:txBody>
+      </p:sp>
+      <p:sp>
+        <p:nvSpPr>
+          <p:cNvPr id="12" name="Text 9"/>
+          <p:cNvSpPr txBox="1"/>
+          <p:nvPr/>
+        </p:nvSpPr>
+        <p:spPr>
+          <a:xfrm>
+            <a:off x="3611880" y="2468880"/>
+            <a:ext cx="2103120" cy="822960"/>
+          </a:xfrm>
+          <a:prstGeom prst="rect">
+            <a:avLst/>
+          </a:prstGeom>
+          <a:noFill/>
+          <a:ln/>
+        </p:spPr>
+        <p:txBody>
+          <a:bodyPr wrap="square" lIns="0" tIns="0" rIns="0" bIns="0" rtlCol="0" anchor="t"/>
+          <a:lstStyle/>
+          <a:p>
+            <a:pPr indent="0" marL="0">
+              <a:buNone/>
+            </a:pPr>
+            <a:r>
+              <a:rPr lang="en-US" sz="1800" b="1" dirty="0">
+                <a:solidFill>
+                  <a:srgbClr val="5A2E2A"/>
+                </a:solidFill>
+                <a:latin typeface="Cambria" pitchFamily="34" charset="0"/>
+                <a:ea typeface="Cambria" pitchFamily="34" charset="-122"/>
+                <a:cs typeface="Cambria" pitchFamily="34" charset="-120"/>
+              </a:rPr>
+              <a:t>Rubricas</a:t>
+            </a:r>
+            <a:endParaRPr lang="en-US" sz="1800" dirty="0"/>
+          </a:p>
+        </p:txBody>
+      </p:sp>
+      <p:sp>
+        <p:nvSpPr>
+          <p:cNvPr id="13" name="Text 10"/>
+          <p:cNvSpPr txBox="1"/>
+          <p:nvPr/>
+        </p:nvSpPr>
+        <p:spPr>
+          <a:xfrm>
+            <a:off x="3611880" y="3337560"/>
+            <a:ext cx="2103120" cy="2468880"/>
+          </a:xfrm>
+          <a:prstGeom prst="rect">
+            <a:avLst/>
+          </a:prstGeom>
+          <a:noFill/>
+          <a:ln/>
+        </p:spPr>
+        <p:txBody>
+          <a:bodyPr wrap="square" lIns="0" tIns="0" rIns="0" bIns="0" rtlCol="0" anchor="t"/>
+          <a:lstStyle/>
+          <a:p>
+            <a:pPr indent="0" marL="0">
+              <a:buNone/>
+            </a:pPr>
+            <a:r>
+              <a:rPr lang="en-US" sz="1500" dirty="0">
+                <a:solidFill>
+                  <a:srgbClr val="3B2A2A"/>
+                </a:solidFill>
+              </a:rPr>
+              <a:t>O uso formativo é o que mais se associa a ganhos.</a:t>
+            </a:r>
+            <a:endParaRPr lang="en-US" sz="1500" dirty="0"/>
+          </a:p>
+        </p:txBody>
+      </p:sp>
+      <p:sp>
+        <p:nvSpPr>
+          <p:cNvPr id="14" name="Shape 11"/>
+          <p:cNvSpPr/>
+          <p:nvPr/>
+        </p:nvSpPr>
+        <p:spPr>
+          <a:xfrm>
+            <a:off x="6217920" y="1463040"/>
+            <a:ext cx="2560320" cy="4480560"/>
+          </a:xfrm>
+          <a:prstGeom prst="roundRect">
+            <a:avLst>
+              <a:gd name="adj" fmla="val 5357"/>
+            </a:avLst>
+          </a:prstGeom>
+          <a:solidFill>
+            <a:srgbClr val="F7EFE6"/>
+          </a:solidFill>
+          <a:ln w="12700">
+            <a:solidFill>
+              <a:srgbClr val="F7EFE6"/>
+            </a:solidFill>
+            <a:prstDash val="solid"/>
+          </a:ln>
+          <a:effectLst>
+            <a:outerShdw sx="100000" sy="100000" kx="0" ky="0" algn="bl" rotWithShape="0" blurRad="76200" dist="25400" dir="5400000">
+              <a:srgbClr val="000000">
+                <a:alpha val="12000"/>
+              </a:srgbClr>
+            </a:outerShdw>
+          </a:effectLst>
+        </p:spPr>
+      </p:sp>
+      <p:sp>
+        <p:nvSpPr>
+          <p:cNvPr id="15" name="Shape 12"/>
+          <p:cNvSpPr/>
+          <p:nvPr/>
+        </p:nvSpPr>
+        <p:spPr>
+          <a:xfrm>
+            <a:off x="6446520" y="1691640"/>
+            <a:ext cx="640080" cy="640080"/>
+          </a:xfrm>
+          <a:prstGeom prst="ellipse">
+            <a:avLst/>
+          </a:prstGeom>
+          <a:solidFill>
+            <a:srgbClr val="6D3B6E"/>
+          </a:solidFill>
+          <a:ln w="12700">
+            <a:solidFill>
+              <a:srgbClr val="6D3B6E"/>
+            </a:solidFill>
+            <a:prstDash val="solid"/>
+          </a:ln>
+        </p:spPr>
+      </p:sp>
+      <p:sp>
+        <p:nvSpPr>
+          <p:cNvPr id="16" name="Text 13"/>
+          <p:cNvSpPr txBox="1"/>
+          <p:nvPr/>
+        </p:nvSpPr>
+        <p:spPr>
+          <a:xfrm>
+            <a:off x="6446520" y="1691640"/>
+            <a:ext cx="640080" cy="640080"/>
+          </a:xfrm>
+          <a:prstGeom prst="rect">
+            <a:avLst/>
+          </a:prstGeom>
+          <a:noFill/>
+          <a:ln/>
+        </p:spPr>
+        <p:txBody>
+          <a:bodyPr wrap="square" lIns="0" tIns="0" rIns="0" bIns="0" rtlCol="0" anchor="ctr"/>
+          <a:lstStyle/>
+          <a:p>
+            <a:pPr algn="ctr" indent="0" marL="0">
+              <a:buNone/>
+            </a:pPr>
+            <a:r>
+              <a:rPr lang="en-US" sz="1600" b="1" dirty="0">
+                <a:solidFill>
+                  <a:srgbClr val="FFFFFF"/>
+                </a:solidFill>
+                <a:latin typeface="Cambria" pitchFamily="34" charset="0"/>
+                <a:ea typeface="Cambria" pitchFamily="34" charset="-122"/>
+                <a:cs typeface="Cambria" pitchFamily="34" charset="-120"/>
+              </a:rPr>
+              <a:t>3</a:t>
+            </a:r>
+            <a:endParaRPr lang="en-US" sz="1600" dirty="0"/>
+          </a:p>
+        </p:txBody>
+      </p:sp>
+      <p:sp>
+        <p:nvSpPr>
+          <p:cNvPr id="17" name="Text 14"/>
+          <p:cNvSpPr txBox="1"/>
+          <p:nvPr/>
+        </p:nvSpPr>
+        <p:spPr>
+          <a:xfrm>
+            <a:off x="6446520" y="2468880"/>
+            <a:ext cx="2103120" cy="822960"/>
+          </a:xfrm>
+          <a:prstGeom prst="rect">
+            <a:avLst/>
+          </a:prstGeom>
+          <a:noFill/>
+          <a:ln/>
+        </p:spPr>
+        <p:txBody>
+          <a:bodyPr wrap="square" lIns="0" tIns="0" rIns="0" bIns="0" rtlCol="0" anchor="t"/>
+          <a:lstStyle/>
+          <a:p>
+            <a:pPr indent="0" marL="0">
+              <a:buNone/>
+            </a:pPr>
+            <a:r>
+              <a:rPr lang="en-US" sz="1800" b="1" dirty="0">
+                <a:solidFill>
+                  <a:srgbClr val="5A2E2A"/>
+                </a:solidFill>
+                <a:latin typeface="Cambria" pitchFamily="34" charset="0"/>
+                <a:ea typeface="Cambria" pitchFamily="34" charset="-122"/>
+                <a:cs typeface="Cambria" pitchFamily="34" charset="-120"/>
+              </a:rPr>
+              <a:t>Feedback por IA</a:t>
+            </a:r>
+            <a:endParaRPr lang="en-US" sz="1800" dirty="0"/>
+          </a:p>
+        </p:txBody>
+      </p:sp>
+      <p:sp>
+        <p:nvSpPr>
+          <p:cNvPr id="18" name="Text 15"/>
+          <p:cNvSpPr txBox="1"/>
+          <p:nvPr/>
+        </p:nvSpPr>
+        <p:spPr>
+          <a:xfrm>
+            <a:off x="6446520" y="3337560"/>
+            <a:ext cx="2103120" cy="2468880"/>
+          </a:xfrm>
+          <a:prstGeom prst="rect">
+            <a:avLst/>
+          </a:prstGeom>
+          <a:noFill/>
+          <a:ln/>
+        </p:spPr>
+        <p:txBody>
+          <a:bodyPr wrap="square" lIns="0" tIns="0" rIns="0" bIns="0" rtlCol="0" anchor="t"/>
+          <a:lstStyle/>
+          <a:p>
+            <a:pPr indent="0" marL="0">
+              <a:buNone/>
+            </a:pPr>
+            <a:r>
+              <a:rPr lang="en-US" sz="1500" dirty="0">
+                <a:solidFill>
+                  <a:srgbClr val="3B2A2A"/>
+                </a:solidFill>
+              </a:rPr>
+              <a:t>Estudos recentes e contextuais, com resultados mistos. Faltam dados na educação básica brasileira.</a:t>
+            </a:r>
+            <a:endParaRPr lang="en-US" sz="1500" dirty="0"/>
+          </a:p>
+        </p:txBody>
+      </p:sp>
+      <p:sp>
+        <p:nvSpPr>
+          <p:cNvPr id="19" name="Shape 16"/>
+          <p:cNvSpPr/>
+          <p:nvPr/>
+        </p:nvSpPr>
+        <p:spPr>
+          <a:xfrm>
+            <a:off x="9052560" y="1463040"/>
+            <a:ext cx="2560320" cy="4480560"/>
+          </a:xfrm>
+          <a:prstGeom prst="roundRect">
+            <a:avLst>
+              <a:gd name="adj" fmla="val 5357"/>
+            </a:avLst>
+          </a:prstGeom>
+          <a:solidFill>
+            <a:srgbClr val="F7EFE6"/>
+          </a:solidFill>
+          <a:ln w="12700">
+            <a:solidFill>
+              <a:srgbClr val="F7EFE6"/>
+            </a:solidFill>
+            <a:prstDash val="solid"/>
+          </a:ln>
+          <a:effectLst>
+            <a:outerShdw sx="100000" sy="100000" kx="0" ky="0" algn="bl" rotWithShape="0" blurRad="76200" dist="25400" dir="5400000">
+              <a:srgbClr val="000000">
+                <a:alpha val="12000"/>
+              </a:srgbClr>
+            </a:outerShdw>
+          </a:effectLst>
+        </p:spPr>
+      </p:sp>
+      <p:sp>
+        <p:nvSpPr>
+          <p:cNvPr id="20" name="Shape 17"/>
+          <p:cNvSpPr/>
+          <p:nvPr/>
+        </p:nvSpPr>
+        <p:spPr>
+          <a:xfrm>
+            <a:off x="9281160" y="1691640"/>
+            <a:ext cx="640080" cy="640080"/>
+          </a:xfrm>
+          <a:prstGeom prst="ellipse">
+            <a:avLst/>
+          </a:prstGeom>
+          <a:solidFill>
+            <a:srgbClr val="3D7EA6"/>
+          </a:solidFill>
+          <a:ln w="12700">
+            <a:solidFill>
+              <a:srgbClr val="3D7EA6"/>
+            </a:solidFill>
+            <a:prstDash val="solid"/>
+          </a:ln>
+        </p:spPr>
+      </p:sp>
+      <p:sp>
+        <p:nvSpPr>
+          <p:cNvPr id="21" name="Text 18"/>
+          <p:cNvSpPr txBox="1"/>
+          <p:nvPr/>
+        </p:nvSpPr>
+        <p:spPr>
+          <a:xfrm>
+            <a:off x="9281160" y="1691640"/>
+            <a:ext cx="640080" cy="640080"/>
+          </a:xfrm>
+          <a:prstGeom prst="rect">
+            <a:avLst/>
+          </a:prstGeom>
+          <a:noFill/>
+          <a:ln/>
+        </p:spPr>
+        <p:txBody>
+          <a:bodyPr wrap="square" lIns="0" tIns="0" rIns="0" bIns="0" rtlCol="0" anchor="ctr"/>
+          <a:lstStyle/>
+          <a:p>
+            <a:pPr algn="ctr" indent="0" marL="0">
+              <a:buNone/>
+            </a:pPr>
+            <a:r>
+              <a:rPr lang="en-US" sz="1600" b="1" dirty="0">
+                <a:solidFill>
+                  <a:srgbClr val="FFFFFF"/>
+                </a:solidFill>
+                <a:latin typeface="Cambria" pitchFamily="34" charset="0"/>
+                <a:ea typeface="Cambria" pitchFamily="34" charset="-122"/>
+                <a:cs typeface="Cambria" pitchFamily="34" charset="-120"/>
+              </a:rPr>
+              <a:t>4</a:t>
+            </a:r>
+            <a:endParaRPr lang="en-US" sz="1600" dirty="0"/>
+          </a:p>
+        </p:txBody>
+      </p:sp>
+      <p:sp>
+        <p:nvSpPr>
+          <p:cNvPr id="22" name="Text 19"/>
+          <p:cNvSpPr txBox="1"/>
+          <p:nvPr/>
+        </p:nvSpPr>
+        <p:spPr>
+          <a:xfrm>
+            <a:off x="9281160" y="2468880"/>
+            <a:ext cx="2103120" cy="822960"/>
+          </a:xfrm>
+          <a:prstGeom prst="rect">
+            <a:avLst/>
+          </a:prstGeom>
+          <a:noFill/>
+          <a:ln/>
+        </p:spPr>
+        <p:txBody>
+          <a:bodyPr wrap="square" lIns="0" tIns="0" rIns="0" bIns="0" rtlCol="0" anchor="t"/>
+          <a:lstStyle/>
+          <a:p>
+            <a:pPr indent="0" marL="0">
+              <a:buNone/>
+            </a:pPr>
+            <a:r>
+              <a:rPr lang="en-US" sz="1800" b="1" dirty="0">
+                <a:solidFill>
+                  <a:srgbClr val="5A2E2A"/>
+                </a:solidFill>
+                <a:latin typeface="Cambria" pitchFamily="34" charset="0"/>
+                <a:ea typeface="Cambria" pitchFamily="34" charset="-122"/>
+                <a:cs typeface="Cambria" pitchFamily="34" charset="-120"/>
+              </a:rPr>
+              <a:t>Detectores</a:t>
+            </a:r>
+            <a:endParaRPr lang="en-US" sz="1800" dirty="0"/>
+          </a:p>
+        </p:txBody>
+      </p:sp>
+      <p:sp>
+        <p:nvSpPr>
+          <p:cNvPr id="23" name="Text 20"/>
+          <p:cNvSpPr txBox="1"/>
+          <p:nvPr/>
+        </p:nvSpPr>
+        <p:spPr>
+          <a:xfrm>
+            <a:off x="9281160" y="3337560"/>
+            <a:ext cx="2103120" cy="2468880"/>
+          </a:xfrm>
+          <a:prstGeom prst="rect">
+            <a:avLst/>
+          </a:prstGeom>
+          <a:noFill/>
+          <a:ln/>
+        </p:spPr>
+        <p:txBody>
+          <a:bodyPr wrap="square" lIns="0" tIns="0" rIns="0" bIns="0" rtlCol="0" anchor="t"/>
+          <a:lstStyle/>
+          <a:p>
+            <a:pPr indent="0" marL="0">
+              <a:buNone/>
+            </a:pPr>
+            <a:r>
+              <a:rPr lang="en-US" sz="1500" dirty="0">
+                <a:solidFill>
+                  <a:srgbClr val="3B2A2A"/>
+                </a:solidFill>
+              </a:rPr>
+              <a:t>Limitações importantes e viés contra escritores não nativos.</a:t>
+            </a:r>
+            <a:endParaRPr lang="en-US" sz="1500" dirty="0"/>
+          </a:p>
+        </p:txBody>
+      </p:sp>
+      <p:sp>
+        <p:nvSpPr>
+          <p:cNvPr id="24" name="Text 21"/>
           <p:cNvSpPr txBox="1"/>
           <p:nvPr/>
         </p:nvSpPr>
@@ -6313,7 +6880,7 @@
                 <a:ea typeface="Cambria" pitchFamily="34" charset="-122"/>
                 <a:cs typeface="Cambria" pitchFamily="34" charset="-120"/>
               </a:rPr>
-              <a:t>O que a pesquisa permite afirmar</a:t>
+              <a:t>Atividade 1: diagnóstico de entrada e plano de ação</a:t>
             </a:r>
             <a:endParaRPr lang="en-US" sz="3400" dirty="0"/>
           </a:p>
@@ -6327,12 +6894,12 @@
         </p:nvSpPr>
         <p:spPr>
           <a:xfrm>
-            <a:off x="548640" y="1463040"/>
-            <a:ext cx="2560320" cy="4480560"/>
+            <a:off x="548640" y="1417320"/>
+            <a:ext cx="6949440" cy="4663440"/>
           </a:xfrm>
           <a:prstGeom prst="roundRect">
             <a:avLst>
-              <a:gd name="adj" fmla="val 5357"/>
+              <a:gd name="adj" fmla="val 2941"/>
             </a:avLst>
           </a:prstGeom>
           <a:solidFill>
@@ -6344,28 +6911,195 @@
             </a:solidFill>
             <a:prstDash val="solid"/>
           </a:ln>
-          <a:effectLst>
-            <a:outerShdw sx="100000" sy="100000" kx="0" ky="0" algn="bl" rotWithShape="0" blurRad="76200" dist="25400" dir="5400000">
-              <a:srgbClr val="000000">
-                <a:alpha val="12000"/>
-              </a:srgbClr>
-            </a:outerShdw>
-          </a:effectLst>
-        </p:spPr>
-      </p:sp>
-      <p:sp>
-        <p:nvSpPr>
-          <p:cNvPr id="5" name="Shape 2"/>
+        </p:spPr>
+      </p:sp>
+      <p:sp>
+        <p:nvSpPr>
+          <p:cNvPr id="5" name="Text 2"/>
+          <p:cNvSpPr txBox="1"/>
+          <p:nvPr/>
+        </p:nvSpPr>
+        <p:spPr>
+          <a:xfrm>
+            <a:off x="822960" y="1554480"/>
+            <a:ext cx="5486400" cy="365760"/>
+          </a:xfrm>
+          <a:prstGeom prst="rect">
+            <a:avLst/>
+          </a:prstGeom>
+          <a:noFill/>
+          <a:ln/>
+        </p:spPr>
+        <p:txBody>
+          <a:bodyPr wrap="square" lIns="0" tIns="0" rIns="0" bIns="0" rtlCol="0" anchor="ctr"/>
+          <a:lstStyle/>
+          <a:p>
+            <a:pPr indent="0" marL="0">
+              <a:buNone/>
+            </a:pPr>
+            <a:r>
+              <a:rPr lang="en-US" sz="1300" b="1" spc="300" kern="0" dirty="0">
+                <a:solidFill>
+                  <a:srgbClr val="6D3B6E"/>
+                </a:solidFill>
+              </a:rPr>
+              <a:t>PASSO A PASSO</a:t>
+            </a:r>
+            <a:endParaRPr lang="en-US" sz="1300" dirty="0"/>
+          </a:p>
+        </p:txBody>
+      </p:sp>
+      <p:sp>
+        <p:nvSpPr>
+          <p:cNvPr id="6" name="Text 3"/>
+          <p:cNvSpPr txBox="1"/>
+          <p:nvPr/>
+        </p:nvSpPr>
+        <p:spPr>
+          <a:xfrm>
+            <a:off x="822960" y="1965960"/>
+            <a:ext cx="6400800" cy="4023360"/>
+          </a:xfrm>
+          <a:prstGeom prst="rect">
+            <a:avLst/>
+          </a:prstGeom>
+          <a:noFill/>
+          <a:ln/>
+        </p:spPr>
+        <p:txBody>
+          <a:bodyPr wrap="square" lIns="0" tIns="0" rIns="0" bIns="0" rtlCol="0" anchor="t"/>
+          <a:lstStyle/>
+          <a:p>
+            <a:pPr marL="342900" indent="-342900">
+              <a:spcAft>
+                <a:spcPts val="600"/>
+              </a:spcAft>
+              <a:buSzPct val="100000"/>
+              <a:buFont typeface="+mj-lt"/>
+              <a:buAutoNum type="arabicPeriod" startAt="1"/>
+            </a:pPr>
+            <a:r>
+              <a:rPr lang="en-US" sz="1600" dirty="0">
+                <a:solidFill>
+                  <a:srgbClr val="3B2A2A"/>
+                </a:solidFill>
+              </a:rPr>
+              <a:t>Escolher o conceito central e listar equívocos prováveis</a:t>
+            </a:r>
+            <a:endParaRPr lang="en-US" sz="1600" dirty="0"/>
+          </a:p>
+          <a:p>
+            <a:pPr marL="342900" indent="-342900">
+              <a:spcAft>
+                <a:spcPts val="600"/>
+              </a:spcAft>
+              <a:buSzPct val="100000"/>
+              <a:buFont typeface="+mj-lt"/>
+              <a:buAutoNum type="arabicPeriod" startAt="1"/>
+            </a:pPr>
+            <a:r>
+              <a:rPr lang="en-US" sz="1600" dirty="0">
+                <a:solidFill>
+                  <a:srgbClr val="3B2A2A"/>
+                </a:solidFill>
+              </a:rPr>
+              <a:t>Rascunhar itens com distratores (IA opcional)</a:t>
+            </a:r>
+            <a:endParaRPr lang="en-US" sz="1600" dirty="0"/>
+          </a:p>
+          <a:p>
+            <a:pPr marL="342900" indent="-342900">
+              <a:spcAft>
+                <a:spcPts val="600"/>
+              </a:spcAft>
+              <a:buSzPct val="100000"/>
+              <a:buFont typeface="+mj-lt"/>
+              <a:buAutoNum type="arabicPeriod" startAt="1"/>
+            </a:pPr>
+            <a:r>
+              <a:rPr lang="en-US" sz="1600" dirty="0">
+                <a:solidFill>
+                  <a:srgbClr val="3B2A2A"/>
+                </a:solidFill>
+              </a:rPr>
+              <a:t>Resolver, validar e ficar com quatro a seis itens</a:t>
+            </a:r>
+            <a:endParaRPr lang="en-US" sz="1600" dirty="0"/>
+          </a:p>
+          <a:p>
+            <a:pPr marL="342900" indent="-342900">
+              <a:spcAft>
+                <a:spcPts val="600"/>
+              </a:spcAft>
+              <a:buSzPct val="100000"/>
+              <a:buFont typeface="+mj-lt"/>
+              <a:buAutoNum type="arabicPeriod" startAt="1"/>
+            </a:pPr>
+            <a:r>
+              <a:rPr lang="en-US" sz="1600" dirty="0">
+                <a:solidFill>
+                  <a:srgbClr val="3B2A2A"/>
+                </a:solidFill>
+              </a:rPr>
+              <a:t>Aplicar em 15 min, sem nota, com justificativa em uma frase</a:t>
+            </a:r>
+            <a:endParaRPr lang="en-US" sz="1600" dirty="0"/>
+          </a:p>
+          <a:p>
+            <a:pPr marL="342900" indent="-342900">
+              <a:spcAft>
+                <a:spcPts val="600"/>
+              </a:spcAft>
+              <a:buSzPct val="100000"/>
+              <a:buFont typeface="+mj-lt"/>
+              <a:buAutoNum type="arabicPeriod" startAt="1"/>
+            </a:pPr>
+            <a:r>
+              <a:rPr lang="en-US" sz="1600" dirty="0">
+                <a:solidFill>
+                  <a:srgbClr val="3B2A2A"/>
+                </a:solidFill>
+              </a:rPr>
+              <a:t>Tabular e decidir uma ação por equívoco frequente</a:t>
+            </a:r>
+            <a:endParaRPr lang="en-US" sz="1600" dirty="0"/>
+          </a:p>
+          <a:p>
+            <a:pPr marL="342900" indent="-342900">
+              <a:spcAft>
+                <a:spcPts val="600"/>
+              </a:spcAft>
+              <a:buSzPct val="100000"/>
+              <a:buFont typeface="+mj-lt"/>
+              <a:buAutoNum type="arabicPeriod" startAt="1"/>
+            </a:pPr>
+            <a:r>
+              <a:rPr lang="en-US" sz="1600" dirty="0">
+                <a:solidFill>
+                  <a:srgbClr val="3B2A2A"/>
+                </a:solidFill>
+              </a:rPr>
+              <a:t>Devolver o padrão geral à turma, sem expor indivíduos</a:t>
+            </a:r>
+            <a:endParaRPr lang="en-US" sz="1600" dirty="0"/>
+          </a:p>
+        </p:txBody>
+      </p:sp>
+      <p:sp>
+        <p:nvSpPr>
+          <p:cNvPr id="7" name="Shape 4"/>
           <p:cNvSpPr/>
           <p:nvPr/>
         </p:nvSpPr>
         <p:spPr>
           <a:xfrm>
-            <a:off x="777240" y="1691640"/>
-            <a:ext cx="640080" cy="640080"/>
-          </a:xfrm>
-          <a:prstGeom prst="ellipse">
-            <a:avLst/>
+            <a:off x="7772400" y="1417320"/>
+            <a:ext cx="3840480" cy="1444752"/>
+          </a:xfrm>
+          <a:prstGeom prst="roundRect">
+            <a:avLst>
+              <a:gd name="adj" fmla="val 9494"/>
+            </a:avLst>
           </a:prstGeom>
           <a:solidFill>
             <a:srgbClr val="6D3B6E"/>
@@ -6380,14 +7114,14 @@
       </p:sp>
       <p:sp>
         <p:nvSpPr>
-          <p:cNvPr id="6" name="Text 3"/>
-          <p:cNvSpPr txBox="1"/>
-          <p:nvPr/>
-        </p:nvSpPr>
-        <p:spPr>
-          <a:xfrm>
-            <a:off x="777240" y="1691640"/>
-            <a:ext cx="640080" cy="640080"/>
+          <p:cNvPr id="8" name="Text 5"/>
+          <p:cNvSpPr txBox="1"/>
+          <p:nvPr/>
+        </p:nvSpPr>
+        <p:spPr>
+          <a:xfrm>
+            <a:off x="8001000" y="1527048"/>
+            <a:ext cx="3383280" cy="320040"/>
           </a:xfrm>
           <a:prstGeom prst="rect">
             <a:avLst/>
@@ -6399,19 +7133,52 @@
           <a:bodyPr wrap="square" lIns="0" tIns="0" rIns="0" bIns="0" rtlCol="0" anchor="ctr"/>
           <a:lstStyle/>
           <a:p>
-            <a:pPr algn="ctr" indent="0" marL="0">
-              <a:buNone/>
-            </a:pPr>
-            <a:r>
-              <a:rPr lang="en-US" sz="1600" b="1" dirty="0">
+            <a:pPr indent="0" marL="0">
+              <a:buNone/>
+            </a:pPr>
+            <a:r>
+              <a:rPr lang="en-US" sz="1200" b="1" spc="300" kern="0" dirty="0">
                 <a:solidFill>
                   <a:srgbClr val="FFFFFF"/>
                 </a:solidFill>
-                <a:latin typeface="Cambria" pitchFamily="34" charset="0"/>
-                <a:ea typeface="Cambria" pitchFamily="34" charset="-122"/>
-                <a:cs typeface="Cambria" pitchFamily="34" charset="-120"/>
-              </a:rPr>
-              <a:t>1</a:t>
+              </a:rPr>
+              <a:t>TEMPO</a:t>
+            </a:r>
+            <a:endParaRPr lang="en-US" sz="1200" dirty="0"/>
+          </a:p>
+        </p:txBody>
+      </p:sp>
+      <p:sp>
+        <p:nvSpPr>
+          <p:cNvPr id="9" name="Text 6"/>
+          <p:cNvSpPr txBox="1"/>
+          <p:nvPr/>
+        </p:nvSpPr>
+        <p:spPr>
+          <a:xfrm>
+            <a:off x="8001000" y="1874520"/>
+            <a:ext cx="3383280" cy="896112"/>
+          </a:xfrm>
+          <a:prstGeom prst="rect">
+            <a:avLst/>
+          </a:prstGeom>
+          <a:noFill/>
+          <a:ln/>
+        </p:spPr>
+        <p:txBody>
+          <a:bodyPr wrap="square" lIns="0" tIns="0" rIns="0" bIns="0" rtlCol="0" anchor="t"/>
+          <a:lstStyle/>
+          <a:p>
+            <a:pPr indent="0" marL="0">
+              <a:buNone/>
+            </a:pPr>
+            <a:r>
+              <a:rPr lang="en-US" sz="1600" dirty="0">
+                <a:solidFill>
+                  <a:srgbClr val="FFFFFF"/>
+                </a:solidFill>
+              </a:rPr>
+              <a:t>60 min preparo, 15 min aplicação, 30 min análise</a:t>
             </a:r>
             <a:endParaRPr lang="en-US" sz="1600" dirty="0"/>
           </a:p>
@@ -6419,126 +7186,19 @@
       </p:sp>
       <p:sp>
         <p:nvSpPr>
-          <p:cNvPr id="7" name="Text 4"/>
-          <p:cNvSpPr txBox="1"/>
-          <p:nvPr/>
-        </p:nvSpPr>
-        <p:spPr>
-          <a:xfrm>
-            <a:off x="777240" y="2468880"/>
-            <a:ext cx="2103120" cy="822960"/>
-          </a:xfrm>
-          <a:prstGeom prst="rect">
-            <a:avLst/>
-          </a:prstGeom>
-          <a:noFill/>
-          <a:ln/>
-        </p:spPr>
-        <p:txBody>
-          <a:bodyPr wrap="square" lIns="0" tIns="0" rIns="0" bIns="0" rtlCol="0" anchor="t"/>
-          <a:lstStyle/>
-          <a:p>
-            <a:pPr indent="0" marL="0">
-              <a:buNone/>
-            </a:pPr>
-            <a:r>
-              <a:rPr lang="en-US" sz="1800" b="1" dirty="0">
-                <a:solidFill>
-                  <a:srgbClr val="5A2E2A"/>
-                </a:solidFill>
-                <a:latin typeface="Cambria" pitchFamily="34" charset="0"/>
-                <a:ea typeface="Cambria" pitchFamily="34" charset="-122"/>
-                <a:cs typeface="Cambria" pitchFamily="34" charset="-120"/>
-              </a:rPr>
-              <a:t>Formativa e feedback</a:t>
-            </a:r>
-            <a:endParaRPr lang="en-US" sz="1800" dirty="0"/>
-          </a:p>
-        </p:txBody>
-      </p:sp>
-      <p:sp>
-        <p:nvSpPr>
-          <p:cNvPr id="8" name="Text 5"/>
-          <p:cNvSpPr txBox="1"/>
-          <p:nvPr/>
-        </p:nvSpPr>
-        <p:spPr>
-          <a:xfrm>
-            <a:off x="777240" y="3337560"/>
-            <a:ext cx="2103120" cy="2468880"/>
-          </a:xfrm>
-          <a:prstGeom prst="rect">
-            <a:avLst/>
-          </a:prstGeom>
-          <a:noFill/>
-          <a:ln/>
-        </p:spPr>
-        <p:txBody>
-          <a:bodyPr wrap="square" lIns="0" tIns="0" rIns="0" bIns="0" rtlCol="0" anchor="t"/>
-          <a:lstStyle/>
-          <a:p>
-            <a:pPr indent="0" marL="0">
-              <a:buNone/>
-            </a:pPr>
-            <a:r>
-              <a:rPr lang="en-US" sz="1500" dirty="0">
-                <a:solidFill>
-                  <a:srgbClr val="3B2A2A"/>
-                </a:solidFill>
-              </a:rPr>
-              <a:t>Podem ajudar a aprender, com grande variação conforme tipo, tarefa e contexto.</a:t>
-            </a:r>
-            <a:endParaRPr lang="en-US" sz="1500" dirty="0"/>
-          </a:p>
-        </p:txBody>
-      </p:sp>
-      <p:sp>
-        <p:nvSpPr>
-          <p:cNvPr id="9" name="Shape 6"/>
+          <p:cNvPr id="10" name="Shape 7"/>
           <p:cNvSpPr/>
           <p:nvPr/>
         </p:nvSpPr>
         <p:spPr>
           <a:xfrm>
-            <a:off x="3383280" y="1463040"/>
-            <a:ext cx="2560320" cy="4480560"/>
+            <a:off x="7772400" y="3026664"/>
+            <a:ext cx="3840480" cy="1444752"/>
           </a:xfrm>
           <a:prstGeom prst="roundRect">
             <a:avLst>
-              <a:gd name="adj" fmla="val 5357"/>
+              <a:gd name="adj" fmla="val 9494"/>
             </a:avLst>
-          </a:prstGeom>
-          <a:solidFill>
-            <a:srgbClr val="F7EFE6"/>
-          </a:solidFill>
-          <a:ln w="12700">
-            <a:solidFill>
-              <a:srgbClr val="F7EFE6"/>
-            </a:solidFill>
-            <a:prstDash val="solid"/>
-          </a:ln>
-          <a:effectLst>
-            <a:outerShdw sx="100000" sy="100000" kx="0" ky="0" algn="bl" rotWithShape="0" blurRad="76200" dist="25400" dir="5400000">
-              <a:srgbClr val="000000">
-                <a:alpha val="12000"/>
-              </a:srgbClr>
-            </a:outerShdw>
-          </a:effectLst>
-        </p:spPr>
-      </p:sp>
-      <p:sp>
-        <p:nvSpPr>
-          <p:cNvPr id="10" name="Shape 7"/>
-          <p:cNvSpPr/>
-          <p:nvPr/>
-        </p:nvSpPr>
-        <p:spPr>
-          <a:xfrm>
-            <a:off x="3611880" y="1691640"/>
-            <a:ext cx="640080" cy="640080"/>
-          </a:xfrm>
-          <a:prstGeom prst="ellipse">
-            <a:avLst/>
           </a:prstGeom>
           <a:solidFill>
             <a:srgbClr val="2A9D8F"/>
@@ -6559,8 +7219,8 @@
         </p:nvSpPr>
         <p:spPr>
           <a:xfrm>
-            <a:off x="3611880" y="1691640"/>
-            <a:ext cx="640080" cy="640080"/>
+            <a:off x="8001000" y="3136392"/>
+            <a:ext cx="3383280" cy="320040"/>
           </a:xfrm>
           <a:prstGeom prst="rect">
             <a:avLst/>
@@ -6572,19 +7232,52 @@
           <a:bodyPr wrap="square" lIns="0" tIns="0" rIns="0" bIns="0" rtlCol="0" anchor="ctr"/>
           <a:lstStyle/>
           <a:p>
-            <a:pPr algn="ctr" indent="0" marL="0">
-              <a:buNone/>
-            </a:pPr>
-            <a:r>
-              <a:rPr lang="en-US" sz="1600" b="1" dirty="0">
+            <a:pPr indent="0" marL="0">
+              <a:buNone/>
+            </a:pPr>
+            <a:r>
+              <a:rPr lang="en-US" sz="1200" b="1" spc="300" kern="0" dirty="0">
                 <a:solidFill>
                   <a:srgbClr val="FFFFFF"/>
                 </a:solidFill>
-                <a:latin typeface="Cambria" pitchFamily="34" charset="0"/>
-                <a:ea typeface="Cambria" pitchFamily="34" charset="-122"/>
-                <a:cs typeface="Cambria" pitchFamily="34" charset="-120"/>
-              </a:rPr>
-              <a:t>2</a:t>
+              </a:rPr>
+              <a:t>PRODUTO</a:t>
+            </a:r>
+            <a:endParaRPr lang="en-US" sz="1200" dirty="0"/>
+          </a:p>
+        </p:txBody>
+      </p:sp>
+      <p:sp>
+        <p:nvSpPr>
+          <p:cNvPr id="12" name="Text 9"/>
+          <p:cNvSpPr txBox="1"/>
+          <p:nvPr/>
+        </p:nvSpPr>
+        <p:spPr>
+          <a:xfrm>
+            <a:off x="8001000" y="3483864"/>
+            <a:ext cx="3383280" cy="896112"/>
+          </a:xfrm>
+          <a:prstGeom prst="rect">
+            <a:avLst/>
+          </a:prstGeom>
+          <a:noFill/>
+          <a:ln/>
+        </p:spPr>
+        <p:txBody>
+          <a:bodyPr wrap="square" lIns="0" tIns="0" rIns="0" bIns="0" rtlCol="0" anchor="t"/>
+          <a:lstStyle/>
+          <a:p>
+            <a:pPr indent="0" marL="0">
+              <a:buNone/>
+            </a:pPr>
+            <a:r>
+              <a:rPr lang="en-US" sz="1600" dirty="0">
+                <a:solidFill>
+                  <a:srgbClr val="FFFFFF"/>
+                </a:solidFill>
+              </a:rPr>
+              <a:t>Diagnóstico de 4 a 6 itens, folha de tabulação e plano da aula seguinte</a:t>
             </a:r>
             <a:endParaRPr lang="en-US" sz="1600" dirty="0"/>
           </a:p>
@@ -6592,126 +7285,19 @@
       </p:sp>
       <p:sp>
         <p:nvSpPr>
-          <p:cNvPr id="12" name="Text 9"/>
-          <p:cNvSpPr txBox="1"/>
-          <p:nvPr/>
-        </p:nvSpPr>
-        <p:spPr>
-          <a:xfrm>
-            <a:off x="3611880" y="2468880"/>
-            <a:ext cx="2103120" cy="822960"/>
-          </a:xfrm>
-          <a:prstGeom prst="rect">
-            <a:avLst/>
-          </a:prstGeom>
-          <a:noFill/>
-          <a:ln/>
-        </p:spPr>
-        <p:txBody>
-          <a:bodyPr wrap="square" lIns="0" tIns="0" rIns="0" bIns="0" rtlCol="0" anchor="t"/>
-          <a:lstStyle/>
-          <a:p>
-            <a:pPr indent="0" marL="0">
-              <a:buNone/>
-            </a:pPr>
-            <a:r>
-              <a:rPr lang="en-US" sz="1800" b="1" dirty="0">
-                <a:solidFill>
-                  <a:srgbClr val="5A2E2A"/>
-                </a:solidFill>
-                <a:latin typeface="Cambria" pitchFamily="34" charset="0"/>
-                <a:ea typeface="Cambria" pitchFamily="34" charset="-122"/>
-                <a:cs typeface="Cambria" pitchFamily="34" charset="-120"/>
-              </a:rPr>
-              <a:t>Rubricas</a:t>
-            </a:r>
-            <a:endParaRPr lang="en-US" sz="1800" dirty="0"/>
-          </a:p>
-        </p:txBody>
-      </p:sp>
-      <p:sp>
-        <p:nvSpPr>
-          <p:cNvPr id="13" name="Text 10"/>
-          <p:cNvSpPr txBox="1"/>
-          <p:nvPr/>
-        </p:nvSpPr>
-        <p:spPr>
-          <a:xfrm>
-            <a:off x="3611880" y="3337560"/>
-            <a:ext cx="2103120" cy="2468880"/>
-          </a:xfrm>
-          <a:prstGeom prst="rect">
-            <a:avLst/>
-          </a:prstGeom>
-          <a:noFill/>
-          <a:ln/>
-        </p:spPr>
-        <p:txBody>
-          <a:bodyPr wrap="square" lIns="0" tIns="0" rIns="0" bIns="0" rtlCol="0" anchor="t"/>
-          <a:lstStyle/>
-          <a:p>
-            <a:pPr indent="0" marL="0">
-              <a:buNone/>
-            </a:pPr>
-            <a:r>
-              <a:rPr lang="en-US" sz="1500" dirty="0">
-                <a:solidFill>
-                  <a:srgbClr val="3B2A2A"/>
-                </a:solidFill>
-              </a:rPr>
-              <a:t>O uso formativo é o que mais se associa a ganhos.</a:t>
-            </a:r>
-            <a:endParaRPr lang="en-US" sz="1500" dirty="0"/>
-          </a:p>
-        </p:txBody>
-      </p:sp>
-      <p:sp>
-        <p:nvSpPr>
-          <p:cNvPr id="14" name="Shape 11"/>
+          <p:cNvPr id="13" name="Shape 10"/>
           <p:cNvSpPr/>
           <p:nvPr/>
         </p:nvSpPr>
         <p:spPr>
           <a:xfrm>
-            <a:off x="6217920" y="1463040"/>
-            <a:ext cx="2560320" cy="4480560"/>
+            <a:off x="7772400" y="4636008"/>
+            <a:ext cx="3840480" cy="1444752"/>
           </a:xfrm>
           <a:prstGeom prst="roundRect">
             <a:avLst>
-              <a:gd name="adj" fmla="val 5357"/>
+              <a:gd name="adj" fmla="val 9494"/>
             </a:avLst>
-          </a:prstGeom>
-          <a:solidFill>
-            <a:srgbClr val="F7EFE6"/>
-          </a:solidFill>
-          <a:ln w="12700">
-            <a:solidFill>
-              <a:srgbClr val="F7EFE6"/>
-            </a:solidFill>
-            <a:prstDash val="solid"/>
-          </a:ln>
-          <a:effectLst>
-            <a:outerShdw sx="100000" sy="100000" kx="0" ky="0" algn="bl" rotWithShape="0" blurRad="76200" dist="25400" dir="5400000">
-              <a:srgbClr val="000000">
-                <a:alpha val="12000"/>
-              </a:srgbClr>
-            </a:outerShdw>
-          </a:effectLst>
-        </p:spPr>
-      </p:sp>
-      <p:sp>
-        <p:nvSpPr>
-          <p:cNvPr id="15" name="Shape 12"/>
-          <p:cNvSpPr/>
-          <p:nvPr/>
-        </p:nvSpPr>
-        <p:spPr>
-          <a:xfrm>
-            <a:off x="6446520" y="1691640"/>
-            <a:ext cx="640080" cy="640080"/>
-          </a:xfrm>
-          <a:prstGeom prst="ellipse">
-            <a:avLst/>
           </a:prstGeom>
           <a:solidFill>
             <a:srgbClr val="6D3B6E"/>
@@ -6726,294 +7312,79 @@
       </p:sp>
       <p:sp>
         <p:nvSpPr>
+          <p:cNvPr id="14" name="Text 11"/>
+          <p:cNvSpPr txBox="1"/>
+          <p:nvPr/>
+        </p:nvSpPr>
+        <p:spPr>
+          <a:xfrm>
+            <a:off x="8001000" y="4745736"/>
+            <a:ext cx="3383280" cy="320040"/>
+          </a:xfrm>
+          <a:prstGeom prst="rect">
+            <a:avLst/>
+          </a:prstGeom>
+          <a:noFill/>
+          <a:ln/>
+        </p:spPr>
+        <p:txBody>
+          <a:bodyPr wrap="square" lIns="0" tIns="0" rIns="0" bIns="0" rtlCol="0" anchor="ctr"/>
+          <a:lstStyle/>
+          <a:p>
+            <a:pPr indent="0" marL="0">
+              <a:buNone/>
+            </a:pPr>
+            <a:r>
+              <a:rPr lang="en-US" sz="1200" b="1" spc="300" kern="0" dirty="0">
+                <a:solidFill>
+                  <a:srgbClr val="FFFFFF"/>
+                </a:solidFill>
+              </a:rPr>
+              <a:t>POUCOS RECURSOS</a:t>
+            </a:r>
+            <a:endParaRPr lang="en-US" sz="1200" dirty="0"/>
+          </a:p>
+        </p:txBody>
+      </p:sp>
+      <p:sp>
+        <p:nvSpPr>
+          <p:cNvPr id="15" name="Text 12"/>
+          <p:cNvSpPr txBox="1"/>
+          <p:nvPr/>
+        </p:nvSpPr>
+        <p:spPr>
+          <a:xfrm>
+            <a:off x="8001000" y="5093208"/>
+            <a:ext cx="3383280" cy="896112"/>
+          </a:xfrm>
+          <a:prstGeom prst="rect">
+            <a:avLst/>
+          </a:prstGeom>
+          <a:noFill/>
+          <a:ln/>
+        </p:spPr>
+        <p:txBody>
+          <a:bodyPr wrap="square" lIns="0" tIns="0" rIns="0" bIns="0" rtlCol="0" anchor="t"/>
+          <a:lstStyle/>
+          <a:p>
+            <a:pPr indent="0" marL="0">
+              <a:buNone/>
+            </a:pPr>
+            <a:r>
+              <a:rPr lang="en-US" sz="1600" dirty="0">
+                <a:solidFill>
+                  <a:srgbClr val="FFFFFF"/>
+                </a:solidFill>
+              </a:rPr>
+              <a:t>Itens no quadro e cartões A, B, C e D de folha dobrada; contagem manual.</a:t>
+            </a:r>
+            <a:endParaRPr lang="en-US" sz="1600" dirty="0"/>
+          </a:p>
+        </p:txBody>
+      </p:sp>
+      <p:sp>
+        <p:nvSpPr>
           <p:cNvPr id="16" name="Text 13"/>
-          <p:cNvSpPr txBox="1"/>
-          <p:nvPr/>
-        </p:nvSpPr>
-        <p:spPr>
-          <a:xfrm>
-            <a:off x="6446520" y="1691640"/>
-            <a:ext cx="640080" cy="640080"/>
-          </a:xfrm>
-          <a:prstGeom prst="rect">
-            <a:avLst/>
-          </a:prstGeom>
-          <a:noFill/>
-          <a:ln/>
-        </p:spPr>
-        <p:txBody>
-          <a:bodyPr wrap="square" lIns="0" tIns="0" rIns="0" bIns="0" rtlCol="0" anchor="ctr"/>
-          <a:lstStyle/>
-          <a:p>
-            <a:pPr algn="ctr" indent="0" marL="0">
-              <a:buNone/>
-            </a:pPr>
-            <a:r>
-              <a:rPr lang="en-US" sz="1600" b="1" dirty="0">
-                <a:solidFill>
-                  <a:srgbClr val="FFFFFF"/>
-                </a:solidFill>
-                <a:latin typeface="Cambria" pitchFamily="34" charset="0"/>
-                <a:ea typeface="Cambria" pitchFamily="34" charset="-122"/>
-                <a:cs typeface="Cambria" pitchFamily="34" charset="-120"/>
-              </a:rPr>
-              <a:t>3</a:t>
-            </a:r>
-            <a:endParaRPr lang="en-US" sz="1600" dirty="0"/>
-          </a:p>
-        </p:txBody>
-      </p:sp>
-      <p:sp>
-        <p:nvSpPr>
-          <p:cNvPr id="17" name="Text 14"/>
-          <p:cNvSpPr txBox="1"/>
-          <p:nvPr/>
-        </p:nvSpPr>
-        <p:spPr>
-          <a:xfrm>
-            <a:off x="6446520" y="2468880"/>
-            <a:ext cx="2103120" cy="822960"/>
-          </a:xfrm>
-          <a:prstGeom prst="rect">
-            <a:avLst/>
-          </a:prstGeom>
-          <a:noFill/>
-          <a:ln/>
-        </p:spPr>
-        <p:txBody>
-          <a:bodyPr wrap="square" lIns="0" tIns="0" rIns="0" bIns="0" rtlCol="0" anchor="t"/>
-          <a:lstStyle/>
-          <a:p>
-            <a:pPr indent="0" marL="0">
-              <a:buNone/>
-            </a:pPr>
-            <a:r>
-              <a:rPr lang="en-US" sz="1800" b="1" dirty="0">
-                <a:solidFill>
-                  <a:srgbClr val="5A2E2A"/>
-                </a:solidFill>
-                <a:latin typeface="Cambria" pitchFamily="34" charset="0"/>
-                <a:ea typeface="Cambria" pitchFamily="34" charset="-122"/>
-                <a:cs typeface="Cambria" pitchFamily="34" charset="-120"/>
-              </a:rPr>
-              <a:t>Feedback por IA</a:t>
-            </a:r>
-            <a:endParaRPr lang="en-US" sz="1800" dirty="0"/>
-          </a:p>
-        </p:txBody>
-      </p:sp>
-      <p:sp>
-        <p:nvSpPr>
-          <p:cNvPr id="18" name="Text 15"/>
-          <p:cNvSpPr txBox="1"/>
-          <p:nvPr/>
-        </p:nvSpPr>
-        <p:spPr>
-          <a:xfrm>
-            <a:off x="6446520" y="3337560"/>
-            <a:ext cx="2103120" cy="2468880"/>
-          </a:xfrm>
-          <a:prstGeom prst="rect">
-            <a:avLst/>
-          </a:prstGeom>
-          <a:noFill/>
-          <a:ln/>
-        </p:spPr>
-        <p:txBody>
-          <a:bodyPr wrap="square" lIns="0" tIns="0" rIns="0" bIns="0" rtlCol="0" anchor="t"/>
-          <a:lstStyle/>
-          <a:p>
-            <a:pPr indent="0" marL="0">
-              <a:buNone/>
-            </a:pPr>
-            <a:r>
-              <a:rPr lang="en-US" sz="1500" dirty="0">
-                <a:solidFill>
-                  <a:srgbClr val="3B2A2A"/>
-                </a:solidFill>
-              </a:rPr>
-              <a:t>Estudos recentes e contextuais, com resultados mistos. Faltam dados na educação básica brasileira.</a:t>
-            </a:r>
-            <a:endParaRPr lang="en-US" sz="1500" dirty="0"/>
-          </a:p>
-        </p:txBody>
-      </p:sp>
-      <p:sp>
-        <p:nvSpPr>
-          <p:cNvPr id="19" name="Shape 16"/>
-          <p:cNvSpPr/>
-          <p:nvPr/>
-        </p:nvSpPr>
-        <p:spPr>
-          <a:xfrm>
-            <a:off x="9052560" y="1463040"/>
-            <a:ext cx="2560320" cy="4480560"/>
-          </a:xfrm>
-          <a:prstGeom prst="roundRect">
-            <a:avLst>
-              <a:gd name="adj" fmla="val 5357"/>
-            </a:avLst>
-          </a:prstGeom>
-          <a:solidFill>
-            <a:srgbClr val="F7EFE6"/>
-          </a:solidFill>
-          <a:ln w="12700">
-            <a:solidFill>
-              <a:srgbClr val="F7EFE6"/>
-            </a:solidFill>
-            <a:prstDash val="solid"/>
-          </a:ln>
-          <a:effectLst>
-            <a:outerShdw sx="100000" sy="100000" kx="0" ky="0" algn="bl" rotWithShape="0" blurRad="76200" dist="25400" dir="5400000">
-              <a:srgbClr val="000000">
-                <a:alpha val="12000"/>
-              </a:srgbClr>
-            </a:outerShdw>
-          </a:effectLst>
-        </p:spPr>
-      </p:sp>
-      <p:sp>
-        <p:nvSpPr>
-          <p:cNvPr id="20" name="Shape 17"/>
-          <p:cNvSpPr/>
-          <p:nvPr/>
-        </p:nvSpPr>
-        <p:spPr>
-          <a:xfrm>
-            <a:off x="9281160" y="1691640"/>
-            <a:ext cx="640080" cy="640080"/>
-          </a:xfrm>
-          <a:prstGeom prst="ellipse">
-            <a:avLst/>
-          </a:prstGeom>
-          <a:solidFill>
-            <a:srgbClr val="3D7EA6"/>
-          </a:solidFill>
-          <a:ln w="12700">
-            <a:solidFill>
-              <a:srgbClr val="3D7EA6"/>
-            </a:solidFill>
-            <a:prstDash val="solid"/>
-          </a:ln>
-        </p:spPr>
-      </p:sp>
-      <p:sp>
-        <p:nvSpPr>
-          <p:cNvPr id="21" name="Text 18"/>
-          <p:cNvSpPr txBox="1"/>
-          <p:nvPr/>
-        </p:nvSpPr>
-        <p:spPr>
-          <a:xfrm>
-            <a:off x="9281160" y="1691640"/>
-            <a:ext cx="640080" cy="640080"/>
-          </a:xfrm>
-          <a:prstGeom prst="rect">
-            <a:avLst/>
-          </a:prstGeom>
-          <a:noFill/>
-          <a:ln/>
-        </p:spPr>
-        <p:txBody>
-          <a:bodyPr wrap="square" lIns="0" tIns="0" rIns="0" bIns="0" rtlCol="0" anchor="ctr"/>
-          <a:lstStyle/>
-          <a:p>
-            <a:pPr algn="ctr" indent="0" marL="0">
-              <a:buNone/>
-            </a:pPr>
-            <a:r>
-              <a:rPr lang="en-US" sz="1600" b="1" dirty="0">
-                <a:solidFill>
-                  <a:srgbClr val="FFFFFF"/>
-                </a:solidFill>
-                <a:latin typeface="Cambria" pitchFamily="34" charset="0"/>
-                <a:ea typeface="Cambria" pitchFamily="34" charset="-122"/>
-                <a:cs typeface="Cambria" pitchFamily="34" charset="-120"/>
-              </a:rPr>
-              <a:t>4</a:t>
-            </a:r>
-            <a:endParaRPr lang="en-US" sz="1600" dirty="0"/>
-          </a:p>
-        </p:txBody>
-      </p:sp>
-      <p:sp>
-        <p:nvSpPr>
-          <p:cNvPr id="22" name="Text 19"/>
-          <p:cNvSpPr txBox="1"/>
-          <p:nvPr/>
-        </p:nvSpPr>
-        <p:spPr>
-          <a:xfrm>
-            <a:off x="9281160" y="2468880"/>
-            <a:ext cx="2103120" cy="822960"/>
-          </a:xfrm>
-          <a:prstGeom prst="rect">
-            <a:avLst/>
-          </a:prstGeom>
-          <a:noFill/>
-          <a:ln/>
-        </p:spPr>
-        <p:txBody>
-          <a:bodyPr wrap="square" lIns="0" tIns="0" rIns="0" bIns="0" rtlCol="0" anchor="t"/>
-          <a:lstStyle/>
-          <a:p>
-            <a:pPr indent="0" marL="0">
-              <a:buNone/>
-            </a:pPr>
-            <a:r>
-              <a:rPr lang="en-US" sz="1800" b="1" dirty="0">
-                <a:solidFill>
-                  <a:srgbClr val="5A2E2A"/>
-                </a:solidFill>
-                <a:latin typeface="Cambria" pitchFamily="34" charset="0"/>
-                <a:ea typeface="Cambria" pitchFamily="34" charset="-122"/>
-                <a:cs typeface="Cambria" pitchFamily="34" charset="-120"/>
-              </a:rPr>
-              <a:t>Detectores</a:t>
-            </a:r>
-            <a:endParaRPr lang="en-US" sz="1800" dirty="0"/>
-          </a:p>
-        </p:txBody>
-      </p:sp>
-      <p:sp>
-        <p:nvSpPr>
-          <p:cNvPr id="23" name="Text 20"/>
-          <p:cNvSpPr txBox="1"/>
-          <p:nvPr/>
-        </p:nvSpPr>
-        <p:spPr>
-          <a:xfrm>
-            <a:off x="9281160" y="3337560"/>
-            <a:ext cx="2103120" cy="2468880"/>
-          </a:xfrm>
-          <a:prstGeom prst="rect">
-            <a:avLst/>
-          </a:prstGeom>
-          <a:noFill/>
-          <a:ln/>
-        </p:spPr>
-        <p:txBody>
-          <a:bodyPr wrap="square" lIns="0" tIns="0" rIns="0" bIns="0" rtlCol="0" anchor="t"/>
-          <a:lstStyle/>
-          <a:p>
-            <a:pPr indent="0" marL="0">
-              <a:buNone/>
-            </a:pPr>
-            <a:r>
-              <a:rPr lang="en-US" sz="1500" dirty="0">
-                <a:solidFill>
-                  <a:srgbClr val="3B2A2A"/>
-                </a:solidFill>
-              </a:rPr>
-              <a:t>Limitações importantes e viés contra escritores não nativos.</a:t>
-            </a:r>
-            <a:endParaRPr lang="en-US" sz="1500" dirty="0"/>
-          </a:p>
-        </p:txBody>
-      </p:sp>
-      <p:sp>
-        <p:nvSpPr>
-          <p:cNvPr id="24" name="Text 21"/>
           <p:cNvSpPr txBox="1"/>
           <p:nvPr/>
         </p:nvSpPr>
@@ -7115,7 +7486,7 @@
                 <a:ea typeface="Cambria" pitchFamily="34" charset="-122"/>
                 <a:cs typeface="Cambria" pitchFamily="34" charset="-120"/>
               </a:rPr>
-              <a:t>Atividade 1: diagnóstico de entrada e plano de ação</a:t>
+              <a:t>Atividade 2: rubrica da turma e feedback em ciclo</a:t>
             </a:r>
             <a:endParaRPr lang="en-US" sz="3400" dirty="0"/>
           </a:p>
@@ -7219,7 +7590,7 @@
                   <a:srgbClr val="3B2A2A"/>
                 </a:solidFill>
               </a:rPr>
-              <a:t>Escolher o conceito central e listar equívocos prováveis</a:t>
+              <a:t>Ordenar quatro textos anônimos e anotar por quê</a:t>
             </a:r>
             <a:endParaRPr lang="en-US" sz="1600" dirty="0"/>
           </a:p>
@@ -7238,7 +7609,7 @@
                   <a:srgbClr val="3B2A2A"/>
                 </a:solidFill>
               </a:rPr>
-              <a:t>Rascunhar itens com distratores (IA opcional)</a:t>
+              <a:t>Agrupar as razões em três a cinco critérios</a:t>
             </a:r>
             <a:endParaRPr lang="en-US" sz="1600" dirty="0"/>
           </a:p>
@@ -7257,7 +7628,7 @@
                   <a:srgbClr val="3B2A2A"/>
                 </a:solidFill>
               </a:rPr>
-              <a:t>Resolver, validar e ficar com quatro a seis itens</a:t>
+              <a:t>Descrever os quatro níveis; testar em dois textos</a:t>
             </a:r>
             <a:endParaRPr lang="en-US" sz="1600" dirty="0"/>
           </a:p>
@@ -7276,7 +7647,7 @@
                   <a:srgbClr val="3B2A2A"/>
                 </a:solidFill>
               </a:rPr>
-              <a:t>Aplicar em 15 min, sem nota, com justificativa em uma frase</a:t>
+              <a:t>Feedback de pares: ponto forte, prioridade e pergunta</a:t>
             </a:r>
             <a:endParaRPr lang="en-US" sz="1600" dirty="0"/>
           </a:p>
@@ -7295,26 +7666,7 @@
                   <a:srgbClr val="3B2A2A"/>
                 </a:solidFill>
               </a:rPr>
-              <a:t>Tabular e decidir uma ação por equívoco frequente</a:t>
-            </a:r>
-            <a:endParaRPr lang="en-US" sz="1600" dirty="0"/>
-          </a:p>
-          <a:p>
-            <a:pPr marL="342900" indent="-342900">
-              <a:spcAft>
-                <a:spcPts val="600"/>
-              </a:spcAft>
-              <a:buSzPct val="100000"/>
-              <a:buFont typeface="+mj-lt"/>
-              <a:buAutoNum type="arabicPeriod" startAt="1"/>
-            </a:pPr>
-            <a:r>
-              <a:rPr lang="en-US" sz="1600" dirty="0">
-                <a:solidFill>
-                  <a:srgbClr val="3B2A2A"/>
-                </a:solidFill>
-              </a:rPr>
-              <a:t>Devolver o padrão geral à turma, sem expor indivíduos</a:t>
+              <a:t>Professor dá uma ou duas orientações; estudante revisa</a:t>
             </a:r>
             <a:endParaRPr lang="en-US" sz="1600" dirty="0"/>
           </a:p>
@@ -7413,7 +7765,7 @@
                   <a:srgbClr val="FFFFFF"/>
                 </a:solidFill>
               </a:rPr>
-              <a:t>60 min preparo, 15 min aplicação, 30 min análise</a:t>
+              <a:t>3 aulas de 50 minutos</a:t>
             </a:r>
             <a:endParaRPr lang="en-US" sz="1600" dirty="0"/>
           </a:p>
@@ -7512,7 +7864,7 @@
                   <a:srgbClr val="FFFFFF"/>
                 </a:solidFill>
               </a:rPr>
-              <a:t>Diagnóstico de 4 a 6 itens, folha de tabulação e plano da aula seguinte</a:t>
+              <a:t>Rubrica da turma, textos revisados e ajustes para a próxima tarefa</a:t>
             </a:r>
             <a:endParaRPr lang="en-US" sz="1600" dirty="0"/>
           </a:p>
@@ -7611,7 +7963,7 @@
                   <a:srgbClr val="FFFFFF"/>
                 </a:solidFill>
               </a:rPr>
-              <a:t>Itens no quadro e cartões A, B, C e D de folha dobrada; contagem manual.</a:t>
+              <a:t>Cópias manuscritas, exemplos escritos pelo professor e IA fora do processo.</a:t>
             </a:r>
             <a:endParaRPr lang="en-US" sz="1600" dirty="0"/>
           </a:p>
@@ -7721,7 +8073,7 @@
                 <a:ea typeface="Cambria" pitchFamily="34" charset="-122"/>
                 <a:cs typeface="Cambria" pitchFamily="34" charset="-120"/>
               </a:rPr>
-              <a:t>Atividade 2: rubrica da turma e feedback em ciclo</a:t>
+              <a:t>Notas automáticas e detectores</a:t>
             </a:r>
             <a:endParaRPr lang="en-US" sz="3400" dirty="0"/>
           </a:p>
@@ -7735,20 +8087,20 @@
         </p:nvSpPr>
         <p:spPr>
           <a:xfrm>
-            <a:off x="548640" y="1417320"/>
-            <a:ext cx="6949440" cy="4663440"/>
+            <a:off x="548640" y="1463040"/>
+            <a:ext cx="11064240" cy="1051560"/>
           </a:xfrm>
           <a:prstGeom prst="roundRect">
             <a:avLst>
-              <a:gd name="adj" fmla="val 2941"/>
+              <a:gd name="adj" fmla="val 10435"/>
             </a:avLst>
           </a:prstGeom>
           <a:solidFill>
-            <a:srgbClr val="F7EFE6"/>
+            <a:srgbClr val="FDECE4"/>
           </a:solidFill>
           <a:ln w="12700">
             <a:solidFill>
-              <a:srgbClr val="F7EFE6"/>
+              <a:srgbClr val="F2B8A0"/>
             </a:solidFill>
             <a:prstDash val="solid"/>
           </a:ln>
@@ -7756,179 +8108,24 @@
       </p:sp>
       <p:sp>
         <p:nvSpPr>
-          <p:cNvPr id="5" name="Text 2"/>
-          <p:cNvSpPr txBox="1"/>
-          <p:nvPr/>
-        </p:nvSpPr>
-        <p:spPr>
-          <a:xfrm>
-            <a:off x="822960" y="1554480"/>
-            <a:ext cx="5486400" cy="365760"/>
-          </a:xfrm>
-          <a:prstGeom prst="rect">
-            <a:avLst/>
-          </a:prstGeom>
-          <a:noFill/>
-          <a:ln/>
-        </p:spPr>
-        <p:txBody>
-          <a:bodyPr wrap="square" lIns="0" tIns="0" rIns="0" bIns="0" rtlCol="0" anchor="ctr"/>
-          <a:lstStyle/>
-          <a:p>
-            <a:pPr indent="0" marL="0">
-              <a:buNone/>
-            </a:pPr>
-            <a:r>
-              <a:rPr lang="en-US" sz="1300" b="1" spc="300" kern="0" dirty="0">
-                <a:solidFill>
-                  <a:srgbClr val="6D3B6E"/>
-                </a:solidFill>
-              </a:rPr>
-              <a:t>PASSO A PASSO</a:t>
-            </a:r>
-            <a:endParaRPr lang="en-US" sz="1300" dirty="0"/>
-          </a:p>
-        </p:txBody>
-      </p:sp>
-      <p:sp>
-        <p:nvSpPr>
-          <p:cNvPr id="6" name="Text 3"/>
-          <p:cNvSpPr txBox="1"/>
-          <p:nvPr/>
-        </p:nvSpPr>
-        <p:spPr>
-          <a:xfrm>
-            <a:off x="822960" y="1965960"/>
-            <a:ext cx="6400800" cy="4023360"/>
-          </a:xfrm>
-          <a:prstGeom prst="rect">
-            <a:avLst/>
-          </a:prstGeom>
-          <a:noFill/>
-          <a:ln/>
-        </p:spPr>
-        <p:txBody>
-          <a:bodyPr wrap="square" lIns="0" tIns="0" rIns="0" bIns="0" rtlCol="0" anchor="t"/>
-          <a:lstStyle/>
-          <a:p>
-            <a:pPr marL="342900" indent="-342900">
-              <a:spcAft>
-                <a:spcPts val="600"/>
-              </a:spcAft>
-              <a:buSzPct val="100000"/>
-              <a:buFont typeface="+mj-lt"/>
-              <a:buAutoNum type="arabicPeriod" startAt="1"/>
-            </a:pPr>
-            <a:r>
-              <a:rPr lang="en-US" sz="1600" dirty="0">
-                <a:solidFill>
-                  <a:srgbClr val="3B2A2A"/>
-                </a:solidFill>
-              </a:rPr>
-              <a:t>Ordenar quatro textos anônimos e anotar por quê</a:t>
-            </a:r>
-            <a:endParaRPr lang="en-US" sz="1600" dirty="0"/>
-          </a:p>
-          <a:p>
-            <a:pPr marL="342900" indent="-342900">
-              <a:spcAft>
-                <a:spcPts val="600"/>
-              </a:spcAft>
-              <a:buSzPct val="100000"/>
-              <a:buFont typeface="+mj-lt"/>
-              <a:buAutoNum type="arabicPeriod" startAt="1"/>
-            </a:pPr>
-            <a:r>
-              <a:rPr lang="en-US" sz="1600" dirty="0">
-                <a:solidFill>
-                  <a:srgbClr val="3B2A2A"/>
-                </a:solidFill>
-              </a:rPr>
-              <a:t>Agrupar as razões em três a cinco critérios</a:t>
-            </a:r>
-            <a:endParaRPr lang="en-US" sz="1600" dirty="0"/>
-          </a:p>
-          <a:p>
-            <a:pPr marL="342900" indent="-342900">
-              <a:spcAft>
-                <a:spcPts val="600"/>
-              </a:spcAft>
-              <a:buSzPct val="100000"/>
-              <a:buFont typeface="+mj-lt"/>
-              <a:buAutoNum type="arabicPeriod" startAt="1"/>
-            </a:pPr>
-            <a:r>
-              <a:rPr lang="en-US" sz="1600" dirty="0">
-                <a:solidFill>
-                  <a:srgbClr val="3B2A2A"/>
-                </a:solidFill>
-              </a:rPr>
-              <a:t>Descrever os quatro níveis; testar em dois textos</a:t>
-            </a:r>
-            <a:endParaRPr lang="en-US" sz="1600" dirty="0"/>
-          </a:p>
-          <a:p>
-            <a:pPr marL="342900" indent="-342900">
-              <a:spcAft>
-                <a:spcPts val="600"/>
-              </a:spcAft>
-              <a:buSzPct val="100000"/>
-              <a:buFont typeface="+mj-lt"/>
-              <a:buAutoNum type="arabicPeriod" startAt="1"/>
-            </a:pPr>
-            <a:r>
-              <a:rPr lang="en-US" sz="1600" dirty="0">
-                <a:solidFill>
-                  <a:srgbClr val="3B2A2A"/>
-                </a:solidFill>
-              </a:rPr>
-              <a:t>Feedback de pares: ponto forte, prioridade e pergunta</a:t>
-            </a:r>
-            <a:endParaRPr lang="en-US" sz="1600" dirty="0"/>
-          </a:p>
-          <a:p>
-            <a:pPr marL="342900" indent="-342900">
-              <a:spcAft>
-                <a:spcPts val="600"/>
-              </a:spcAft>
-              <a:buSzPct val="100000"/>
-              <a:buFont typeface="+mj-lt"/>
-              <a:buAutoNum type="arabicPeriod" startAt="1"/>
-            </a:pPr>
-            <a:r>
-              <a:rPr lang="en-US" sz="1600" dirty="0">
-                <a:solidFill>
-                  <a:srgbClr val="3B2A2A"/>
-                </a:solidFill>
-              </a:rPr>
-              <a:t>Professor dá uma ou duas orientações; estudante revisa</a:t>
-            </a:r>
-            <a:endParaRPr lang="en-US" sz="1600" dirty="0"/>
-          </a:p>
-        </p:txBody>
-      </p:sp>
-      <p:sp>
-        <p:nvSpPr>
-          <p:cNvPr id="7" name="Shape 4"/>
+          <p:cNvPr id="5" name="Shape 2"/>
           <p:cNvSpPr/>
           <p:nvPr/>
         </p:nvSpPr>
         <p:spPr>
           <a:xfrm>
-            <a:off x="7772400" y="1417320"/>
-            <a:ext cx="3840480" cy="1444752"/>
-          </a:xfrm>
-          <a:prstGeom prst="roundRect">
-            <a:avLst>
-              <a:gd name="adj" fmla="val 9494"/>
-            </a:avLst>
+            <a:off x="777240" y="1714500"/>
+            <a:ext cx="548640" cy="548640"/>
+          </a:xfrm>
+          <a:prstGeom prst="ellipse">
+            <a:avLst/>
           </a:prstGeom>
           <a:solidFill>
-            <a:srgbClr val="6D3B6E"/>
+            <a:srgbClr val="C0392B"/>
           </a:solidFill>
           <a:ln w="12700">
             <a:solidFill>
-              <a:srgbClr val="6D3B6E"/>
+              <a:srgbClr val="C0392B"/>
             </a:solidFill>
             <a:prstDash val="solid"/>
           </a:ln>
@@ -7936,14 +8133,14 @@
       </p:sp>
       <p:sp>
         <p:nvSpPr>
-          <p:cNvPr id="8" name="Text 5"/>
-          <p:cNvSpPr txBox="1"/>
-          <p:nvPr/>
-        </p:nvSpPr>
-        <p:spPr>
-          <a:xfrm>
-            <a:off x="8001000" y="1527048"/>
-            <a:ext cx="3383280" cy="320040"/>
+          <p:cNvPr id="6" name="Text 3"/>
+          <p:cNvSpPr txBox="1"/>
+          <p:nvPr/>
+        </p:nvSpPr>
+        <p:spPr>
+          <a:xfrm>
+            <a:off x="777240" y="1714500"/>
+            <a:ext cx="548640" cy="548640"/>
           </a:xfrm>
           <a:prstGeom prst="rect">
             <a:avLst/>
@@ -7955,79 +8152,79 @@
           <a:bodyPr wrap="square" lIns="0" tIns="0" rIns="0" bIns="0" rtlCol="0" anchor="ctr"/>
           <a:lstStyle/>
           <a:p>
+            <a:pPr algn="ctr" indent="0" marL="0">
+              <a:buNone/>
+            </a:pPr>
+            <a:r>
+              <a:rPr lang="en-US" sz="2200" b="1" dirty="0">
+                <a:solidFill>
+                  <a:srgbClr val="FFFFFF"/>
+                </a:solidFill>
+              </a:rPr>
+              <a:t>!</a:t>
+            </a:r>
+            <a:endParaRPr lang="en-US" sz="2200" dirty="0"/>
+          </a:p>
+        </p:txBody>
+      </p:sp>
+      <p:sp>
+        <p:nvSpPr>
+          <p:cNvPr id="7" name="Text 4"/>
+          <p:cNvSpPr txBox="1"/>
+          <p:nvPr/>
+        </p:nvSpPr>
+        <p:spPr>
+          <a:xfrm>
+            <a:off x="1600200" y="1463040"/>
+            <a:ext cx="9784080" cy="1051560"/>
+          </a:xfrm>
+          <a:prstGeom prst="rect">
+            <a:avLst/>
+          </a:prstGeom>
+          <a:noFill/>
+          <a:ln/>
+        </p:spPr>
+        <p:txBody>
+          <a:bodyPr wrap="square" lIns="0" tIns="0" rIns="0" bIns="0" rtlCol="0" anchor="ctr"/>
+          <a:lstStyle/>
+          <a:p>
             <a:pPr indent="0" marL="0">
               <a:buNone/>
             </a:pPr>
             <a:r>
-              <a:rPr lang="en-US" sz="1200" b="1" spc="300" kern="0" dirty="0">
-                <a:solidFill>
-                  <a:srgbClr val="FFFFFF"/>
-                </a:solidFill>
-              </a:rPr>
-              <a:t>TEMPO</a:t>
-            </a:r>
-            <a:endParaRPr lang="en-US" sz="1200" dirty="0"/>
-          </a:p>
-        </p:txBody>
-      </p:sp>
-      <p:sp>
-        <p:nvSpPr>
-          <p:cNvPr id="9" name="Text 6"/>
-          <p:cNvSpPr txBox="1"/>
-          <p:nvPr/>
-        </p:nvSpPr>
-        <p:spPr>
-          <a:xfrm>
-            <a:off x="8001000" y="1874520"/>
-            <a:ext cx="3383280" cy="896112"/>
-          </a:xfrm>
-          <a:prstGeom prst="rect">
-            <a:avLst/>
-          </a:prstGeom>
-          <a:noFill/>
-          <a:ln/>
-        </p:spPr>
-        <p:txBody>
-          <a:bodyPr wrap="square" lIns="0" tIns="0" rIns="0" bIns="0" rtlCol="0" anchor="t"/>
-          <a:lstStyle/>
-          <a:p>
-            <a:pPr indent="0" marL="0">
-              <a:buNone/>
-            </a:pPr>
-            <a:r>
-              <a:rPr lang="en-US" sz="1600" dirty="0">
-                <a:solidFill>
-                  <a:srgbClr val="FFFFFF"/>
-                </a:solidFill>
-              </a:rPr>
-              <a:t>3 aulas de 50 minutos</a:t>
-            </a:r>
-            <a:endParaRPr lang="en-US" sz="1600" dirty="0"/>
-          </a:p>
-        </p:txBody>
-      </p:sp>
-      <p:sp>
-        <p:nvSpPr>
-          <p:cNvPr id="10" name="Shape 7"/>
+              <a:rPr lang="en-US" sz="1800" dirty="0">
+                <a:solidFill>
+                  <a:srgbClr val="3B2A2A"/>
+                </a:solidFill>
+              </a:rPr>
+              <a:t>Não delegue a nota: a responsabilidade é do professor</a:t>
+            </a:r>
+            <a:endParaRPr lang="en-US" sz="1800" dirty="0"/>
+          </a:p>
+        </p:txBody>
+      </p:sp>
+      <p:sp>
+        <p:nvSpPr>
+          <p:cNvPr id="8" name="Shape 5"/>
           <p:cNvSpPr/>
           <p:nvPr/>
         </p:nvSpPr>
         <p:spPr>
           <a:xfrm>
-            <a:off x="7772400" y="3026664"/>
-            <a:ext cx="3840480" cy="1444752"/>
+            <a:off x="548640" y="2651760"/>
+            <a:ext cx="11064240" cy="1051560"/>
           </a:xfrm>
           <a:prstGeom prst="roundRect">
             <a:avLst>
-              <a:gd name="adj" fmla="val 9494"/>
+              <a:gd name="adj" fmla="val 10435"/>
             </a:avLst>
           </a:prstGeom>
           <a:solidFill>
-            <a:srgbClr val="2A9D8F"/>
+            <a:srgbClr val="FDECE4"/>
           </a:solidFill>
           <a:ln w="12700">
             <a:solidFill>
-              <a:srgbClr val="2A9D8F"/>
+              <a:srgbClr val="F2B8A0"/>
             </a:solidFill>
             <a:prstDash val="solid"/>
           </a:ln>
@@ -8035,98 +8232,24 @@
       </p:sp>
       <p:sp>
         <p:nvSpPr>
-          <p:cNvPr id="11" name="Text 8"/>
-          <p:cNvSpPr txBox="1"/>
-          <p:nvPr/>
-        </p:nvSpPr>
-        <p:spPr>
-          <a:xfrm>
-            <a:off x="8001000" y="3136392"/>
-            <a:ext cx="3383280" cy="320040"/>
-          </a:xfrm>
-          <a:prstGeom prst="rect">
-            <a:avLst/>
-          </a:prstGeom>
-          <a:noFill/>
-          <a:ln/>
-        </p:spPr>
-        <p:txBody>
-          <a:bodyPr wrap="square" lIns="0" tIns="0" rIns="0" bIns="0" rtlCol="0" anchor="ctr"/>
-          <a:lstStyle/>
-          <a:p>
-            <a:pPr indent="0" marL="0">
-              <a:buNone/>
-            </a:pPr>
-            <a:r>
-              <a:rPr lang="en-US" sz="1200" b="1" spc="300" kern="0" dirty="0">
-                <a:solidFill>
-                  <a:srgbClr val="FFFFFF"/>
-                </a:solidFill>
-              </a:rPr>
-              <a:t>PRODUTO</a:t>
-            </a:r>
-            <a:endParaRPr lang="en-US" sz="1200" dirty="0"/>
-          </a:p>
-        </p:txBody>
-      </p:sp>
-      <p:sp>
-        <p:nvSpPr>
-          <p:cNvPr id="12" name="Text 9"/>
-          <p:cNvSpPr txBox="1"/>
-          <p:nvPr/>
-        </p:nvSpPr>
-        <p:spPr>
-          <a:xfrm>
-            <a:off x="8001000" y="3483864"/>
-            <a:ext cx="3383280" cy="896112"/>
-          </a:xfrm>
-          <a:prstGeom prst="rect">
-            <a:avLst/>
-          </a:prstGeom>
-          <a:noFill/>
-          <a:ln/>
-        </p:spPr>
-        <p:txBody>
-          <a:bodyPr wrap="square" lIns="0" tIns="0" rIns="0" bIns="0" rtlCol="0" anchor="t"/>
-          <a:lstStyle/>
-          <a:p>
-            <a:pPr indent="0" marL="0">
-              <a:buNone/>
-            </a:pPr>
-            <a:r>
-              <a:rPr lang="en-US" sz="1600" dirty="0">
-                <a:solidFill>
-                  <a:srgbClr val="FFFFFF"/>
-                </a:solidFill>
-              </a:rPr>
-              <a:t>Rubrica da turma, textos revisados e ajustes para a próxima tarefa</a:t>
-            </a:r>
-            <a:endParaRPr lang="en-US" sz="1600" dirty="0"/>
-          </a:p>
-        </p:txBody>
-      </p:sp>
-      <p:sp>
-        <p:nvSpPr>
-          <p:cNvPr id="13" name="Shape 10"/>
+          <p:cNvPr id="9" name="Shape 6"/>
           <p:cNvSpPr/>
           <p:nvPr/>
         </p:nvSpPr>
         <p:spPr>
           <a:xfrm>
-            <a:off x="7772400" y="4636008"/>
-            <a:ext cx="3840480" cy="1444752"/>
-          </a:xfrm>
-          <a:prstGeom prst="roundRect">
-            <a:avLst>
-              <a:gd name="adj" fmla="val 9494"/>
-            </a:avLst>
+            <a:off x="777240" y="2903220"/>
+            <a:ext cx="548640" cy="548640"/>
+          </a:xfrm>
+          <a:prstGeom prst="ellipse">
+            <a:avLst/>
           </a:prstGeom>
           <a:solidFill>
-            <a:srgbClr val="6D3B6E"/>
+            <a:srgbClr val="C0392B"/>
           </a:solidFill>
           <a:ln w="12700">
             <a:solidFill>
-              <a:srgbClr val="6D3B6E"/>
+              <a:srgbClr val="C0392B"/>
             </a:solidFill>
             <a:prstDash val="solid"/>
           </a:ln>
@@ -8134,14 +8257,138 @@
       </p:sp>
       <p:sp>
         <p:nvSpPr>
+          <p:cNvPr id="10" name="Text 7"/>
+          <p:cNvSpPr txBox="1"/>
+          <p:nvPr/>
+        </p:nvSpPr>
+        <p:spPr>
+          <a:xfrm>
+            <a:off x="777240" y="2903220"/>
+            <a:ext cx="548640" cy="548640"/>
+          </a:xfrm>
+          <a:prstGeom prst="rect">
+            <a:avLst/>
+          </a:prstGeom>
+          <a:noFill/>
+          <a:ln/>
+        </p:spPr>
+        <p:txBody>
+          <a:bodyPr wrap="square" lIns="0" tIns="0" rIns="0" bIns="0" rtlCol="0" anchor="ctr"/>
+          <a:lstStyle/>
+          <a:p>
+            <a:pPr algn="ctr" indent="0" marL="0">
+              <a:buNone/>
+            </a:pPr>
+            <a:r>
+              <a:rPr lang="en-US" sz="2200" b="1" dirty="0">
+                <a:solidFill>
+                  <a:srgbClr val="FFFFFF"/>
+                </a:solidFill>
+              </a:rPr>
+              <a:t>!</a:t>
+            </a:r>
+            <a:endParaRPr lang="en-US" sz="2200" dirty="0"/>
+          </a:p>
+        </p:txBody>
+      </p:sp>
+      <p:sp>
+        <p:nvSpPr>
+          <p:cNvPr id="11" name="Text 8"/>
+          <p:cNvSpPr txBox="1"/>
+          <p:nvPr/>
+        </p:nvSpPr>
+        <p:spPr>
+          <a:xfrm>
+            <a:off x="1600200" y="2651760"/>
+            <a:ext cx="9784080" cy="1051560"/>
+          </a:xfrm>
+          <a:prstGeom prst="rect">
+            <a:avLst/>
+          </a:prstGeom>
+          <a:noFill/>
+          <a:ln/>
+        </p:spPr>
+        <p:txBody>
+          <a:bodyPr wrap="square" lIns="0" tIns="0" rIns="0" bIns="0" rtlCol="0" anchor="ctr"/>
+          <a:lstStyle/>
+          <a:p>
+            <a:pPr indent="0" marL="0">
+              <a:buNone/>
+            </a:pPr>
+            <a:r>
+              <a:rPr lang="en-US" sz="1800" dirty="0">
+                <a:solidFill>
+                  <a:srgbClr val="3B2A2A"/>
+                </a:solidFill>
+              </a:rPr>
+              <a:t>Detectores não são prova isolada; há viés contra não nativos</a:t>
+            </a:r>
+            <a:endParaRPr lang="en-US" sz="1800" dirty="0"/>
+          </a:p>
+        </p:txBody>
+      </p:sp>
+      <p:sp>
+        <p:nvSpPr>
+          <p:cNvPr id="12" name="Shape 9"/>
+          <p:cNvSpPr/>
+          <p:nvPr/>
+        </p:nvSpPr>
+        <p:spPr>
+          <a:xfrm>
+            <a:off x="548640" y="3840480"/>
+            <a:ext cx="11064240" cy="1051560"/>
+          </a:xfrm>
+          <a:prstGeom prst="roundRect">
+            <a:avLst>
+              <a:gd name="adj" fmla="val 10435"/>
+            </a:avLst>
+          </a:prstGeom>
+          <a:solidFill>
+            <a:srgbClr val="FDECE4"/>
+          </a:solidFill>
+          <a:ln w="12700">
+            <a:solidFill>
+              <a:srgbClr val="F2B8A0"/>
+            </a:solidFill>
+            <a:prstDash val="solid"/>
+          </a:ln>
+        </p:spPr>
+      </p:sp>
+      <p:sp>
+        <p:nvSpPr>
+          <p:cNvPr id="13" name="Shape 10"/>
+          <p:cNvSpPr/>
+          <p:nvPr/>
+        </p:nvSpPr>
+        <p:spPr>
+          <a:xfrm>
+            <a:off x="777240" y="4091940"/>
+            <a:ext cx="548640" cy="548640"/>
+          </a:xfrm>
+          <a:prstGeom prst="ellipse">
+            <a:avLst/>
+          </a:prstGeom>
+          <a:solidFill>
+            <a:srgbClr val="C0392B"/>
+          </a:solidFill>
+          <a:ln w="12700">
+            <a:solidFill>
+              <a:srgbClr val="C0392B"/>
+            </a:solidFill>
+            <a:prstDash val="solid"/>
+          </a:ln>
+        </p:spPr>
+      </p:sp>
+      <p:sp>
+        <p:nvSpPr>
           <p:cNvPr id="14" name="Text 11"/>
           <p:cNvSpPr txBox="1"/>
           <p:nvPr/>
         </p:nvSpPr>
         <p:spPr>
           <a:xfrm>
-            <a:off x="8001000" y="4745736"/>
-            <a:ext cx="3383280" cy="320040"/>
+            <a:off x="777240" y="4091940"/>
+            <a:ext cx="548640" cy="548640"/>
           </a:xfrm>
           <a:prstGeom prst="rect">
             <a:avLst/>
@@ -8153,60 +8400,184 @@
           <a:bodyPr wrap="square" lIns="0" tIns="0" rIns="0" bIns="0" rtlCol="0" anchor="ctr"/>
           <a:lstStyle/>
           <a:p>
+            <a:pPr algn="ctr" indent="0" marL="0">
+              <a:buNone/>
+            </a:pPr>
+            <a:r>
+              <a:rPr lang="en-US" sz="2200" b="1" dirty="0">
+                <a:solidFill>
+                  <a:srgbClr val="FFFFFF"/>
+                </a:solidFill>
+              </a:rPr>
+              <a:t>!</a:t>
+            </a:r>
+            <a:endParaRPr lang="en-US" sz="2200" dirty="0"/>
+          </a:p>
+        </p:txBody>
+      </p:sp>
+      <p:sp>
+        <p:nvSpPr>
+          <p:cNvPr id="15" name="Text 12"/>
+          <p:cNvSpPr txBox="1"/>
+          <p:nvPr/>
+        </p:nvSpPr>
+        <p:spPr>
+          <a:xfrm>
+            <a:off x="1600200" y="3840480"/>
+            <a:ext cx="9784080" cy="1051560"/>
+          </a:xfrm>
+          <a:prstGeom prst="rect">
+            <a:avLst/>
+          </a:prstGeom>
+          <a:noFill/>
+          <a:ln/>
+        </p:spPr>
+        <p:txBody>
+          <a:bodyPr wrap="square" lIns="0" tIns="0" rIns="0" bIns="0" rtlCol="0" anchor="ctr"/>
+          <a:lstStyle/>
+          <a:p>
             <a:pPr indent="0" marL="0">
               <a:buNone/>
             </a:pPr>
             <a:r>
-              <a:rPr lang="en-US" sz="1200" b="1" spc="300" kern="0" dirty="0">
+              <a:rPr lang="en-US" sz="1800" dirty="0">
+                <a:solidFill>
+                  <a:srgbClr val="3B2A2A"/>
+                </a:solidFill>
+              </a:rPr>
+              <a:t>Em caso de suspeita: converse e peça explicação oral</a:t>
+            </a:r>
+            <a:endParaRPr lang="en-US" sz="1800" dirty="0"/>
+          </a:p>
+        </p:txBody>
+      </p:sp>
+      <p:sp>
+        <p:nvSpPr>
+          <p:cNvPr id="16" name="Shape 13"/>
+          <p:cNvSpPr/>
+          <p:nvPr/>
+        </p:nvSpPr>
+        <p:spPr>
+          <a:xfrm>
+            <a:off x="548640" y="5029200"/>
+            <a:ext cx="11064240" cy="1051560"/>
+          </a:xfrm>
+          <a:prstGeom prst="roundRect">
+            <a:avLst>
+              <a:gd name="adj" fmla="val 10435"/>
+            </a:avLst>
+          </a:prstGeom>
+          <a:solidFill>
+            <a:srgbClr val="FDECE4"/>
+          </a:solidFill>
+          <a:ln w="12700">
+            <a:solidFill>
+              <a:srgbClr val="F2B8A0"/>
+            </a:solidFill>
+            <a:prstDash val="solid"/>
+          </a:ln>
+        </p:spPr>
+      </p:sp>
+      <p:sp>
+        <p:nvSpPr>
+          <p:cNvPr id="17" name="Shape 14"/>
+          <p:cNvSpPr/>
+          <p:nvPr/>
+        </p:nvSpPr>
+        <p:spPr>
+          <a:xfrm>
+            <a:off x="777240" y="5280660"/>
+            <a:ext cx="548640" cy="548640"/>
+          </a:xfrm>
+          <a:prstGeom prst="ellipse">
+            <a:avLst/>
+          </a:prstGeom>
+          <a:solidFill>
+            <a:srgbClr val="C0392B"/>
+          </a:solidFill>
+          <a:ln w="12700">
+            <a:solidFill>
+              <a:srgbClr val="C0392B"/>
+            </a:solidFill>
+            <a:prstDash val="solid"/>
+          </a:ln>
+        </p:spPr>
+      </p:sp>
+      <p:sp>
+        <p:nvSpPr>
+          <p:cNvPr id="18" name="Text 15"/>
+          <p:cNvSpPr txBox="1"/>
+          <p:nvPr/>
+        </p:nvSpPr>
+        <p:spPr>
+          <a:xfrm>
+            <a:off x="777240" y="5280660"/>
+            <a:ext cx="548640" cy="548640"/>
+          </a:xfrm>
+          <a:prstGeom prst="rect">
+            <a:avLst/>
+          </a:prstGeom>
+          <a:noFill/>
+          <a:ln/>
+        </p:spPr>
+        <p:txBody>
+          <a:bodyPr wrap="square" lIns="0" tIns="0" rIns="0" bIns="0" rtlCol="0" anchor="ctr"/>
+          <a:lstStyle/>
+          <a:p>
+            <a:pPr algn="ctr" indent="0" marL="0">
+              <a:buNone/>
+            </a:pPr>
+            <a:r>
+              <a:rPr lang="en-US" sz="2200" b="1" dirty="0">
                 <a:solidFill>
                   <a:srgbClr val="FFFFFF"/>
                 </a:solidFill>
               </a:rPr>
-              <a:t>POUCOS RECURSOS</a:t>
-            </a:r>
-            <a:endParaRPr lang="en-US" sz="1200" dirty="0"/>
-          </a:p>
-        </p:txBody>
-      </p:sp>
-      <p:sp>
-        <p:nvSpPr>
-          <p:cNvPr id="15" name="Text 12"/>
-          <p:cNvSpPr txBox="1"/>
-          <p:nvPr/>
-        </p:nvSpPr>
-        <p:spPr>
-          <a:xfrm>
-            <a:off x="8001000" y="5093208"/>
-            <a:ext cx="3383280" cy="896112"/>
-          </a:xfrm>
-          <a:prstGeom prst="rect">
-            <a:avLst/>
-          </a:prstGeom>
-          <a:noFill/>
-          <a:ln/>
-        </p:spPr>
-        <p:txBody>
-          <a:bodyPr wrap="square" lIns="0" tIns="0" rIns="0" bIns="0" rtlCol="0" anchor="t"/>
+              <a:t>!</a:t>
+            </a:r>
+            <a:endParaRPr lang="en-US" sz="2200" dirty="0"/>
+          </a:p>
+        </p:txBody>
+      </p:sp>
+      <p:sp>
+        <p:nvSpPr>
+          <p:cNvPr id="19" name="Text 16"/>
+          <p:cNvSpPr txBox="1"/>
+          <p:nvPr/>
+        </p:nvSpPr>
+        <p:spPr>
+          <a:xfrm>
+            <a:off x="1600200" y="5029200"/>
+            <a:ext cx="9784080" cy="1051560"/>
+          </a:xfrm>
+          <a:prstGeom prst="rect">
+            <a:avLst/>
+          </a:prstGeom>
+          <a:noFill/>
+          <a:ln/>
+        </p:spPr>
+        <p:txBody>
+          <a:bodyPr wrap="square" lIns="0" tIns="0" rIns="0" bIns="0" rtlCol="0" anchor="ctr"/>
           <a:lstStyle/>
           <a:p>
             <a:pPr indent="0" marL="0">
               <a:buNone/>
             </a:pPr>
             <a:r>
-              <a:rPr lang="en-US" sz="1600" dirty="0">
-                <a:solidFill>
-                  <a:srgbClr val="FFFFFF"/>
-                </a:solidFill>
-              </a:rPr>
-              <a:t>Cópias manuscritas, exemplos escritos pelo professor e IA fora do processo.</a:t>
-            </a:r>
-            <a:endParaRPr lang="en-US" sz="1600" dirty="0"/>
-          </a:p>
-        </p:txBody>
-      </p:sp>
-      <p:sp>
-        <p:nvSpPr>
-          <p:cNvPr id="16" name="Text 13"/>
+              <a:rPr lang="en-US" sz="1800" dirty="0">
+                <a:solidFill>
+                  <a:srgbClr val="3B2A2A"/>
+                </a:solidFill>
+              </a:rPr>
+              <a:t>Trabalhos e notas são dados pessoais: proteja-os</a:t>
+            </a:r>
+            <a:endParaRPr lang="en-US" sz="1800" dirty="0"/>
+          </a:p>
+        </p:txBody>
+      </p:sp>
+      <p:sp>
+        <p:nvSpPr>
+          <p:cNvPr id="20" name="Text 17"/>
           <p:cNvSpPr txBox="1"/>
           <p:nvPr/>
         </p:nvSpPr>
@@ -9053,7 +9424,7 @@
                 <a:ea typeface="Cambria" pitchFamily="34" charset="-122"/>
                 <a:cs typeface="Cambria" pitchFamily="34" charset="-120"/>
               </a:rPr>
-              <a:t>Notas automáticas e detectores</a:t>
+              <a:t>Quando dispensar a IA na avaliação</a:t>
             </a:r>
             <a:endParaRPr lang="en-US" sz="3400" dirty="0"/>
           </a:p>
@@ -9068,22 +9439,29 @@
         <p:spPr>
           <a:xfrm>
             <a:off x="548640" y="1463040"/>
-            <a:ext cx="11064240" cy="1051560"/>
+            <a:ext cx="2560320" cy="4480560"/>
           </a:xfrm>
           <a:prstGeom prst="roundRect">
             <a:avLst>
-              <a:gd name="adj" fmla="val 10435"/>
+              <a:gd name="adj" fmla="val 5357"/>
             </a:avLst>
           </a:prstGeom>
           <a:solidFill>
-            <a:srgbClr val="FDECE4"/>
+            <a:srgbClr val="F7EFE6"/>
           </a:solidFill>
           <a:ln w="12700">
             <a:solidFill>
-              <a:srgbClr val="F2B8A0"/>
+              <a:srgbClr val="F7EFE6"/>
             </a:solidFill>
             <a:prstDash val="solid"/>
           </a:ln>
+          <a:effectLst>
+            <a:outerShdw sx="100000" sy="100000" kx="0" ky="0" algn="bl" rotWithShape="0" blurRad="76200" dist="25400" dir="5400000">
+              <a:srgbClr val="000000">
+                <a:alpha val="12000"/>
+              </a:srgbClr>
+            </a:outerShdw>
+          </a:effectLst>
         </p:spPr>
       </p:sp>
       <p:sp>
@@ -9094,18 +9472,18 @@
         </p:nvSpPr>
         <p:spPr>
           <a:xfrm>
-            <a:off x="777240" y="1714500"/>
-            <a:ext cx="548640" cy="548640"/>
+            <a:off x="777240" y="1691640"/>
+            <a:ext cx="640080" cy="640080"/>
           </a:xfrm>
           <a:prstGeom prst="ellipse">
             <a:avLst/>
           </a:prstGeom>
           <a:solidFill>
-            <a:srgbClr val="C0392B"/>
+            <a:srgbClr val="6D3B6E"/>
           </a:solidFill>
           <a:ln w="12700">
             <a:solidFill>
-              <a:srgbClr val="C0392B"/>
+              <a:srgbClr val="6D3B6E"/>
             </a:solidFill>
             <a:prstDash val="solid"/>
           </a:ln>
@@ -9119,8 +9497,8 @@
         </p:nvSpPr>
         <p:spPr>
           <a:xfrm>
-            <a:off x="777240" y="1714500"/>
-            <a:ext cx="548640" cy="548640"/>
+            <a:off x="777240" y="1691640"/>
+            <a:ext cx="640080" cy="640080"/>
           </a:xfrm>
           <a:prstGeom prst="rect">
             <a:avLst/>
@@ -9136,14 +9514,17 @@
               <a:buNone/>
             </a:pPr>
             <a:r>
-              <a:rPr lang="en-US" sz="2200" b="1" dirty="0">
+              <a:rPr lang="en-US" sz="1600" b="1" dirty="0">
                 <a:solidFill>
                   <a:srgbClr val="FFFFFF"/>
                 </a:solidFill>
-              </a:rPr>
-              <a:t>!</a:t>
-            </a:r>
-            <a:endParaRPr lang="en-US" sz="2200" dirty="0"/>
+                <a:latin typeface="Cambria" pitchFamily="34" charset="0"/>
+                <a:ea typeface="Cambria" pitchFamily="34" charset="-122"/>
+                <a:cs typeface="Cambria" pitchFamily="34" charset="-120"/>
+              </a:rPr>
+              <a:t>1</a:t>
+            </a:r>
+            <a:endParaRPr lang="en-US" sz="1600" dirty="0"/>
           </a:p>
         </p:txBody>
       </p:sp>
@@ -9155,81 +9536,127 @@
         </p:nvSpPr>
         <p:spPr>
           <a:xfrm>
-            <a:off x="1600200" y="1463040"/>
-            <a:ext cx="9784080" cy="1051560"/>
-          </a:xfrm>
-          <a:prstGeom prst="rect">
-            <a:avLst/>
-          </a:prstGeom>
-          <a:noFill/>
-          <a:ln/>
-        </p:spPr>
-        <p:txBody>
-          <a:bodyPr wrap="square" lIns="0" tIns="0" rIns="0" bIns="0" rtlCol="0" anchor="ctr"/>
+            <a:off x="777240" y="2468880"/>
+            <a:ext cx="2103120" cy="822960"/>
+          </a:xfrm>
+          <a:prstGeom prst="rect">
+            <a:avLst/>
+          </a:prstGeom>
+          <a:noFill/>
+          <a:ln/>
+        </p:spPr>
+        <p:txBody>
+          <a:bodyPr wrap="square" lIns="0" tIns="0" rIns="0" bIns="0" rtlCol="0" anchor="t"/>
           <a:lstStyle/>
           <a:p>
             <a:pPr indent="0" marL="0">
               <a:buNone/>
             </a:pPr>
             <a:r>
-              <a:rPr lang="en-US" sz="1800" dirty="0">
+              <a:rPr lang="en-US" sz="1800" b="1" dirty="0">
+                <a:solidFill>
+                  <a:srgbClr val="5A2E2A"/>
+                </a:solidFill>
+                <a:latin typeface="Cambria" pitchFamily="34" charset="0"/>
+                <a:ea typeface="Cambria" pitchFamily="34" charset="-122"/>
+                <a:cs typeface="Cambria" pitchFamily="34" charset="-120"/>
+              </a:rPr>
+              <a:t>Notas e decisões</a:t>
+            </a:r>
+            <a:endParaRPr lang="en-US" sz="1800" dirty="0"/>
+          </a:p>
+        </p:txBody>
+      </p:sp>
+      <p:sp>
+        <p:nvSpPr>
+          <p:cNvPr id="8" name="Text 5"/>
+          <p:cNvSpPr txBox="1"/>
+          <p:nvPr/>
+        </p:nvSpPr>
+        <p:spPr>
+          <a:xfrm>
+            <a:off x="777240" y="3337560"/>
+            <a:ext cx="2103120" cy="2468880"/>
+          </a:xfrm>
+          <a:prstGeom prst="rect">
+            <a:avLst/>
+          </a:prstGeom>
+          <a:noFill/>
+          <a:ln/>
+        </p:spPr>
+        <p:txBody>
+          <a:bodyPr wrap="square" lIns="0" tIns="0" rIns="0" bIns="0" rtlCol="0" anchor="t"/>
+          <a:lstStyle/>
+          <a:p>
+            <a:pPr indent="0" marL="0">
+              <a:buNone/>
+            </a:pPr>
+            <a:r>
+              <a:rPr lang="en-US" sz="1500" dirty="0">
                 <a:solidFill>
                   <a:srgbClr val="3B2A2A"/>
                 </a:solidFill>
               </a:rPr>
-              <a:t>Não delegue a nota: a responsabilidade é do professor</a:t>
-            </a:r>
-            <a:endParaRPr lang="en-US" sz="1800" dirty="0"/>
-          </a:p>
-        </p:txBody>
-      </p:sp>
-      <p:sp>
-        <p:nvSpPr>
-          <p:cNvPr id="8" name="Shape 5"/>
+              <a:t>Atribuir nota, aprovar ou reprovar.</a:t>
+            </a:r>
+            <a:endParaRPr lang="en-US" sz="1500" dirty="0"/>
+          </a:p>
+        </p:txBody>
+      </p:sp>
+      <p:sp>
+        <p:nvSpPr>
+          <p:cNvPr id="9" name="Shape 6"/>
           <p:cNvSpPr/>
           <p:nvPr/>
         </p:nvSpPr>
         <p:spPr>
           <a:xfrm>
-            <a:off x="548640" y="2651760"/>
-            <a:ext cx="11064240" cy="1051560"/>
+            <a:off x="3383280" y="1463040"/>
+            <a:ext cx="2560320" cy="4480560"/>
           </a:xfrm>
           <a:prstGeom prst="roundRect">
             <a:avLst>
-              <a:gd name="adj" fmla="val 10435"/>
+              <a:gd name="adj" fmla="val 5357"/>
             </a:avLst>
           </a:prstGeom>
           <a:solidFill>
-            <a:srgbClr val="FDECE4"/>
+            <a:srgbClr val="F7EFE6"/>
           </a:solidFill>
           <a:ln w="12700">
             <a:solidFill>
-              <a:srgbClr val="F2B8A0"/>
+              <a:srgbClr val="F7EFE6"/>
             </a:solidFill>
             <a:prstDash val="solid"/>
           </a:ln>
-        </p:spPr>
-      </p:sp>
-      <p:sp>
-        <p:nvSpPr>
-          <p:cNvPr id="9" name="Shape 6"/>
+          <a:effectLst>
+            <a:outerShdw sx="100000" sy="100000" kx="0" ky="0" algn="bl" rotWithShape="0" blurRad="76200" dist="25400" dir="5400000">
+              <a:srgbClr val="000000">
+                <a:alpha val="12000"/>
+              </a:srgbClr>
+            </a:outerShdw>
+          </a:effectLst>
+        </p:spPr>
+      </p:sp>
+      <p:sp>
+        <p:nvSpPr>
+          <p:cNvPr id="10" name="Shape 7"/>
           <p:cNvSpPr/>
           <p:nvPr/>
         </p:nvSpPr>
         <p:spPr>
           <a:xfrm>
-            <a:off x="777240" y="2903220"/>
-            <a:ext cx="548640" cy="548640"/>
+            <a:off x="3611880" y="1691640"/>
+            <a:ext cx="640080" cy="640080"/>
           </a:xfrm>
           <a:prstGeom prst="ellipse">
             <a:avLst/>
           </a:prstGeom>
           <a:solidFill>
-            <a:srgbClr val="C0392B"/>
+            <a:srgbClr val="2A9D8F"/>
           </a:solidFill>
           <a:ln w="12700">
             <a:solidFill>
-              <a:srgbClr val="C0392B"/>
+              <a:srgbClr val="2A9D8F"/>
             </a:solidFill>
             <a:prstDash val="solid"/>
           </a:ln>
@@ -9237,14 +9664,14 @@
       </p:sp>
       <p:sp>
         <p:nvSpPr>
-          <p:cNvPr id="10" name="Text 7"/>
-          <p:cNvSpPr txBox="1"/>
-          <p:nvPr/>
-        </p:nvSpPr>
-        <p:spPr>
-          <a:xfrm>
-            <a:off x="777240" y="2903220"/>
-            <a:ext cx="548640" cy="548640"/>
+          <p:cNvPr id="11" name="Text 8"/>
+          <p:cNvSpPr txBox="1"/>
+          <p:nvPr/>
+        </p:nvSpPr>
+        <p:spPr>
+          <a:xfrm>
+            <a:off x="3611880" y="1691640"/>
+            <a:ext cx="640080" cy="640080"/>
           </a:xfrm>
           <a:prstGeom prst="rect">
             <a:avLst/>
@@ -9260,100 +9687,149 @@
               <a:buNone/>
             </a:pPr>
             <a:r>
-              <a:rPr lang="en-US" sz="2200" b="1" dirty="0">
+              <a:rPr lang="en-US" sz="1600" b="1" dirty="0">
                 <a:solidFill>
                   <a:srgbClr val="FFFFFF"/>
                 </a:solidFill>
-              </a:rPr>
-              <a:t>!</a:t>
-            </a:r>
-            <a:endParaRPr lang="en-US" sz="2200" dirty="0"/>
-          </a:p>
-        </p:txBody>
-      </p:sp>
-      <p:sp>
-        <p:nvSpPr>
-          <p:cNvPr id="11" name="Text 8"/>
-          <p:cNvSpPr txBox="1"/>
-          <p:nvPr/>
-        </p:nvSpPr>
-        <p:spPr>
-          <a:xfrm>
-            <a:off x="1600200" y="2651760"/>
-            <a:ext cx="9784080" cy="1051560"/>
-          </a:xfrm>
-          <a:prstGeom prst="rect">
-            <a:avLst/>
-          </a:prstGeom>
-          <a:noFill/>
-          <a:ln/>
-        </p:spPr>
-        <p:txBody>
-          <a:bodyPr wrap="square" lIns="0" tIns="0" rIns="0" bIns="0" rtlCol="0" anchor="ctr"/>
+                <a:latin typeface="Cambria" pitchFamily="34" charset="0"/>
+                <a:ea typeface="Cambria" pitchFamily="34" charset="-122"/>
+                <a:cs typeface="Cambria" pitchFamily="34" charset="-120"/>
+              </a:rPr>
+              <a:t>2</a:t>
+            </a:r>
+            <a:endParaRPr lang="en-US" sz="1600" dirty="0"/>
+          </a:p>
+        </p:txBody>
+      </p:sp>
+      <p:sp>
+        <p:nvSpPr>
+          <p:cNvPr id="12" name="Text 9"/>
+          <p:cNvSpPr txBox="1"/>
+          <p:nvPr/>
+        </p:nvSpPr>
+        <p:spPr>
+          <a:xfrm>
+            <a:off x="3611880" y="2468880"/>
+            <a:ext cx="2103120" cy="822960"/>
+          </a:xfrm>
+          <a:prstGeom prst="rect">
+            <a:avLst/>
+          </a:prstGeom>
+          <a:noFill/>
+          <a:ln/>
+        </p:spPr>
+        <p:txBody>
+          <a:bodyPr wrap="square" lIns="0" tIns="0" rIns="0" bIns="0" rtlCol="0" anchor="t"/>
           <a:lstStyle/>
           <a:p>
             <a:pPr indent="0" marL="0">
               <a:buNone/>
             </a:pPr>
             <a:r>
-              <a:rPr lang="en-US" sz="1800" dirty="0">
+              <a:rPr lang="en-US" sz="1800" b="1" dirty="0">
+                <a:solidFill>
+                  <a:srgbClr val="5A2E2A"/>
+                </a:solidFill>
+                <a:latin typeface="Cambria" pitchFamily="34" charset="0"/>
+                <a:ea typeface="Cambria" pitchFamily="34" charset="-122"/>
+                <a:cs typeface="Cambria" pitchFamily="34" charset="-120"/>
+              </a:rPr>
+              <a:t>Situações sensíveis</a:t>
+            </a:r>
+            <a:endParaRPr lang="en-US" sz="1800" dirty="0"/>
+          </a:p>
+        </p:txBody>
+      </p:sp>
+      <p:sp>
+        <p:nvSpPr>
+          <p:cNvPr id="13" name="Text 10"/>
+          <p:cNvSpPr txBox="1"/>
+          <p:nvPr/>
+        </p:nvSpPr>
+        <p:spPr>
+          <a:xfrm>
+            <a:off x="3611880" y="3337560"/>
+            <a:ext cx="2103120" cy="2468880"/>
+          </a:xfrm>
+          <a:prstGeom prst="rect">
+            <a:avLst/>
+          </a:prstGeom>
+          <a:noFill/>
+          <a:ln/>
+        </p:spPr>
+        <p:txBody>
+          <a:bodyPr wrap="square" lIns="0" tIns="0" rIns="0" bIns="0" rtlCol="0" anchor="t"/>
+          <a:lstStyle/>
+          <a:p>
+            <a:pPr indent="0" marL="0">
+              <a:buNone/>
+            </a:pPr>
+            <a:r>
+              <a:rPr lang="en-US" sz="1500" dirty="0">
                 <a:solidFill>
                   <a:srgbClr val="3B2A2A"/>
                 </a:solidFill>
               </a:rPr>
-              <a:t>Detectores não são prova isolada; há viés contra não nativos</a:t>
-            </a:r>
-            <a:endParaRPr lang="en-US" sz="1800" dirty="0"/>
-          </a:p>
-        </p:txBody>
-      </p:sp>
-      <p:sp>
-        <p:nvSpPr>
-          <p:cNvPr id="12" name="Shape 9"/>
+              <a:t>Dificuldades pessoais, relatos de sofrimento, suspeita de má conduta.</a:t>
+            </a:r>
+            <a:endParaRPr lang="en-US" sz="1500" dirty="0"/>
+          </a:p>
+        </p:txBody>
+      </p:sp>
+      <p:sp>
+        <p:nvSpPr>
+          <p:cNvPr id="14" name="Shape 11"/>
           <p:cNvSpPr/>
           <p:nvPr/>
         </p:nvSpPr>
         <p:spPr>
           <a:xfrm>
-            <a:off x="548640" y="3840480"/>
-            <a:ext cx="11064240" cy="1051560"/>
+            <a:off x="6217920" y="1463040"/>
+            <a:ext cx="2560320" cy="4480560"/>
           </a:xfrm>
           <a:prstGeom prst="roundRect">
             <a:avLst>
-              <a:gd name="adj" fmla="val 10435"/>
+              <a:gd name="adj" fmla="val 5357"/>
             </a:avLst>
           </a:prstGeom>
           <a:solidFill>
-            <a:srgbClr val="FDECE4"/>
+            <a:srgbClr val="F7EFE6"/>
           </a:solidFill>
           <a:ln w="12700">
             <a:solidFill>
-              <a:srgbClr val="F2B8A0"/>
+              <a:srgbClr val="F7EFE6"/>
             </a:solidFill>
             <a:prstDash val="solid"/>
           </a:ln>
-        </p:spPr>
-      </p:sp>
-      <p:sp>
-        <p:nvSpPr>
-          <p:cNvPr id="13" name="Shape 10"/>
+          <a:effectLst>
+            <a:outerShdw sx="100000" sy="100000" kx="0" ky="0" algn="bl" rotWithShape="0" blurRad="76200" dist="25400" dir="5400000">
+              <a:srgbClr val="000000">
+                <a:alpha val="12000"/>
+              </a:srgbClr>
+            </a:outerShdw>
+          </a:effectLst>
+        </p:spPr>
+      </p:sp>
+      <p:sp>
+        <p:nvSpPr>
+          <p:cNvPr id="15" name="Shape 12"/>
           <p:cNvSpPr/>
           <p:nvPr/>
         </p:nvSpPr>
         <p:spPr>
           <a:xfrm>
-            <a:off x="777240" y="4091940"/>
-            <a:ext cx="548640" cy="548640"/>
+            <a:off x="6446520" y="1691640"/>
+            <a:ext cx="640080" cy="640080"/>
           </a:xfrm>
           <a:prstGeom prst="ellipse">
             <a:avLst/>
           </a:prstGeom>
           <a:solidFill>
-            <a:srgbClr val="C0392B"/>
+            <a:srgbClr val="6D3B6E"/>
           </a:solidFill>
           <a:ln w="12700">
             <a:solidFill>
-              <a:srgbClr val="C0392B"/>
+              <a:srgbClr val="6D3B6E"/>
             </a:solidFill>
             <a:prstDash val="solid"/>
           </a:ln>
@@ -9361,14 +9837,14 @@
       </p:sp>
       <p:sp>
         <p:nvSpPr>
-          <p:cNvPr id="14" name="Text 11"/>
-          <p:cNvSpPr txBox="1"/>
-          <p:nvPr/>
-        </p:nvSpPr>
-        <p:spPr>
-          <a:xfrm>
-            <a:off x="777240" y="4091940"/>
-            <a:ext cx="548640" cy="548640"/>
+          <p:cNvPr id="16" name="Text 13"/>
+          <p:cNvSpPr txBox="1"/>
+          <p:nvPr/>
+        </p:nvSpPr>
+        <p:spPr>
+          <a:xfrm>
+            <a:off x="6446520" y="1691640"/>
+            <a:ext cx="640080" cy="640080"/>
           </a:xfrm>
           <a:prstGeom prst="rect">
             <a:avLst/>
@@ -9384,100 +9860,149 @@
               <a:buNone/>
             </a:pPr>
             <a:r>
-              <a:rPr lang="en-US" sz="2200" b="1" dirty="0">
+              <a:rPr lang="en-US" sz="1600" b="1" dirty="0">
                 <a:solidFill>
                   <a:srgbClr val="FFFFFF"/>
                 </a:solidFill>
-              </a:rPr>
-              <a:t>!</a:t>
-            </a:r>
-            <a:endParaRPr lang="en-US" sz="2200" dirty="0"/>
-          </a:p>
-        </p:txBody>
-      </p:sp>
-      <p:sp>
-        <p:nvSpPr>
-          <p:cNvPr id="15" name="Text 12"/>
-          <p:cNvSpPr txBox="1"/>
-          <p:nvPr/>
-        </p:nvSpPr>
-        <p:spPr>
-          <a:xfrm>
-            <a:off x="1600200" y="3840480"/>
-            <a:ext cx="9784080" cy="1051560"/>
-          </a:xfrm>
-          <a:prstGeom prst="rect">
-            <a:avLst/>
-          </a:prstGeom>
-          <a:noFill/>
-          <a:ln/>
-        </p:spPr>
-        <p:txBody>
-          <a:bodyPr wrap="square" lIns="0" tIns="0" rIns="0" bIns="0" rtlCol="0" anchor="ctr"/>
+                <a:latin typeface="Cambria" pitchFamily="34" charset="0"/>
+                <a:ea typeface="Cambria" pitchFamily="34" charset="-122"/>
+                <a:cs typeface="Cambria" pitchFamily="34" charset="-120"/>
+              </a:rPr>
+              <a:t>3</a:t>
+            </a:r>
+            <a:endParaRPr lang="en-US" sz="1600" dirty="0"/>
+          </a:p>
+        </p:txBody>
+      </p:sp>
+      <p:sp>
+        <p:nvSpPr>
+          <p:cNvPr id="17" name="Text 14"/>
+          <p:cNvSpPr txBox="1"/>
+          <p:nvPr/>
+        </p:nvSpPr>
+        <p:spPr>
+          <a:xfrm>
+            <a:off x="6446520" y="2468880"/>
+            <a:ext cx="2103120" cy="822960"/>
+          </a:xfrm>
+          <a:prstGeom prst="rect">
+            <a:avLst/>
+          </a:prstGeom>
+          <a:noFill/>
+          <a:ln/>
+        </p:spPr>
+        <p:txBody>
+          <a:bodyPr wrap="square" lIns="0" tIns="0" rIns="0" bIns="0" rtlCol="0" anchor="t"/>
           <a:lstStyle/>
           <a:p>
             <a:pPr indent="0" marL="0">
               <a:buNone/>
             </a:pPr>
             <a:r>
-              <a:rPr lang="en-US" sz="1800" dirty="0">
+              <a:rPr lang="en-US" sz="1800" b="1" dirty="0">
+                <a:solidFill>
+                  <a:srgbClr val="5A2E2A"/>
+                </a:solidFill>
+                <a:latin typeface="Cambria" pitchFamily="34" charset="0"/>
+                <a:ea typeface="Cambria" pitchFamily="34" charset="-122"/>
+                <a:cs typeface="Cambria" pitchFamily="34" charset="-120"/>
+              </a:rPr>
+              <a:t>Sem anonimizar</a:t>
+            </a:r>
+            <a:endParaRPr lang="en-US" sz="1800" dirty="0"/>
+          </a:p>
+        </p:txBody>
+      </p:sp>
+      <p:sp>
+        <p:nvSpPr>
+          <p:cNvPr id="18" name="Text 15"/>
+          <p:cNvSpPr txBox="1"/>
+          <p:nvPr/>
+        </p:nvSpPr>
+        <p:spPr>
+          <a:xfrm>
+            <a:off x="6446520" y="3337560"/>
+            <a:ext cx="2103120" cy="2468880"/>
+          </a:xfrm>
+          <a:prstGeom prst="rect">
+            <a:avLst/>
+          </a:prstGeom>
+          <a:noFill/>
+          <a:ln/>
+        </p:spPr>
+        <p:txBody>
+          <a:bodyPr wrap="square" lIns="0" tIns="0" rIns="0" bIns="0" rtlCol="0" anchor="t"/>
+          <a:lstStyle/>
+          <a:p>
+            <a:pPr indent="0" marL="0">
+              <a:buNone/>
+            </a:pPr>
+            <a:r>
+              <a:rPr lang="en-US" sz="1500" dirty="0">
                 <a:solidFill>
                   <a:srgbClr val="3B2A2A"/>
                 </a:solidFill>
               </a:rPr>
-              <a:t>Em caso de suspeita: converse e peça explicação oral</a:t>
-            </a:r>
-            <a:endParaRPr lang="en-US" sz="1800" dirty="0"/>
-          </a:p>
-        </p:txBody>
-      </p:sp>
-      <p:sp>
-        <p:nvSpPr>
-          <p:cNvPr id="16" name="Shape 13"/>
+              <a:t>Se não dá para anonimizar o material, não envie.</a:t>
+            </a:r>
+            <a:endParaRPr lang="en-US" sz="1500" dirty="0"/>
+          </a:p>
+        </p:txBody>
+      </p:sp>
+      <p:sp>
+        <p:nvSpPr>
+          <p:cNvPr id="19" name="Shape 16"/>
           <p:cNvSpPr/>
           <p:nvPr/>
         </p:nvSpPr>
         <p:spPr>
           <a:xfrm>
-            <a:off x="548640" y="5029200"/>
-            <a:ext cx="11064240" cy="1051560"/>
+            <a:off x="9052560" y="1463040"/>
+            <a:ext cx="2560320" cy="4480560"/>
           </a:xfrm>
           <a:prstGeom prst="roundRect">
             <a:avLst>
-              <a:gd name="adj" fmla="val 10435"/>
+              <a:gd name="adj" fmla="val 5357"/>
             </a:avLst>
           </a:prstGeom>
           <a:solidFill>
-            <a:srgbClr val="FDECE4"/>
+            <a:srgbClr val="F7EFE6"/>
           </a:solidFill>
           <a:ln w="12700">
             <a:solidFill>
-              <a:srgbClr val="F2B8A0"/>
+              <a:srgbClr val="F7EFE6"/>
             </a:solidFill>
             <a:prstDash val="solid"/>
           </a:ln>
-        </p:spPr>
-      </p:sp>
-      <p:sp>
-        <p:nvSpPr>
-          <p:cNvPr id="17" name="Shape 14"/>
+          <a:effectLst>
+            <a:outerShdw sx="100000" sy="100000" kx="0" ky="0" algn="bl" rotWithShape="0" blurRad="76200" dist="25400" dir="5400000">
+              <a:srgbClr val="000000">
+                <a:alpha val="12000"/>
+              </a:srgbClr>
+            </a:outerShdw>
+          </a:effectLst>
+        </p:spPr>
+      </p:sp>
+      <p:sp>
+        <p:nvSpPr>
+          <p:cNvPr id="20" name="Shape 17"/>
           <p:cNvSpPr/>
           <p:nvPr/>
         </p:nvSpPr>
         <p:spPr>
           <a:xfrm>
-            <a:off x="777240" y="5280660"/>
-            <a:ext cx="548640" cy="548640"/>
+            <a:off x="9281160" y="1691640"/>
+            <a:ext cx="640080" cy="640080"/>
           </a:xfrm>
           <a:prstGeom prst="ellipse">
             <a:avLst/>
           </a:prstGeom>
           <a:solidFill>
-            <a:srgbClr val="C0392B"/>
+            <a:srgbClr val="3D7EA6"/>
           </a:solidFill>
           <a:ln w="12700">
             <a:solidFill>
-              <a:srgbClr val="C0392B"/>
+              <a:srgbClr val="3D7EA6"/>
             </a:solidFill>
             <a:prstDash val="solid"/>
           </a:ln>
@@ -9485,14 +10010,14 @@
       </p:sp>
       <p:sp>
         <p:nvSpPr>
-          <p:cNvPr id="18" name="Text 15"/>
-          <p:cNvSpPr txBox="1"/>
-          <p:nvPr/>
-        </p:nvSpPr>
-        <p:spPr>
-          <a:xfrm>
-            <a:off x="777240" y="5280660"/>
-            <a:ext cx="548640" cy="548640"/>
+          <p:cNvPr id="21" name="Text 18"/>
+          <p:cNvSpPr txBox="1"/>
+          <p:nvPr/>
+        </p:nvSpPr>
+        <p:spPr>
+          <a:xfrm>
+            <a:off x="9281160" y="1691640"/>
+            <a:ext cx="640080" cy="640080"/>
           </a:xfrm>
           <a:prstGeom prst="rect">
             <a:avLst/>
@@ -9508,56 +10033,98 @@
               <a:buNone/>
             </a:pPr>
             <a:r>
-              <a:rPr lang="en-US" sz="2200" b="1" dirty="0">
+              <a:rPr lang="en-US" sz="1600" b="1" dirty="0">
                 <a:solidFill>
                   <a:srgbClr val="FFFFFF"/>
                 </a:solidFill>
-              </a:rPr>
-              <a:t>!</a:t>
-            </a:r>
-            <a:endParaRPr lang="en-US" sz="2200" dirty="0"/>
-          </a:p>
-        </p:txBody>
-      </p:sp>
-      <p:sp>
-        <p:nvSpPr>
-          <p:cNvPr id="19" name="Text 16"/>
-          <p:cNvSpPr txBox="1"/>
-          <p:nvPr/>
-        </p:nvSpPr>
-        <p:spPr>
-          <a:xfrm>
-            <a:off x="1600200" y="5029200"/>
-            <a:ext cx="9784080" cy="1051560"/>
-          </a:xfrm>
-          <a:prstGeom prst="rect">
-            <a:avLst/>
-          </a:prstGeom>
-          <a:noFill/>
-          <a:ln/>
-        </p:spPr>
-        <p:txBody>
-          <a:bodyPr wrap="square" lIns="0" tIns="0" rIns="0" bIns="0" rtlCol="0" anchor="ctr"/>
+                <a:latin typeface="Cambria" pitchFamily="34" charset="0"/>
+                <a:ea typeface="Cambria" pitchFamily="34" charset="-122"/>
+                <a:cs typeface="Cambria" pitchFamily="34" charset="-120"/>
+              </a:rPr>
+              <a:t>4</a:t>
+            </a:r>
+            <a:endParaRPr lang="en-US" sz="1600" dirty="0"/>
+          </a:p>
+        </p:txBody>
+      </p:sp>
+      <p:sp>
+        <p:nvSpPr>
+          <p:cNvPr id="22" name="Text 19"/>
+          <p:cNvSpPr txBox="1"/>
+          <p:nvPr/>
+        </p:nvSpPr>
+        <p:spPr>
+          <a:xfrm>
+            <a:off x="9281160" y="2468880"/>
+            <a:ext cx="2103120" cy="822960"/>
+          </a:xfrm>
+          <a:prstGeom prst="rect">
+            <a:avLst/>
+          </a:prstGeom>
+          <a:noFill/>
+          <a:ln/>
+        </p:spPr>
+        <p:txBody>
+          <a:bodyPr wrap="square" lIns="0" tIns="0" rIns="0" bIns="0" rtlCol="0" anchor="t"/>
           <a:lstStyle/>
           <a:p>
             <a:pPr indent="0" marL="0">
               <a:buNone/>
             </a:pPr>
             <a:r>
-              <a:rPr lang="en-US" sz="1800" dirty="0">
+              <a:rPr lang="en-US" sz="1800" b="1" dirty="0">
+                <a:solidFill>
+                  <a:srgbClr val="5A2E2A"/>
+                </a:solidFill>
+                <a:latin typeface="Cambria" pitchFamily="34" charset="0"/>
+                <a:ea typeface="Cambria" pitchFamily="34" charset="-122"/>
+                <a:cs typeface="Cambria" pitchFamily="34" charset="-120"/>
+              </a:rPr>
+              <a:t>Sem tempo de revisar</a:t>
+            </a:r>
+            <a:endParaRPr lang="en-US" sz="1800" dirty="0"/>
+          </a:p>
+        </p:txBody>
+      </p:sp>
+      <p:sp>
+        <p:nvSpPr>
+          <p:cNvPr id="23" name="Text 20"/>
+          <p:cNvSpPr txBox="1"/>
+          <p:nvPr/>
+        </p:nvSpPr>
+        <p:spPr>
+          <a:xfrm>
+            <a:off x="9281160" y="3337560"/>
+            <a:ext cx="2103120" cy="2468880"/>
+          </a:xfrm>
+          <a:prstGeom prst="rect">
+            <a:avLst/>
+          </a:prstGeom>
+          <a:noFill/>
+          <a:ln/>
+        </p:spPr>
+        <p:txBody>
+          <a:bodyPr wrap="square" lIns="0" tIns="0" rIns="0" bIns="0" rtlCol="0" anchor="t"/>
+          <a:lstStyle/>
+          <a:p>
+            <a:pPr indent="0" marL="0">
+              <a:buNone/>
+            </a:pPr>
+            <a:r>
+              <a:rPr lang="en-US" sz="1500" dirty="0">
                 <a:solidFill>
                   <a:srgbClr val="3B2A2A"/>
                 </a:solidFill>
               </a:rPr>
-              <a:t>Trabalhos e notas são dados pessoais: proteja-os</a:t>
-            </a:r>
-            <a:endParaRPr lang="en-US" sz="1800" dirty="0"/>
-          </a:p>
-        </p:txBody>
-      </p:sp>
-      <p:sp>
-        <p:nvSpPr>
-          <p:cNvPr id="20" name="Text 17"/>
+              <a:t>Ou quando o objetivo é avaliar o estudante sem apoio.</a:t>
+            </a:r>
+            <a:endParaRPr lang="en-US" sz="1500" dirty="0"/>
+          </a:p>
+        </p:txBody>
+      </p:sp>
+      <p:sp>
+        <p:nvSpPr>
+          <p:cNvPr id="24" name="Text 21"/>
           <p:cNvSpPr txBox="1"/>
           <p:nvPr/>
         </p:nvSpPr>
@@ -9659,81 +10226,46 @@
                 <a:ea typeface="Cambria" pitchFamily="34" charset="-122"/>
                 <a:cs typeface="Cambria" pitchFamily="34" charset="-120"/>
               </a:rPr>
-              <a:t>Quando dispensar a IA na avaliação</a:t>
+              <a:t>Síntese: critérios, evidências, feedback e ação</a:t>
             </a:r>
             <a:endParaRPr lang="en-US" sz="3400" dirty="0"/>
           </a:p>
         </p:txBody>
       </p:sp>
-      <p:sp>
-        <p:nvSpPr>
-          <p:cNvPr id="4" name="Shape 1"/>
-          <p:cNvSpPr/>
-          <p:nvPr/>
-        </p:nvSpPr>
-        <p:spPr>
-          <a:xfrm>
-            <a:off x="548640" y="1463040"/>
-            <a:ext cx="2560320" cy="4480560"/>
-          </a:xfrm>
-          <a:prstGeom prst="roundRect">
-            <a:avLst>
-              <a:gd name="adj" fmla="val 5357"/>
-            </a:avLst>
-          </a:prstGeom>
-          <a:solidFill>
-            <a:srgbClr val="F7EFE6"/>
-          </a:solidFill>
-          <a:ln w="12700">
-            <a:solidFill>
-              <a:srgbClr val="F7EFE6"/>
-            </a:solidFill>
-            <a:prstDash val="solid"/>
-          </a:ln>
-          <a:effectLst>
-            <a:outerShdw sx="100000" sy="100000" kx="0" ky="0" algn="bl" rotWithShape="0" blurRad="76200" dist="25400" dir="5400000">
-              <a:srgbClr val="000000">
-                <a:alpha val="12000"/>
-              </a:srgbClr>
-            </a:outerShdw>
-          </a:effectLst>
-        </p:spPr>
-      </p:sp>
-      <p:sp>
-        <p:nvSpPr>
-          <p:cNvPr id="5" name="Shape 2"/>
-          <p:cNvSpPr/>
-          <p:nvPr/>
-        </p:nvSpPr>
-        <p:spPr>
-          <a:xfrm>
-            <a:off x="777240" y="1691640"/>
-            <a:ext cx="640080" cy="640080"/>
-          </a:xfrm>
-          <a:prstGeom prst="ellipse">
-            <a:avLst/>
-          </a:prstGeom>
-          <a:solidFill>
-            <a:srgbClr val="6D3B6E"/>
-          </a:solidFill>
-          <a:ln w="12700">
-            <a:solidFill>
-              <a:srgbClr val="6D3B6E"/>
-            </a:solidFill>
-            <a:prstDash val="solid"/>
-          </a:ln>
-        </p:spPr>
-      </p:sp>
-      <p:sp>
-        <p:nvSpPr>
-          <p:cNvPr id="6" name="Text 3"/>
-          <p:cNvSpPr txBox="1"/>
-          <p:nvPr/>
-        </p:nvSpPr>
-        <p:spPr>
-          <a:xfrm>
-            <a:off x="777240" y="1691640"/>
-            <a:ext cx="640080" cy="640080"/>
+      <p:pic>
+        <p:nvPicPr>
+          <p:cNvPr id="4" name="Image 0" descr="Figura 22.3 — Sob responsabilidade do professor, com a IA como rascunho.">    </p:cNvPr>
+          <p:cNvPicPr>
+            <a:picLocks noChangeAspect="1"/>
+          </p:cNvPicPr>
+          <p:nvPr/>
+        </p:nvPicPr>
+        <p:blipFill>
+          <a:blip r:embed="rId1"/>
+          <a:stretch>
+            <a:fillRect/>
+          </a:stretch>
+        </p:blipFill>
+        <p:spPr>
+          <a:xfrm>
+            <a:off x="1668286" y="1325880"/>
+            <a:ext cx="8824948" cy="4434840"/>
+          </a:xfrm>
+          <a:prstGeom prst="rect">
+            <a:avLst/>
+          </a:prstGeom>
+        </p:spPr>
+      </p:pic>
+      <p:sp>
+        <p:nvSpPr>
+          <p:cNvPr id="5" name="Text 1"/>
+          <p:cNvSpPr txBox="1"/>
+          <p:nvPr/>
+        </p:nvSpPr>
+        <p:spPr>
+          <a:xfrm>
+            <a:off x="548640" y="5852160"/>
+            <a:ext cx="11064240" cy="548640"/>
           </a:xfrm>
           <a:prstGeom prst="rect">
             <a:avLst/>
@@ -9749,617 +10281,20 @@
               <a:buNone/>
             </a:pPr>
             <a:r>
-              <a:rPr lang="en-US" sz="1600" b="1" dirty="0">
-                <a:solidFill>
-                  <a:srgbClr val="FFFFFF"/>
-                </a:solidFill>
-                <a:latin typeface="Cambria" pitchFamily="34" charset="0"/>
-                <a:ea typeface="Cambria" pitchFamily="34" charset="-122"/>
-                <a:cs typeface="Cambria" pitchFamily="34" charset="-120"/>
-              </a:rPr>
-              <a:t>1</a:t>
-            </a:r>
-            <a:endParaRPr lang="en-US" sz="1600" dirty="0"/>
-          </a:p>
-        </p:txBody>
-      </p:sp>
-      <p:sp>
-        <p:nvSpPr>
-          <p:cNvPr id="7" name="Text 4"/>
-          <p:cNvSpPr txBox="1"/>
-          <p:nvPr/>
-        </p:nvSpPr>
-        <p:spPr>
-          <a:xfrm>
-            <a:off x="777240" y="2468880"/>
-            <a:ext cx="2103120" cy="822960"/>
-          </a:xfrm>
-          <a:prstGeom prst="rect">
-            <a:avLst/>
-          </a:prstGeom>
-          <a:noFill/>
-          <a:ln/>
-        </p:spPr>
-        <p:txBody>
-          <a:bodyPr wrap="square" lIns="0" tIns="0" rIns="0" bIns="0" rtlCol="0" anchor="t"/>
-          <a:lstStyle/>
-          <a:p>
-            <a:pPr indent="0" marL="0">
-              <a:buNone/>
-            </a:pPr>
-            <a:r>
-              <a:rPr lang="en-US" sz="1800" b="1" dirty="0">
-                <a:solidFill>
-                  <a:srgbClr val="5A2E2A"/>
-                </a:solidFill>
-                <a:latin typeface="Cambria" pitchFamily="34" charset="0"/>
-                <a:ea typeface="Cambria" pitchFamily="34" charset="-122"/>
-                <a:cs typeface="Cambria" pitchFamily="34" charset="-120"/>
-              </a:rPr>
-              <a:t>Notas e decisões</a:t>
-            </a:r>
-            <a:endParaRPr lang="en-US" sz="1800" dirty="0"/>
-          </a:p>
-        </p:txBody>
-      </p:sp>
-      <p:sp>
-        <p:nvSpPr>
-          <p:cNvPr id="8" name="Text 5"/>
-          <p:cNvSpPr txBox="1"/>
-          <p:nvPr/>
-        </p:nvSpPr>
-        <p:spPr>
-          <a:xfrm>
-            <a:off x="777240" y="3337560"/>
-            <a:ext cx="2103120" cy="2468880"/>
-          </a:xfrm>
-          <a:prstGeom prst="rect">
-            <a:avLst/>
-          </a:prstGeom>
-          <a:noFill/>
-          <a:ln/>
-        </p:spPr>
-        <p:txBody>
-          <a:bodyPr wrap="square" lIns="0" tIns="0" rIns="0" bIns="0" rtlCol="0" anchor="t"/>
-          <a:lstStyle/>
-          <a:p>
-            <a:pPr indent="0" marL="0">
-              <a:buNone/>
-            </a:pPr>
-            <a:r>
-              <a:rPr lang="en-US" sz="1500" dirty="0">
-                <a:solidFill>
-                  <a:srgbClr val="3B2A2A"/>
-                </a:solidFill>
-              </a:rPr>
-              <a:t>Atribuir nota, aprovar ou reprovar.</a:t>
-            </a:r>
-            <a:endParaRPr lang="en-US" sz="1500" dirty="0"/>
-          </a:p>
-        </p:txBody>
-      </p:sp>
-      <p:sp>
-        <p:nvSpPr>
-          <p:cNvPr id="9" name="Shape 6"/>
-          <p:cNvSpPr/>
-          <p:nvPr/>
-        </p:nvSpPr>
-        <p:spPr>
-          <a:xfrm>
-            <a:off x="3383280" y="1463040"/>
-            <a:ext cx="2560320" cy="4480560"/>
-          </a:xfrm>
-          <a:prstGeom prst="roundRect">
-            <a:avLst>
-              <a:gd name="adj" fmla="val 5357"/>
-            </a:avLst>
-          </a:prstGeom>
-          <a:solidFill>
-            <a:srgbClr val="F7EFE6"/>
-          </a:solidFill>
-          <a:ln w="12700">
-            <a:solidFill>
-              <a:srgbClr val="F7EFE6"/>
-            </a:solidFill>
-            <a:prstDash val="solid"/>
-          </a:ln>
-          <a:effectLst>
-            <a:outerShdw sx="100000" sy="100000" kx="0" ky="0" algn="bl" rotWithShape="0" blurRad="76200" dist="25400" dir="5400000">
-              <a:srgbClr val="000000">
-                <a:alpha val="12000"/>
-              </a:srgbClr>
-            </a:outerShdw>
-          </a:effectLst>
-        </p:spPr>
-      </p:sp>
-      <p:sp>
-        <p:nvSpPr>
-          <p:cNvPr id="10" name="Shape 7"/>
-          <p:cNvSpPr/>
-          <p:nvPr/>
-        </p:nvSpPr>
-        <p:spPr>
-          <a:xfrm>
-            <a:off x="3611880" y="1691640"/>
-            <a:ext cx="640080" cy="640080"/>
-          </a:xfrm>
-          <a:prstGeom prst="ellipse">
-            <a:avLst/>
-          </a:prstGeom>
-          <a:solidFill>
-            <a:srgbClr val="2A9D8F"/>
-          </a:solidFill>
-          <a:ln w="12700">
-            <a:solidFill>
-              <a:srgbClr val="2A9D8F"/>
-            </a:solidFill>
-            <a:prstDash val="solid"/>
-          </a:ln>
-        </p:spPr>
-      </p:sp>
-      <p:sp>
-        <p:nvSpPr>
-          <p:cNvPr id="11" name="Text 8"/>
-          <p:cNvSpPr txBox="1"/>
-          <p:nvPr/>
-        </p:nvSpPr>
-        <p:spPr>
-          <a:xfrm>
-            <a:off x="3611880" y="1691640"/>
-            <a:ext cx="640080" cy="640080"/>
-          </a:xfrm>
-          <a:prstGeom prst="rect">
-            <a:avLst/>
-          </a:prstGeom>
-          <a:noFill/>
-          <a:ln/>
-        </p:spPr>
-        <p:txBody>
-          <a:bodyPr wrap="square" lIns="0" tIns="0" rIns="0" bIns="0" rtlCol="0" anchor="ctr"/>
-          <a:lstStyle/>
-          <a:p>
-            <a:pPr algn="ctr" indent="0" marL="0">
-              <a:buNone/>
-            </a:pPr>
-            <a:r>
-              <a:rPr lang="en-US" sz="1600" b="1" dirty="0">
-                <a:solidFill>
-                  <a:srgbClr val="FFFFFF"/>
-                </a:solidFill>
-                <a:latin typeface="Cambria" pitchFamily="34" charset="0"/>
-                <a:ea typeface="Cambria" pitchFamily="34" charset="-122"/>
-                <a:cs typeface="Cambria" pitchFamily="34" charset="-120"/>
-              </a:rPr>
-              <a:t>2</a:t>
-            </a:r>
-            <a:endParaRPr lang="en-US" sz="1600" dirty="0"/>
-          </a:p>
-        </p:txBody>
-      </p:sp>
-      <p:sp>
-        <p:nvSpPr>
-          <p:cNvPr id="12" name="Text 9"/>
-          <p:cNvSpPr txBox="1"/>
-          <p:nvPr/>
-        </p:nvSpPr>
-        <p:spPr>
-          <a:xfrm>
-            <a:off x="3611880" y="2468880"/>
-            <a:ext cx="2103120" cy="822960"/>
-          </a:xfrm>
-          <a:prstGeom prst="rect">
-            <a:avLst/>
-          </a:prstGeom>
-          <a:noFill/>
-          <a:ln/>
-        </p:spPr>
-        <p:txBody>
-          <a:bodyPr wrap="square" lIns="0" tIns="0" rIns="0" bIns="0" rtlCol="0" anchor="t"/>
-          <a:lstStyle/>
-          <a:p>
-            <a:pPr indent="0" marL="0">
-              <a:buNone/>
-            </a:pPr>
-            <a:r>
-              <a:rPr lang="en-US" sz="1800" b="1" dirty="0">
-                <a:solidFill>
-                  <a:srgbClr val="5A2E2A"/>
-                </a:solidFill>
-                <a:latin typeface="Cambria" pitchFamily="34" charset="0"/>
-                <a:ea typeface="Cambria" pitchFamily="34" charset="-122"/>
-                <a:cs typeface="Cambria" pitchFamily="34" charset="-120"/>
-              </a:rPr>
-              <a:t>Situações sensíveis</a:t>
-            </a:r>
-            <a:endParaRPr lang="en-US" sz="1800" dirty="0"/>
-          </a:p>
-        </p:txBody>
-      </p:sp>
-      <p:sp>
-        <p:nvSpPr>
-          <p:cNvPr id="13" name="Text 10"/>
-          <p:cNvSpPr txBox="1"/>
-          <p:nvPr/>
-        </p:nvSpPr>
-        <p:spPr>
-          <a:xfrm>
-            <a:off x="3611880" y="3337560"/>
-            <a:ext cx="2103120" cy="2468880"/>
-          </a:xfrm>
-          <a:prstGeom prst="rect">
-            <a:avLst/>
-          </a:prstGeom>
-          <a:noFill/>
-          <a:ln/>
-        </p:spPr>
-        <p:txBody>
-          <a:bodyPr wrap="square" lIns="0" tIns="0" rIns="0" bIns="0" rtlCol="0" anchor="t"/>
-          <a:lstStyle/>
-          <a:p>
-            <a:pPr indent="0" marL="0">
-              <a:buNone/>
-            </a:pPr>
-            <a:r>
-              <a:rPr lang="en-US" sz="1500" dirty="0">
-                <a:solidFill>
-                  <a:srgbClr val="3B2A2A"/>
-                </a:solidFill>
-              </a:rPr>
-              <a:t>Dificuldades pessoais, relatos de sofrimento, suspeita de má conduta.</a:t>
-            </a:r>
-            <a:endParaRPr lang="en-US" sz="1500" dirty="0"/>
-          </a:p>
-        </p:txBody>
-      </p:sp>
-      <p:sp>
-        <p:nvSpPr>
-          <p:cNvPr id="14" name="Shape 11"/>
-          <p:cNvSpPr/>
-          <p:nvPr/>
-        </p:nvSpPr>
-        <p:spPr>
-          <a:xfrm>
-            <a:off x="6217920" y="1463040"/>
-            <a:ext cx="2560320" cy="4480560"/>
-          </a:xfrm>
-          <a:prstGeom prst="roundRect">
-            <a:avLst>
-              <a:gd name="adj" fmla="val 5357"/>
-            </a:avLst>
-          </a:prstGeom>
-          <a:solidFill>
-            <a:srgbClr val="F7EFE6"/>
-          </a:solidFill>
-          <a:ln w="12700">
-            <a:solidFill>
-              <a:srgbClr val="F7EFE6"/>
-            </a:solidFill>
-            <a:prstDash val="solid"/>
-          </a:ln>
-          <a:effectLst>
-            <a:outerShdw sx="100000" sy="100000" kx="0" ky="0" algn="bl" rotWithShape="0" blurRad="76200" dist="25400" dir="5400000">
-              <a:srgbClr val="000000">
-                <a:alpha val="12000"/>
-              </a:srgbClr>
-            </a:outerShdw>
-          </a:effectLst>
-        </p:spPr>
-      </p:sp>
-      <p:sp>
-        <p:nvSpPr>
-          <p:cNvPr id="15" name="Shape 12"/>
-          <p:cNvSpPr/>
-          <p:nvPr/>
-        </p:nvSpPr>
-        <p:spPr>
-          <a:xfrm>
-            <a:off x="6446520" y="1691640"/>
-            <a:ext cx="640080" cy="640080"/>
-          </a:xfrm>
-          <a:prstGeom prst="ellipse">
-            <a:avLst/>
-          </a:prstGeom>
-          <a:solidFill>
-            <a:srgbClr val="6D3B6E"/>
-          </a:solidFill>
-          <a:ln w="12700">
-            <a:solidFill>
-              <a:srgbClr val="6D3B6E"/>
-            </a:solidFill>
-            <a:prstDash val="solid"/>
-          </a:ln>
-        </p:spPr>
-      </p:sp>
-      <p:sp>
-        <p:nvSpPr>
-          <p:cNvPr id="16" name="Text 13"/>
-          <p:cNvSpPr txBox="1"/>
-          <p:nvPr/>
-        </p:nvSpPr>
-        <p:spPr>
-          <a:xfrm>
-            <a:off x="6446520" y="1691640"/>
-            <a:ext cx="640080" cy="640080"/>
-          </a:xfrm>
-          <a:prstGeom prst="rect">
-            <a:avLst/>
-          </a:prstGeom>
-          <a:noFill/>
-          <a:ln/>
-        </p:spPr>
-        <p:txBody>
-          <a:bodyPr wrap="square" lIns="0" tIns="0" rIns="0" bIns="0" rtlCol="0" anchor="ctr"/>
-          <a:lstStyle/>
-          <a:p>
-            <a:pPr algn="ctr" indent="0" marL="0">
-              <a:buNone/>
-            </a:pPr>
-            <a:r>
-              <a:rPr lang="en-US" sz="1600" b="1" dirty="0">
-                <a:solidFill>
-                  <a:srgbClr val="FFFFFF"/>
-                </a:solidFill>
-                <a:latin typeface="Cambria" pitchFamily="34" charset="0"/>
-                <a:ea typeface="Cambria" pitchFamily="34" charset="-122"/>
-                <a:cs typeface="Cambria" pitchFamily="34" charset="-120"/>
-              </a:rPr>
-              <a:t>3</a:t>
-            </a:r>
-            <a:endParaRPr lang="en-US" sz="1600" dirty="0"/>
-          </a:p>
-        </p:txBody>
-      </p:sp>
-      <p:sp>
-        <p:nvSpPr>
-          <p:cNvPr id="17" name="Text 14"/>
-          <p:cNvSpPr txBox="1"/>
-          <p:nvPr/>
-        </p:nvSpPr>
-        <p:spPr>
-          <a:xfrm>
-            <a:off x="6446520" y="2468880"/>
-            <a:ext cx="2103120" cy="822960"/>
-          </a:xfrm>
-          <a:prstGeom prst="rect">
-            <a:avLst/>
-          </a:prstGeom>
-          <a:noFill/>
-          <a:ln/>
-        </p:spPr>
-        <p:txBody>
-          <a:bodyPr wrap="square" lIns="0" tIns="0" rIns="0" bIns="0" rtlCol="0" anchor="t"/>
-          <a:lstStyle/>
-          <a:p>
-            <a:pPr indent="0" marL="0">
-              <a:buNone/>
-            </a:pPr>
-            <a:r>
-              <a:rPr lang="en-US" sz="1800" b="1" dirty="0">
-                <a:solidFill>
-                  <a:srgbClr val="5A2E2A"/>
-                </a:solidFill>
-                <a:latin typeface="Cambria" pitchFamily="34" charset="0"/>
-                <a:ea typeface="Cambria" pitchFamily="34" charset="-122"/>
-                <a:cs typeface="Cambria" pitchFamily="34" charset="-120"/>
-              </a:rPr>
-              <a:t>Sem anonimizar</a:t>
-            </a:r>
-            <a:endParaRPr lang="en-US" sz="1800" dirty="0"/>
-          </a:p>
-        </p:txBody>
-      </p:sp>
-      <p:sp>
-        <p:nvSpPr>
-          <p:cNvPr id="18" name="Text 15"/>
-          <p:cNvSpPr txBox="1"/>
-          <p:nvPr/>
-        </p:nvSpPr>
-        <p:spPr>
-          <a:xfrm>
-            <a:off x="6446520" y="3337560"/>
-            <a:ext cx="2103120" cy="2468880"/>
-          </a:xfrm>
-          <a:prstGeom prst="rect">
-            <a:avLst/>
-          </a:prstGeom>
-          <a:noFill/>
-          <a:ln/>
-        </p:spPr>
-        <p:txBody>
-          <a:bodyPr wrap="square" lIns="0" tIns="0" rIns="0" bIns="0" rtlCol="0" anchor="t"/>
-          <a:lstStyle/>
-          <a:p>
-            <a:pPr indent="0" marL="0">
-              <a:buNone/>
-            </a:pPr>
-            <a:r>
-              <a:rPr lang="en-US" sz="1500" dirty="0">
-                <a:solidFill>
-                  <a:srgbClr val="3B2A2A"/>
-                </a:solidFill>
-              </a:rPr>
-              <a:t>Se não dá para anonimizar o material, não envie.</a:t>
-            </a:r>
-            <a:endParaRPr lang="en-US" sz="1500" dirty="0"/>
-          </a:p>
-        </p:txBody>
-      </p:sp>
-      <p:sp>
-        <p:nvSpPr>
-          <p:cNvPr id="19" name="Shape 16"/>
-          <p:cNvSpPr/>
-          <p:nvPr/>
-        </p:nvSpPr>
-        <p:spPr>
-          <a:xfrm>
-            <a:off x="9052560" y="1463040"/>
-            <a:ext cx="2560320" cy="4480560"/>
-          </a:xfrm>
-          <a:prstGeom prst="roundRect">
-            <a:avLst>
-              <a:gd name="adj" fmla="val 5357"/>
-            </a:avLst>
-          </a:prstGeom>
-          <a:solidFill>
-            <a:srgbClr val="F7EFE6"/>
-          </a:solidFill>
-          <a:ln w="12700">
-            <a:solidFill>
-              <a:srgbClr val="F7EFE6"/>
-            </a:solidFill>
-            <a:prstDash val="solid"/>
-          </a:ln>
-          <a:effectLst>
-            <a:outerShdw sx="100000" sy="100000" kx="0" ky="0" algn="bl" rotWithShape="0" blurRad="76200" dist="25400" dir="5400000">
-              <a:srgbClr val="000000">
-                <a:alpha val="12000"/>
-              </a:srgbClr>
-            </a:outerShdw>
-          </a:effectLst>
-        </p:spPr>
-      </p:sp>
-      <p:sp>
-        <p:nvSpPr>
-          <p:cNvPr id="20" name="Shape 17"/>
-          <p:cNvSpPr/>
-          <p:nvPr/>
-        </p:nvSpPr>
-        <p:spPr>
-          <a:xfrm>
-            <a:off x="9281160" y="1691640"/>
-            <a:ext cx="640080" cy="640080"/>
-          </a:xfrm>
-          <a:prstGeom prst="ellipse">
-            <a:avLst/>
-          </a:prstGeom>
-          <a:solidFill>
-            <a:srgbClr val="3D7EA6"/>
-          </a:solidFill>
-          <a:ln w="12700">
-            <a:solidFill>
-              <a:srgbClr val="3D7EA6"/>
-            </a:solidFill>
-            <a:prstDash val="solid"/>
-          </a:ln>
-        </p:spPr>
-      </p:sp>
-      <p:sp>
-        <p:nvSpPr>
-          <p:cNvPr id="21" name="Text 18"/>
-          <p:cNvSpPr txBox="1"/>
-          <p:nvPr/>
-        </p:nvSpPr>
-        <p:spPr>
-          <a:xfrm>
-            <a:off x="9281160" y="1691640"/>
-            <a:ext cx="640080" cy="640080"/>
-          </a:xfrm>
-          <a:prstGeom prst="rect">
-            <a:avLst/>
-          </a:prstGeom>
-          <a:noFill/>
-          <a:ln/>
-        </p:spPr>
-        <p:txBody>
-          <a:bodyPr wrap="square" lIns="0" tIns="0" rIns="0" bIns="0" rtlCol="0" anchor="ctr"/>
-          <a:lstStyle/>
-          <a:p>
-            <a:pPr algn="ctr" indent="0" marL="0">
-              <a:buNone/>
-            </a:pPr>
-            <a:r>
-              <a:rPr lang="en-US" sz="1600" b="1" dirty="0">
-                <a:solidFill>
-                  <a:srgbClr val="FFFFFF"/>
-                </a:solidFill>
-                <a:latin typeface="Cambria" pitchFamily="34" charset="0"/>
-                <a:ea typeface="Cambria" pitchFamily="34" charset="-122"/>
-                <a:cs typeface="Cambria" pitchFamily="34" charset="-120"/>
-              </a:rPr>
-              <a:t>4</a:t>
-            </a:r>
-            <a:endParaRPr lang="en-US" sz="1600" dirty="0"/>
-          </a:p>
-        </p:txBody>
-      </p:sp>
-      <p:sp>
-        <p:nvSpPr>
-          <p:cNvPr id="22" name="Text 19"/>
-          <p:cNvSpPr txBox="1"/>
-          <p:nvPr/>
-        </p:nvSpPr>
-        <p:spPr>
-          <a:xfrm>
-            <a:off x="9281160" y="2468880"/>
-            <a:ext cx="2103120" cy="822960"/>
-          </a:xfrm>
-          <a:prstGeom prst="rect">
-            <a:avLst/>
-          </a:prstGeom>
-          <a:noFill/>
-          <a:ln/>
-        </p:spPr>
-        <p:txBody>
-          <a:bodyPr wrap="square" lIns="0" tIns="0" rIns="0" bIns="0" rtlCol="0" anchor="t"/>
-          <a:lstStyle/>
-          <a:p>
-            <a:pPr indent="0" marL="0">
-              <a:buNone/>
-            </a:pPr>
-            <a:r>
-              <a:rPr lang="en-US" sz="1800" b="1" dirty="0">
-                <a:solidFill>
-                  <a:srgbClr val="5A2E2A"/>
-                </a:solidFill>
-                <a:latin typeface="Cambria" pitchFamily="34" charset="0"/>
-                <a:ea typeface="Cambria" pitchFamily="34" charset="-122"/>
-                <a:cs typeface="Cambria" pitchFamily="34" charset="-120"/>
-              </a:rPr>
-              <a:t>Sem tempo de revisar</a:t>
-            </a:r>
-            <a:endParaRPr lang="en-US" sz="1800" dirty="0"/>
-          </a:p>
-        </p:txBody>
-      </p:sp>
-      <p:sp>
-        <p:nvSpPr>
-          <p:cNvPr id="23" name="Text 20"/>
-          <p:cNvSpPr txBox="1"/>
-          <p:nvPr/>
-        </p:nvSpPr>
-        <p:spPr>
-          <a:xfrm>
-            <a:off x="9281160" y="3337560"/>
-            <a:ext cx="2103120" cy="2468880"/>
-          </a:xfrm>
-          <a:prstGeom prst="rect">
-            <a:avLst/>
-          </a:prstGeom>
-          <a:noFill/>
-          <a:ln/>
-        </p:spPr>
-        <p:txBody>
-          <a:bodyPr wrap="square" lIns="0" tIns="0" rIns="0" bIns="0" rtlCol="0" anchor="t"/>
-          <a:lstStyle/>
-          <a:p>
-            <a:pPr indent="0" marL="0">
-              <a:buNone/>
-            </a:pPr>
-            <a:r>
-              <a:rPr lang="en-US" sz="1500" dirty="0">
-                <a:solidFill>
-                  <a:srgbClr val="3B2A2A"/>
-                </a:solidFill>
-              </a:rPr>
-              <a:t>Ou quando o objetivo é avaliar o estudante sem apoio.</a:t>
-            </a:r>
-            <a:endParaRPr lang="en-US" sz="1500" dirty="0"/>
-          </a:p>
-        </p:txBody>
-      </p:sp>
-      <p:sp>
-        <p:nvSpPr>
-          <p:cNvPr id="24" name="Text 21"/>
+              <a:rPr lang="en-US" sz="1400" i="1" dirty="0">
+                <a:solidFill>
+                  <a:srgbClr val="6B5F59"/>
+                </a:solidFill>
+              </a:rPr>
+              <a:t>Figura 22.3 — Sob responsabilidade do professor, com a IA como rascunho.</a:t>
+            </a:r>
+            <a:endParaRPr lang="en-US" sz="1400" dirty="0"/>
+          </a:p>
+        </p:txBody>
+      </p:sp>
+      <p:sp>
+        <p:nvSpPr>
+          <p:cNvPr id="6" name="Text 2"/>
           <p:cNvSpPr txBox="1"/>
           <p:nvPr/>
         </p:nvSpPr>
@@ -10407,6 +10342,734 @@
 <file path=ppt/slides/slide22.xml><?xml version="1.0" encoding="utf-8"?>
 <p:sld xmlns:a="http://schemas.openxmlformats.org/drawingml/2006/main" xmlns:r="http://schemas.openxmlformats.org/officeDocument/2006/relationships" xmlns:p="http://schemas.openxmlformats.org/presentationml/2006/main">
   <p:cSld name="Slide 22">
+    <p:bg>
+      <p:bgPr>
+        <a:solidFill>
+          <a:srgbClr val="6D3B6E"/>
+        </a:solidFill>
+      </p:bgPr>
+    </p:bg>
+    <p:spTree>
+      <p:nvGrpSpPr>
+        <p:cNvPr id="1" name=""/>
+        <p:cNvGrpSpPr/>
+        <p:nvPr/>
+      </p:nvGrpSpPr>
+      <p:grpSpPr>
+        <a:xfrm>
+          <a:off x="0" y="0"/>
+          <a:ext cx="0" cy="0"/>
+          <a:chOff x="0" y="0"/>
+          <a:chExt cx="0" cy="0"/>
+        </a:xfrm>
+      </p:grpSpPr>
+      <p:sp>
+        <p:nvSpPr>
+          <p:cNvPr id="3" name="Text 0"/>
+          <p:cNvSpPr txBox="1"/>
+          <p:nvPr/>
+        </p:nvSpPr>
+        <p:spPr>
+          <a:xfrm>
+            <a:off x="548640" y="365760"/>
+            <a:ext cx="11064240" cy="822960"/>
+          </a:xfrm>
+          <a:prstGeom prst="rect">
+            <a:avLst/>
+          </a:prstGeom>
+          <a:noFill/>
+          <a:ln/>
+        </p:spPr>
+        <p:txBody>
+          <a:bodyPr wrap="square" lIns="0" tIns="0" rIns="0" bIns="0" rtlCol="0" anchor="t"/>
+          <a:lstStyle/>
+          <a:p>
+            <a:pPr indent="0" marL="0">
+              <a:buNone/>
+            </a:pPr>
+            <a:r>
+              <a:rPr lang="en-US" sz="3400" b="1" dirty="0">
+                <a:solidFill>
+                  <a:srgbClr val="FFFFFF"/>
+                </a:solidFill>
+                <a:latin typeface="Cambria" pitchFamily="34" charset="0"/>
+                <a:ea typeface="Cambria" pitchFamily="34" charset="-122"/>
+                <a:cs typeface="Cambria" pitchFamily="34" charset="-120"/>
+              </a:rPr>
+              <a:t>O que vale a pena lembrar</a:t>
+            </a:r>
+            <a:endParaRPr lang="en-US" sz="3400" dirty="0"/>
+          </a:p>
+        </p:txBody>
+      </p:sp>
+      <p:sp>
+        <p:nvSpPr>
+          <p:cNvPr id="4" name="Shape 1"/>
+          <p:cNvSpPr/>
+          <p:nvPr/>
+        </p:nvSpPr>
+        <p:spPr>
+          <a:xfrm>
+            <a:off x="548640" y="1417320"/>
+            <a:ext cx="11064240" cy="762000"/>
+          </a:xfrm>
+          <a:prstGeom prst="roundRect">
+            <a:avLst>
+              <a:gd name="adj" fmla="val 14400"/>
+            </a:avLst>
+          </a:prstGeom>
+          <a:solidFill>
+            <a:srgbClr val="FFFFFF">
+              <a:alpha val="88000"/>
+            </a:srgbClr>
+          </a:solidFill>
+          <a:ln w="12700">
+            <a:solidFill>
+              <a:srgbClr val="FFFFFF">
+                <a:alpha val="88000"/>
+              </a:srgbClr>
+            </a:solidFill>
+            <a:prstDash val="solid"/>
+          </a:ln>
+        </p:spPr>
+      </p:sp>
+      <p:sp>
+        <p:nvSpPr>
+          <p:cNvPr id="5" name="Text 2"/>
+          <p:cNvSpPr txBox="1"/>
+          <p:nvPr/>
+        </p:nvSpPr>
+        <p:spPr>
+          <a:xfrm>
+            <a:off x="731520" y="1417320"/>
+            <a:ext cx="548640" cy="762000"/>
+          </a:xfrm>
+          <a:prstGeom prst="rect">
+            <a:avLst/>
+          </a:prstGeom>
+          <a:noFill/>
+          <a:ln/>
+        </p:spPr>
+        <p:txBody>
+          <a:bodyPr wrap="square" lIns="0" tIns="0" rIns="0" bIns="0" rtlCol="0" anchor="ctr"/>
+          <a:lstStyle/>
+          <a:p>
+            <a:pPr algn="ctr" indent="0" marL="0">
+              <a:buNone/>
+            </a:pPr>
+            <a:r>
+              <a:rPr lang="en-US" sz="2400" b="1" dirty="0">
+                <a:solidFill>
+                  <a:srgbClr val="6D3B6E"/>
+                </a:solidFill>
+              </a:rPr>
+              <a:t>✓</a:t>
+            </a:r>
+            <a:endParaRPr lang="en-US" sz="2400" dirty="0"/>
+          </a:p>
+        </p:txBody>
+      </p:sp>
+      <p:sp>
+        <p:nvSpPr>
+          <p:cNvPr id="6" name="Text 3"/>
+          <p:cNvSpPr txBox="1"/>
+          <p:nvPr/>
+        </p:nvSpPr>
+        <p:spPr>
+          <a:xfrm>
+            <a:off x="1463040" y="1417320"/>
+            <a:ext cx="9966960" cy="762000"/>
+          </a:xfrm>
+          <a:prstGeom prst="rect">
+            <a:avLst/>
+          </a:prstGeom>
+          <a:noFill/>
+          <a:ln/>
+        </p:spPr>
+        <p:txBody>
+          <a:bodyPr wrap="square" lIns="0" tIns="0" rIns="0" bIns="0" rtlCol="0" anchor="ctr"/>
+          <a:lstStyle/>
+          <a:p>
+            <a:pPr indent="0" marL="0">
+              <a:buNone/>
+            </a:pPr>
+            <a:r>
+              <a:rPr lang="en-US" sz="1800" b="1" dirty="0">
+                <a:solidFill>
+                  <a:srgbClr val="3B2A2A"/>
+                </a:solidFill>
+              </a:rPr>
+              <a:t>Diagnóstico orienta, formativa ajusta, somativa certifica</a:t>
+            </a:r>
+            <a:endParaRPr lang="en-US" sz="1800" dirty="0"/>
+          </a:p>
+        </p:txBody>
+      </p:sp>
+      <p:sp>
+        <p:nvSpPr>
+          <p:cNvPr id="7" name="Shape 4"/>
+          <p:cNvSpPr/>
+          <p:nvPr/>
+        </p:nvSpPr>
+        <p:spPr>
+          <a:xfrm>
+            <a:off x="548640" y="2289048"/>
+            <a:ext cx="11064240" cy="762000"/>
+          </a:xfrm>
+          <a:prstGeom prst="roundRect">
+            <a:avLst>
+              <a:gd name="adj" fmla="val 14400"/>
+            </a:avLst>
+          </a:prstGeom>
+          <a:solidFill>
+            <a:srgbClr val="FFFFFF">
+              <a:alpha val="88000"/>
+            </a:srgbClr>
+          </a:solidFill>
+          <a:ln w="12700">
+            <a:solidFill>
+              <a:srgbClr val="FFFFFF">
+                <a:alpha val="88000"/>
+              </a:srgbClr>
+            </a:solidFill>
+            <a:prstDash val="solid"/>
+          </a:ln>
+        </p:spPr>
+      </p:sp>
+      <p:sp>
+        <p:nvSpPr>
+          <p:cNvPr id="8" name="Text 5"/>
+          <p:cNvSpPr txBox="1"/>
+          <p:nvPr/>
+        </p:nvSpPr>
+        <p:spPr>
+          <a:xfrm>
+            <a:off x="731520" y="2289048"/>
+            <a:ext cx="548640" cy="762000"/>
+          </a:xfrm>
+          <a:prstGeom prst="rect">
+            <a:avLst/>
+          </a:prstGeom>
+          <a:noFill/>
+          <a:ln/>
+        </p:spPr>
+        <p:txBody>
+          <a:bodyPr wrap="square" lIns="0" tIns="0" rIns="0" bIns="0" rtlCol="0" anchor="ctr"/>
+          <a:lstStyle/>
+          <a:p>
+            <a:pPr algn="ctr" indent="0" marL="0">
+              <a:buNone/>
+            </a:pPr>
+            <a:r>
+              <a:rPr lang="en-US" sz="2400" b="1" dirty="0">
+                <a:solidFill>
+                  <a:srgbClr val="6D3B6E"/>
+                </a:solidFill>
+              </a:rPr>
+              <a:t>✓</a:t>
+            </a:r>
+            <a:endParaRPr lang="en-US" sz="2400" dirty="0"/>
+          </a:p>
+        </p:txBody>
+      </p:sp>
+      <p:sp>
+        <p:nvSpPr>
+          <p:cNvPr id="9" name="Text 6"/>
+          <p:cNvSpPr txBox="1"/>
+          <p:nvPr/>
+        </p:nvSpPr>
+        <p:spPr>
+          <a:xfrm>
+            <a:off x="1463040" y="2289048"/>
+            <a:ext cx="9966960" cy="762000"/>
+          </a:xfrm>
+          <a:prstGeom prst="rect">
+            <a:avLst/>
+          </a:prstGeom>
+          <a:noFill/>
+          <a:ln/>
+        </p:spPr>
+        <p:txBody>
+          <a:bodyPr wrap="square" lIns="0" tIns="0" rIns="0" bIns="0" rtlCol="0" anchor="ctr"/>
+          <a:lstStyle/>
+          <a:p>
+            <a:pPr indent="0" marL="0">
+              <a:buNone/>
+            </a:pPr>
+            <a:r>
+              <a:rPr lang="en-US" sz="1800" b="1" dirty="0">
+                <a:solidFill>
+                  <a:srgbClr val="3B2A2A"/>
+                </a:solidFill>
+              </a:rPr>
+              <a:t>Diagnóstico bom: curto, específico, leva a uma decisão</a:t>
+            </a:r>
+            <a:endParaRPr lang="en-US" sz="1800" dirty="0"/>
+          </a:p>
+        </p:txBody>
+      </p:sp>
+      <p:sp>
+        <p:nvSpPr>
+          <p:cNvPr id="10" name="Shape 7"/>
+          <p:cNvSpPr/>
+          <p:nvPr/>
+        </p:nvSpPr>
+        <p:spPr>
+          <a:xfrm>
+            <a:off x="548640" y="3160776"/>
+            <a:ext cx="11064240" cy="762000"/>
+          </a:xfrm>
+          <a:prstGeom prst="roundRect">
+            <a:avLst>
+              <a:gd name="adj" fmla="val 14400"/>
+            </a:avLst>
+          </a:prstGeom>
+          <a:solidFill>
+            <a:srgbClr val="FFFFFF">
+              <a:alpha val="88000"/>
+            </a:srgbClr>
+          </a:solidFill>
+          <a:ln w="12700">
+            <a:solidFill>
+              <a:srgbClr val="FFFFFF">
+                <a:alpha val="88000"/>
+              </a:srgbClr>
+            </a:solidFill>
+            <a:prstDash val="solid"/>
+          </a:ln>
+        </p:spPr>
+      </p:sp>
+      <p:sp>
+        <p:nvSpPr>
+          <p:cNvPr id="11" name="Text 8"/>
+          <p:cNvSpPr txBox="1"/>
+          <p:nvPr/>
+        </p:nvSpPr>
+        <p:spPr>
+          <a:xfrm>
+            <a:off x="731520" y="3160776"/>
+            <a:ext cx="548640" cy="762000"/>
+          </a:xfrm>
+          <a:prstGeom prst="rect">
+            <a:avLst/>
+          </a:prstGeom>
+          <a:noFill/>
+          <a:ln/>
+        </p:spPr>
+        <p:txBody>
+          <a:bodyPr wrap="square" lIns="0" tIns="0" rIns="0" bIns="0" rtlCol="0" anchor="ctr"/>
+          <a:lstStyle/>
+          <a:p>
+            <a:pPr algn="ctr" indent="0" marL="0">
+              <a:buNone/>
+            </a:pPr>
+            <a:r>
+              <a:rPr lang="en-US" sz="2400" b="1" dirty="0">
+                <a:solidFill>
+                  <a:srgbClr val="6D3B6E"/>
+                </a:solidFill>
+              </a:rPr>
+              <a:t>✓</a:t>
+            </a:r>
+            <a:endParaRPr lang="en-US" sz="2400" dirty="0"/>
+          </a:p>
+        </p:txBody>
+      </p:sp>
+      <p:sp>
+        <p:nvSpPr>
+          <p:cNvPr id="12" name="Text 9"/>
+          <p:cNvSpPr txBox="1"/>
+          <p:nvPr/>
+        </p:nvSpPr>
+        <p:spPr>
+          <a:xfrm>
+            <a:off x="1463040" y="3160776"/>
+            <a:ext cx="9966960" cy="762000"/>
+          </a:xfrm>
+          <a:prstGeom prst="rect">
+            <a:avLst/>
+          </a:prstGeom>
+          <a:noFill/>
+          <a:ln/>
+        </p:spPr>
+        <p:txBody>
+          <a:bodyPr wrap="square" lIns="0" tIns="0" rIns="0" bIns="0" rtlCol="0" anchor="ctr"/>
+          <a:lstStyle/>
+          <a:p>
+            <a:pPr indent="0" marL="0">
+              <a:buNone/>
+            </a:pPr>
+            <a:r>
+              <a:rPr lang="en-US" sz="1800" b="1" dirty="0">
+                <a:solidFill>
+                  <a:srgbClr val="3B2A2A"/>
+                </a:solidFill>
+              </a:rPr>
+              <a:t>Rubricas valem antes e durante a tarefa, com critérios observáveis</a:t>
+            </a:r>
+            <a:endParaRPr lang="en-US" sz="1800" dirty="0"/>
+          </a:p>
+        </p:txBody>
+      </p:sp>
+      <p:sp>
+        <p:nvSpPr>
+          <p:cNvPr id="13" name="Shape 10"/>
+          <p:cNvSpPr/>
+          <p:nvPr/>
+        </p:nvSpPr>
+        <p:spPr>
+          <a:xfrm>
+            <a:off x="548640" y="4032504"/>
+            <a:ext cx="11064240" cy="762000"/>
+          </a:xfrm>
+          <a:prstGeom prst="roundRect">
+            <a:avLst>
+              <a:gd name="adj" fmla="val 14400"/>
+            </a:avLst>
+          </a:prstGeom>
+          <a:solidFill>
+            <a:srgbClr val="FFFFFF">
+              <a:alpha val="88000"/>
+            </a:srgbClr>
+          </a:solidFill>
+          <a:ln w="12700">
+            <a:solidFill>
+              <a:srgbClr val="FFFFFF">
+                <a:alpha val="88000"/>
+              </a:srgbClr>
+            </a:solidFill>
+            <a:prstDash val="solid"/>
+          </a:ln>
+        </p:spPr>
+      </p:sp>
+      <p:sp>
+        <p:nvSpPr>
+          <p:cNvPr id="14" name="Text 11"/>
+          <p:cNvSpPr txBox="1"/>
+          <p:nvPr/>
+        </p:nvSpPr>
+        <p:spPr>
+          <a:xfrm>
+            <a:off x="731520" y="4032504"/>
+            <a:ext cx="548640" cy="762000"/>
+          </a:xfrm>
+          <a:prstGeom prst="rect">
+            <a:avLst/>
+          </a:prstGeom>
+          <a:noFill/>
+          <a:ln/>
+        </p:spPr>
+        <p:txBody>
+          <a:bodyPr wrap="square" lIns="0" tIns="0" rIns="0" bIns="0" rtlCol="0" anchor="ctr"/>
+          <a:lstStyle/>
+          <a:p>
+            <a:pPr algn="ctr" indent="0" marL="0">
+              <a:buNone/>
+            </a:pPr>
+            <a:r>
+              <a:rPr lang="en-US" sz="2400" b="1" dirty="0">
+                <a:solidFill>
+                  <a:srgbClr val="6D3B6E"/>
+                </a:solidFill>
+              </a:rPr>
+              <a:t>✓</a:t>
+            </a:r>
+            <a:endParaRPr lang="en-US" sz="2400" dirty="0"/>
+          </a:p>
+        </p:txBody>
+      </p:sp>
+      <p:sp>
+        <p:nvSpPr>
+          <p:cNvPr id="15" name="Text 12"/>
+          <p:cNvSpPr txBox="1"/>
+          <p:nvPr/>
+        </p:nvSpPr>
+        <p:spPr>
+          <a:xfrm>
+            <a:off x="1463040" y="4032504"/>
+            <a:ext cx="9966960" cy="762000"/>
+          </a:xfrm>
+          <a:prstGeom prst="rect">
+            <a:avLst/>
+          </a:prstGeom>
+          <a:noFill/>
+          <a:ln/>
+        </p:spPr>
+        <p:txBody>
+          <a:bodyPr wrap="square" lIns="0" tIns="0" rIns="0" bIns="0" rtlCol="0" anchor="ctr"/>
+          <a:lstStyle/>
+          <a:p>
+            <a:pPr indent="0" marL="0">
+              <a:buNone/>
+            </a:pPr>
+            <a:r>
+              <a:rPr lang="en-US" sz="1800" b="1" dirty="0">
+                <a:solidFill>
+                  <a:srgbClr val="3B2A2A"/>
+                </a:solidFill>
+              </a:rPr>
+              <a:t>Feedback indica o próximo passo; a IA rascunha, você assina</a:t>
+            </a:r>
+            <a:endParaRPr lang="en-US" sz="1800" dirty="0"/>
+          </a:p>
+        </p:txBody>
+      </p:sp>
+      <p:sp>
+        <p:nvSpPr>
+          <p:cNvPr id="16" name="Shape 13"/>
+          <p:cNvSpPr/>
+          <p:nvPr/>
+        </p:nvSpPr>
+        <p:spPr>
+          <a:xfrm>
+            <a:off x="548640" y="4904232"/>
+            <a:ext cx="11064240" cy="762000"/>
+          </a:xfrm>
+          <a:prstGeom prst="roundRect">
+            <a:avLst>
+              <a:gd name="adj" fmla="val 14400"/>
+            </a:avLst>
+          </a:prstGeom>
+          <a:solidFill>
+            <a:srgbClr val="FFFFFF">
+              <a:alpha val="88000"/>
+            </a:srgbClr>
+          </a:solidFill>
+          <a:ln w="12700">
+            <a:solidFill>
+              <a:srgbClr val="FFFFFF">
+                <a:alpha val="88000"/>
+              </a:srgbClr>
+            </a:solidFill>
+            <a:prstDash val="solid"/>
+          </a:ln>
+        </p:spPr>
+      </p:sp>
+      <p:sp>
+        <p:nvSpPr>
+          <p:cNvPr id="17" name="Text 14"/>
+          <p:cNvSpPr txBox="1"/>
+          <p:nvPr/>
+        </p:nvSpPr>
+        <p:spPr>
+          <a:xfrm>
+            <a:off x="731520" y="4904232"/>
+            <a:ext cx="548640" cy="762000"/>
+          </a:xfrm>
+          <a:prstGeom prst="rect">
+            <a:avLst/>
+          </a:prstGeom>
+          <a:noFill/>
+          <a:ln/>
+        </p:spPr>
+        <p:txBody>
+          <a:bodyPr wrap="square" lIns="0" tIns="0" rIns="0" bIns="0" rtlCol="0" anchor="ctr"/>
+          <a:lstStyle/>
+          <a:p>
+            <a:pPr algn="ctr" indent="0" marL="0">
+              <a:buNone/>
+            </a:pPr>
+            <a:r>
+              <a:rPr lang="en-US" sz="2400" b="1" dirty="0">
+                <a:solidFill>
+                  <a:srgbClr val="6D3B6E"/>
+                </a:solidFill>
+              </a:rPr>
+              <a:t>✓</a:t>
+            </a:r>
+            <a:endParaRPr lang="en-US" sz="2400" dirty="0"/>
+          </a:p>
+        </p:txBody>
+      </p:sp>
+      <p:sp>
+        <p:nvSpPr>
+          <p:cNvPr id="18" name="Text 15"/>
+          <p:cNvSpPr txBox="1"/>
+          <p:nvPr/>
+        </p:nvSpPr>
+        <p:spPr>
+          <a:xfrm>
+            <a:off x="1463040" y="4904232"/>
+            <a:ext cx="9966960" cy="762000"/>
+          </a:xfrm>
+          <a:prstGeom prst="rect">
+            <a:avLst/>
+          </a:prstGeom>
+          <a:noFill/>
+          <a:ln/>
+        </p:spPr>
+        <p:txBody>
+          <a:bodyPr wrap="square" lIns="0" tIns="0" rIns="0" bIns="0" rtlCol="0" anchor="ctr"/>
+          <a:lstStyle/>
+          <a:p>
+            <a:pPr indent="0" marL="0">
+              <a:buNone/>
+            </a:pPr>
+            <a:r>
+              <a:rPr lang="en-US" sz="1800" b="1" dirty="0">
+                <a:solidFill>
+                  <a:srgbClr val="3B2A2A"/>
+                </a:solidFill>
+              </a:rPr>
+              <a:t>Não delegue notas; detectores não são prova isolada</a:t>
+            </a:r>
+            <a:endParaRPr lang="en-US" sz="1800" dirty="0"/>
+          </a:p>
+        </p:txBody>
+      </p:sp>
+      <p:sp>
+        <p:nvSpPr>
+          <p:cNvPr id="19" name="Shape 16"/>
+          <p:cNvSpPr/>
+          <p:nvPr/>
+        </p:nvSpPr>
+        <p:spPr>
+          <a:xfrm>
+            <a:off x="548640" y="5775960"/>
+            <a:ext cx="11064240" cy="762000"/>
+          </a:xfrm>
+          <a:prstGeom prst="roundRect">
+            <a:avLst>
+              <a:gd name="adj" fmla="val 14400"/>
+            </a:avLst>
+          </a:prstGeom>
+          <a:solidFill>
+            <a:srgbClr val="FFFFFF">
+              <a:alpha val="88000"/>
+            </a:srgbClr>
+          </a:solidFill>
+          <a:ln w="12700">
+            <a:solidFill>
+              <a:srgbClr val="FFFFFF">
+                <a:alpha val="88000"/>
+              </a:srgbClr>
+            </a:solidFill>
+            <a:prstDash val="solid"/>
+          </a:ln>
+        </p:spPr>
+      </p:sp>
+      <p:sp>
+        <p:nvSpPr>
+          <p:cNvPr id="20" name="Text 17"/>
+          <p:cNvSpPr txBox="1"/>
+          <p:nvPr/>
+        </p:nvSpPr>
+        <p:spPr>
+          <a:xfrm>
+            <a:off x="731520" y="5775960"/>
+            <a:ext cx="548640" cy="762000"/>
+          </a:xfrm>
+          <a:prstGeom prst="rect">
+            <a:avLst/>
+          </a:prstGeom>
+          <a:noFill/>
+          <a:ln/>
+        </p:spPr>
+        <p:txBody>
+          <a:bodyPr wrap="square" lIns="0" tIns="0" rIns="0" bIns="0" rtlCol="0" anchor="ctr"/>
+          <a:lstStyle/>
+          <a:p>
+            <a:pPr algn="ctr" indent="0" marL="0">
+              <a:buNone/>
+            </a:pPr>
+            <a:r>
+              <a:rPr lang="en-US" sz="2400" b="1" dirty="0">
+                <a:solidFill>
+                  <a:srgbClr val="6D3B6E"/>
+                </a:solidFill>
+              </a:rPr>
+              <a:t>✓</a:t>
+            </a:r>
+            <a:endParaRPr lang="en-US" sz="2400" dirty="0"/>
+          </a:p>
+        </p:txBody>
+      </p:sp>
+      <p:sp>
+        <p:nvSpPr>
+          <p:cNvPr id="21" name="Text 18"/>
+          <p:cNvSpPr txBox="1"/>
+          <p:nvPr/>
+        </p:nvSpPr>
+        <p:spPr>
+          <a:xfrm>
+            <a:off x="1463040" y="5775960"/>
+            <a:ext cx="9966960" cy="762000"/>
+          </a:xfrm>
+          <a:prstGeom prst="rect">
+            <a:avLst/>
+          </a:prstGeom>
+          <a:noFill/>
+          <a:ln/>
+        </p:spPr>
+        <p:txBody>
+          <a:bodyPr wrap="square" lIns="0" tIns="0" rIns="0" bIns="0" rtlCol="0" anchor="ctr"/>
+          <a:lstStyle/>
+          <a:p>
+            <a:pPr indent="0" marL="0">
+              <a:buNone/>
+            </a:pPr>
+            <a:r>
+              <a:rPr lang="en-US" sz="1800" b="1" dirty="0">
+                <a:solidFill>
+                  <a:srgbClr val="3B2A2A"/>
+                </a:solidFill>
+              </a:rPr>
+              <a:t>Proteja dados: anonimize e siga a LGPD e a escola</a:t>
+            </a:r>
+            <a:endParaRPr lang="en-US" sz="1800" dirty="0"/>
+          </a:p>
+        </p:txBody>
+      </p:sp>
+      <p:sp>
+        <p:nvSpPr>
+          <p:cNvPr id="22" name="Text 19"/>
+          <p:cNvSpPr txBox="1"/>
+          <p:nvPr/>
+        </p:nvSpPr>
+        <p:spPr>
+          <a:xfrm>
+            <a:off x="548640" y="6446520"/>
+            <a:ext cx="5486400" cy="274320"/>
+          </a:xfrm>
+          <a:prstGeom prst="rect">
+            <a:avLst/>
+          </a:prstGeom>
+          <a:noFill/>
+          <a:ln/>
+        </p:spPr>
+        <p:txBody>
+          <a:bodyPr wrap="square" lIns="0" tIns="0" rIns="0" bIns="0" rtlCol="0" anchor="ctr"/>
+          <a:lstStyle/>
+          <a:p>
+            <a:pPr indent="0" marL="0">
+              <a:buNone/>
+            </a:pPr>
+            <a:r>
+              <a:rPr lang="en-US" sz="1000" dirty="0">
+                <a:solidFill>
+                  <a:srgbClr val="E9D9C8"/>
+                </a:solidFill>
+                <a:latin typeface="Calibri" pitchFamily="34" charset="0"/>
+                <a:ea typeface="Calibri" pitchFamily="34" charset="-122"/>
+                <a:cs typeface="Calibri" pitchFamily="34" charset="-120"/>
+              </a:rPr>
+              <a:t>IA aplicada à Educação · Cap. 22</a:t>
+            </a:r>
+            <a:endParaRPr lang="en-US" sz="1000" dirty="0"/>
+          </a:p>
+        </p:txBody>
+      </p:sp>
+    </p:spTree>
+  </p:cSld>
+  <p:clrMapOvr>
+    <a:masterClrMapping/>
+  </p:clrMapOvr>
+</p:sld>
+</file>
+
+<file path=ppt/slides/slide23.xml><?xml version="1.0" encoding="utf-8"?>
+<p:sld xmlns:a="http://schemas.openxmlformats.org/drawingml/2006/main" xmlns:r="http://schemas.openxmlformats.org/officeDocument/2006/relationships" xmlns:p="http://schemas.openxmlformats.org/presentationml/2006/main">
+  <p:cSld name="Slide 23">
     <p:bg>
       <p:bgPr>
         <a:solidFill>
@@ -10461,46 +11124,74 @@
                 <a:ea typeface="Cambria" pitchFamily="34" charset="-122"/>
                 <a:cs typeface="Cambria" pitchFamily="34" charset="-120"/>
               </a:rPr>
-              <a:t>Síntese: critérios, evidências, feedback e ação</a:t>
+              <a:t>Para pensar na sua prática</a:t>
             </a:r>
             <a:endParaRPr lang="en-US" sz="3400" dirty="0"/>
           </a:p>
         </p:txBody>
       </p:sp>
-      <p:pic>
-        <p:nvPicPr>
-          <p:cNvPr id="4" name="Image 0" descr="Figura 22.3 — Sob responsabilidade do professor, com a IA como rascunho.">    </p:cNvPr>
-          <p:cNvPicPr>
-            <a:picLocks noChangeAspect="1"/>
-          </p:cNvPicPr>
-          <p:nvPr/>
-        </p:nvPicPr>
-        <p:blipFill>
-          <a:blip r:embed="rId1"/>
-          <a:stretch>
-            <a:fillRect/>
-          </a:stretch>
-        </p:blipFill>
-        <p:spPr>
-          <a:xfrm>
-            <a:off x="1668286" y="1325880"/>
-            <a:ext cx="8824948" cy="4434840"/>
-          </a:xfrm>
-          <a:prstGeom prst="rect">
-            <a:avLst/>
-          </a:prstGeom>
-        </p:spPr>
-      </p:pic>
-      <p:sp>
-        <p:nvSpPr>
-          <p:cNvPr id="5" name="Text 1"/>
-          <p:cNvSpPr txBox="1"/>
-          <p:nvPr/>
-        </p:nvSpPr>
-        <p:spPr>
-          <a:xfrm>
-            <a:off x="548640" y="5852160"/>
-            <a:ext cx="11064240" cy="548640"/>
+      <p:sp>
+        <p:nvSpPr>
+          <p:cNvPr id="4" name="Shape 1"/>
+          <p:cNvSpPr/>
+          <p:nvPr/>
+        </p:nvSpPr>
+        <p:spPr>
+          <a:xfrm>
+            <a:off x="548640" y="1463040"/>
+            <a:ext cx="11064240" cy="1097280"/>
+          </a:xfrm>
+          <a:prstGeom prst="roundRect">
+            <a:avLst>
+              <a:gd name="adj" fmla="val 10000"/>
+            </a:avLst>
+          </a:prstGeom>
+          <a:solidFill>
+            <a:srgbClr val="F7EFE6"/>
+          </a:solidFill>
+          <a:ln w="12700">
+            <a:solidFill>
+              <a:srgbClr val="F7EFE6"/>
+            </a:solidFill>
+            <a:prstDash val="solid"/>
+          </a:ln>
+        </p:spPr>
+      </p:sp>
+      <p:sp>
+        <p:nvSpPr>
+          <p:cNvPr id="5" name="Shape 2"/>
+          <p:cNvSpPr/>
+          <p:nvPr/>
+        </p:nvSpPr>
+        <p:spPr>
+          <a:xfrm>
+            <a:off x="777240" y="1737360"/>
+            <a:ext cx="548640" cy="548640"/>
+          </a:xfrm>
+          <a:prstGeom prst="ellipse">
+            <a:avLst/>
+          </a:prstGeom>
+          <a:solidFill>
+            <a:srgbClr val="6D3B6E"/>
+          </a:solidFill>
+          <a:ln w="12700">
+            <a:solidFill>
+              <a:srgbClr val="6D3B6E"/>
+            </a:solidFill>
+            <a:prstDash val="solid"/>
+          </a:ln>
+        </p:spPr>
+      </p:sp>
+      <p:sp>
+        <p:nvSpPr>
+          <p:cNvPr id="6" name="Text 3"/>
+          <p:cNvSpPr txBox="1"/>
+          <p:nvPr/>
+        </p:nvSpPr>
+        <p:spPr>
+          <a:xfrm>
+            <a:off x="777240" y="1737360"/>
+            <a:ext cx="548640" cy="548640"/>
           </a:xfrm>
           <a:prstGeom prst="rect">
             <a:avLst/>
@@ -10516,114 +11207,7 @@
               <a:buNone/>
             </a:pPr>
             <a:r>
-              <a:rPr lang="en-US" sz="1400" i="1" dirty="0">
-                <a:solidFill>
-                  <a:srgbClr val="6B5F59"/>
-                </a:solidFill>
-              </a:rPr>
-              <a:t>Figura 22.3 — Sob responsabilidade do professor, com a IA como rascunho.</a:t>
-            </a:r>
-            <a:endParaRPr lang="en-US" sz="1400" dirty="0"/>
-          </a:p>
-        </p:txBody>
-      </p:sp>
-      <p:sp>
-        <p:nvSpPr>
-          <p:cNvPr id="6" name="Text 2"/>
-          <p:cNvSpPr txBox="1"/>
-          <p:nvPr/>
-        </p:nvSpPr>
-        <p:spPr>
-          <a:xfrm>
-            <a:off x="548640" y="6446520"/>
-            <a:ext cx="5486400" cy="274320"/>
-          </a:xfrm>
-          <a:prstGeom prst="rect">
-            <a:avLst/>
-          </a:prstGeom>
-          <a:noFill/>
-          <a:ln/>
-        </p:spPr>
-        <p:txBody>
-          <a:bodyPr wrap="square" lIns="0" tIns="0" rIns="0" bIns="0" rtlCol="0" anchor="ctr"/>
-          <a:lstStyle/>
-          <a:p>
-            <a:pPr indent="0" marL="0">
-              <a:buNone/>
-            </a:pPr>
-            <a:r>
-              <a:rPr lang="en-US" sz="1000" dirty="0">
-                <a:solidFill>
-                  <a:srgbClr val="6B5F59"/>
-                </a:solidFill>
-                <a:latin typeface="Calibri" pitchFamily="34" charset="0"/>
-                <a:ea typeface="Calibri" pitchFamily="34" charset="-122"/>
-                <a:cs typeface="Calibri" pitchFamily="34" charset="-120"/>
-              </a:rPr>
-              <a:t>IA aplicada à Educação · Cap. 22</a:t>
-            </a:r>
-            <a:endParaRPr lang="en-US" sz="1000" dirty="0"/>
-          </a:p>
-        </p:txBody>
-      </p:sp>
-    </p:spTree>
-  </p:cSld>
-  <p:clrMapOvr>
-    <a:masterClrMapping/>
-  </p:clrMapOvr>
-</p:sld>
-</file>
-
-<file path=ppt/slides/slide23.xml><?xml version="1.0" encoding="utf-8"?>
-<p:sld xmlns:a="http://schemas.openxmlformats.org/drawingml/2006/main" xmlns:r="http://schemas.openxmlformats.org/officeDocument/2006/relationships" xmlns:p="http://schemas.openxmlformats.org/presentationml/2006/main">
-  <p:cSld name="Slide 23">
-    <p:bg>
-      <p:bgPr>
-        <a:solidFill>
-          <a:srgbClr val="6D3B6E"/>
-        </a:solidFill>
-      </p:bgPr>
-    </p:bg>
-    <p:spTree>
-      <p:nvGrpSpPr>
-        <p:cNvPr id="1" name=""/>
-        <p:cNvGrpSpPr/>
-        <p:nvPr/>
-      </p:nvGrpSpPr>
-      <p:grpSpPr>
-        <a:xfrm>
-          <a:off x="0" y="0"/>
-          <a:ext cx="0" cy="0"/>
-          <a:chOff x="0" y="0"/>
-          <a:chExt cx="0" cy="0"/>
-        </a:xfrm>
-      </p:grpSpPr>
-      <p:sp>
-        <p:nvSpPr>
-          <p:cNvPr id="3" name="Text 0"/>
-          <p:cNvSpPr txBox="1"/>
-          <p:nvPr/>
-        </p:nvSpPr>
-        <p:spPr>
-          <a:xfrm>
-            <a:off x="548640" y="365760"/>
-            <a:ext cx="11064240" cy="822960"/>
-          </a:xfrm>
-          <a:prstGeom prst="rect">
-            <a:avLst/>
-          </a:prstGeom>
-          <a:noFill/>
-          <a:ln/>
-        </p:spPr>
-        <p:txBody>
-          <a:bodyPr wrap="square" lIns="0" tIns="0" rIns="0" bIns="0" rtlCol="0" anchor="t"/>
-          <a:lstStyle/>
-          <a:p>
-            <a:pPr indent="0" marL="0">
-              <a:buNone/>
-            </a:pPr>
-            <a:r>
-              <a:rPr lang="en-US" sz="3400" b="1" dirty="0">
+              <a:rPr lang="en-US" sz="1600" b="1" dirty="0">
                 <a:solidFill>
                   <a:srgbClr val="FFFFFF"/>
                 </a:solidFill>
@@ -10631,38 +11215,70 @@
                 <a:ea typeface="Cambria" pitchFamily="34" charset="-122"/>
                 <a:cs typeface="Cambria" pitchFamily="34" charset="-120"/>
               </a:rPr>
-              <a:t>O que vale a pena lembrar</a:t>
-            </a:r>
-            <a:endParaRPr lang="en-US" sz="3400" dirty="0"/>
-          </a:p>
-        </p:txBody>
-      </p:sp>
-      <p:sp>
-        <p:nvSpPr>
-          <p:cNvPr id="4" name="Shape 1"/>
+              <a:t>?</a:t>
+            </a:r>
+            <a:endParaRPr lang="en-US" sz="1600" dirty="0"/>
+          </a:p>
+        </p:txBody>
+      </p:sp>
+      <p:sp>
+        <p:nvSpPr>
+          <p:cNvPr id="7" name="Text 4"/>
+          <p:cNvSpPr txBox="1"/>
+          <p:nvPr/>
+        </p:nvSpPr>
+        <p:spPr>
+          <a:xfrm>
+            <a:off x="1600200" y="1463040"/>
+            <a:ext cx="9784080" cy="1097280"/>
+          </a:xfrm>
+          <a:prstGeom prst="rect">
+            <a:avLst/>
+          </a:prstGeom>
+          <a:noFill/>
+          <a:ln/>
+        </p:spPr>
+        <p:txBody>
+          <a:bodyPr wrap="square" lIns="0" tIns="0" rIns="0" bIns="0" rtlCol="0" anchor="ctr"/>
+          <a:lstStyle/>
+          <a:p>
+            <a:pPr indent="0" marL="0">
+              <a:buNone/>
+            </a:pPr>
+            <a:r>
+              <a:rPr lang="en-US" sz="2000" dirty="0">
+                <a:solidFill>
+                  <a:srgbClr val="3B2A2A"/>
+                </a:solidFill>
+              </a:rPr>
+              <a:t>Que decisão de ensino você já mudou por causa de uma evidência da turma?</a:t>
+            </a:r>
+            <a:endParaRPr lang="en-US" sz="2000" dirty="0"/>
+          </a:p>
+        </p:txBody>
+      </p:sp>
+      <p:sp>
+        <p:nvSpPr>
+          <p:cNvPr id="8" name="Shape 5"/>
           <p:cNvSpPr/>
           <p:nvPr/>
         </p:nvSpPr>
         <p:spPr>
           <a:xfrm>
-            <a:off x="548640" y="1417320"/>
-            <a:ext cx="11064240" cy="762000"/>
+            <a:off x="548640" y="2697480"/>
+            <a:ext cx="11064240" cy="1097280"/>
           </a:xfrm>
           <a:prstGeom prst="roundRect">
             <a:avLst>
-              <a:gd name="adj" fmla="val 14400"/>
+              <a:gd name="adj" fmla="val 10000"/>
             </a:avLst>
           </a:prstGeom>
           <a:solidFill>
-            <a:srgbClr val="FFFFFF">
-              <a:alpha val="88000"/>
-            </a:srgbClr>
+            <a:srgbClr val="F7EFE6"/>
           </a:solidFill>
           <a:ln w="12700">
             <a:solidFill>
-              <a:srgbClr val="FFFFFF">
-                <a:alpha val="88000"/>
-              </a:srgbClr>
+              <a:srgbClr val="F7EFE6"/>
             </a:solidFill>
             <a:prstDash val="solid"/>
           </a:ln>
@@ -10670,102 +11286,24 @@
       </p:sp>
       <p:sp>
         <p:nvSpPr>
-          <p:cNvPr id="5" name="Text 2"/>
-          <p:cNvSpPr txBox="1"/>
-          <p:nvPr/>
-        </p:nvSpPr>
-        <p:spPr>
-          <a:xfrm>
-            <a:off x="731520" y="1417320"/>
-            <a:ext cx="548640" cy="762000"/>
-          </a:xfrm>
-          <a:prstGeom prst="rect">
-            <a:avLst/>
-          </a:prstGeom>
-          <a:noFill/>
-          <a:ln/>
-        </p:spPr>
-        <p:txBody>
-          <a:bodyPr wrap="square" lIns="0" tIns="0" rIns="0" bIns="0" rtlCol="0" anchor="ctr"/>
-          <a:lstStyle/>
-          <a:p>
-            <a:pPr algn="ctr" indent="0" marL="0">
-              <a:buNone/>
-            </a:pPr>
-            <a:r>
-              <a:rPr lang="en-US" sz="2400" b="1" dirty="0">
-                <a:solidFill>
-                  <a:srgbClr val="6D3B6E"/>
-                </a:solidFill>
-              </a:rPr>
-              <a:t>✓</a:t>
-            </a:r>
-            <a:endParaRPr lang="en-US" sz="2400" dirty="0"/>
-          </a:p>
-        </p:txBody>
-      </p:sp>
-      <p:sp>
-        <p:nvSpPr>
-          <p:cNvPr id="6" name="Text 3"/>
-          <p:cNvSpPr txBox="1"/>
-          <p:nvPr/>
-        </p:nvSpPr>
-        <p:spPr>
-          <a:xfrm>
-            <a:off x="1463040" y="1417320"/>
-            <a:ext cx="9966960" cy="762000"/>
-          </a:xfrm>
-          <a:prstGeom prst="rect">
-            <a:avLst/>
-          </a:prstGeom>
-          <a:noFill/>
-          <a:ln/>
-        </p:spPr>
-        <p:txBody>
-          <a:bodyPr wrap="square" lIns="0" tIns="0" rIns="0" bIns="0" rtlCol="0" anchor="ctr"/>
-          <a:lstStyle/>
-          <a:p>
-            <a:pPr indent="0" marL="0">
-              <a:buNone/>
-            </a:pPr>
-            <a:r>
-              <a:rPr lang="en-US" sz="1800" b="1" dirty="0">
-                <a:solidFill>
-                  <a:srgbClr val="3B2A2A"/>
-                </a:solidFill>
-              </a:rPr>
-              <a:t>Diagnóstico orienta, formativa ajusta, somativa certifica</a:t>
-            </a:r>
-            <a:endParaRPr lang="en-US" sz="1800" dirty="0"/>
-          </a:p>
-        </p:txBody>
-      </p:sp>
-      <p:sp>
-        <p:nvSpPr>
-          <p:cNvPr id="7" name="Shape 4"/>
+          <p:cNvPr id="9" name="Shape 6"/>
           <p:cNvSpPr/>
           <p:nvPr/>
         </p:nvSpPr>
         <p:spPr>
           <a:xfrm>
-            <a:off x="548640" y="2289048"/>
-            <a:ext cx="11064240" cy="762000"/>
-          </a:xfrm>
-          <a:prstGeom prst="roundRect">
-            <a:avLst>
-              <a:gd name="adj" fmla="val 14400"/>
-            </a:avLst>
+            <a:off x="777240" y="2971800"/>
+            <a:ext cx="548640" cy="548640"/>
+          </a:xfrm>
+          <a:prstGeom prst="ellipse">
+            <a:avLst/>
           </a:prstGeom>
           <a:solidFill>
-            <a:srgbClr val="FFFFFF">
-              <a:alpha val="88000"/>
-            </a:srgbClr>
+            <a:srgbClr val="6D3B6E"/>
           </a:solidFill>
           <a:ln w="12700">
             <a:solidFill>
-              <a:srgbClr val="FFFFFF">
-                <a:alpha val="88000"/>
-              </a:srgbClr>
+              <a:srgbClr val="6D3B6E"/>
             </a:solidFill>
             <a:prstDash val="solid"/>
           </a:ln>
@@ -10773,14 +11311,14 @@
       </p:sp>
       <p:sp>
         <p:nvSpPr>
-          <p:cNvPr id="8" name="Text 5"/>
-          <p:cNvSpPr txBox="1"/>
-          <p:nvPr/>
-        </p:nvSpPr>
-        <p:spPr>
-          <a:xfrm>
-            <a:off x="731520" y="2289048"/>
-            <a:ext cx="548640" cy="762000"/>
+          <p:cNvPr id="10" name="Text 7"/>
+          <p:cNvSpPr txBox="1"/>
+          <p:nvPr/>
+        </p:nvSpPr>
+        <p:spPr>
+          <a:xfrm>
+            <a:off x="777240" y="2971800"/>
+            <a:ext cx="548640" cy="548640"/>
           </a:xfrm>
           <a:prstGeom prst="rect">
             <a:avLst/>
@@ -10796,27 +11334,30 @@
               <a:buNone/>
             </a:pPr>
             <a:r>
-              <a:rPr lang="en-US" sz="2400" b="1" dirty="0">
-                <a:solidFill>
-                  <a:srgbClr val="6D3B6E"/>
-                </a:solidFill>
-              </a:rPr>
-              <a:t>✓</a:t>
-            </a:r>
-            <a:endParaRPr lang="en-US" sz="2400" dirty="0"/>
-          </a:p>
-        </p:txBody>
-      </p:sp>
-      <p:sp>
-        <p:nvSpPr>
-          <p:cNvPr id="9" name="Text 6"/>
-          <p:cNvSpPr txBox="1"/>
-          <p:nvPr/>
-        </p:nvSpPr>
-        <p:spPr>
-          <a:xfrm>
-            <a:off x="1463040" y="2289048"/>
-            <a:ext cx="9966960" cy="762000"/>
+              <a:rPr lang="en-US" sz="1600" b="1" dirty="0">
+                <a:solidFill>
+                  <a:srgbClr val="FFFFFF"/>
+                </a:solidFill>
+                <a:latin typeface="Cambria" pitchFamily="34" charset="0"/>
+                <a:ea typeface="Cambria" pitchFamily="34" charset="-122"/>
+                <a:cs typeface="Cambria" pitchFamily="34" charset="-120"/>
+              </a:rPr>
+              <a:t>?</a:t>
+            </a:r>
+            <a:endParaRPr lang="en-US" sz="1600" dirty="0"/>
+          </a:p>
+        </p:txBody>
+      </p:sp>
+      <p:sp>
+        <p:nvSpPr>
+          <p:cNvPr id="11" name="Text 8"/>
+          <p:cNvSpPr txBox="1"/>
+          <p:nvPr/>
+        </p:nvSpPr>
+        <p:spPr>
+          <a:xfrm>
+            <a:off x="1600200" y="2697480"/>
+            <a:ext cx="9784080" cy="1097280"/>
           </a:xfrm>
           <a:prstGeom prst="rect">
             <a:avLst/>
@@ -10832,43 +11373,39 @@
               <a:buNone/>
             </a:pPr>
             <a:r>
-              <a:rPr lang="en-US" sz="1800" b="1" dirty="0">
+              <a:rPr lang="en-US" sz="2000" dirty="0">
                 <a:solidFill>
                   <a:srgbClr val="3B2A2A"/>
                 </a:solidFill>
               </a:rPr>
-              <a:t>Diagnóstico bom: curto, específico, leva a uma decisão</a:t>
-            </a:r>
-            <a:endParaRPr lang="en-US" sz="1800" dirty="0"/>
-          </a:p>
-        </p:txBody>
-      </p:sp>
-      <p:sp>
-        <p:nvSpPr>
-          <p:cNvPr id="10" name="Shape 7"/>
+              <a:t>Que critérios das suas avaliações os estudantes explicam com suas palavras?</a:t>
+            </a:r>
+            <a:endParaRPr lang="en-US" sz="2000" dirty="0"/>
+          </a:p>
+        </p:txBody>
+      </p:sp>
+      <p:sp>
+        <p:nvSpPr>
+          <p:cNvPr id="12" name="Shape 9"/>
           <p:cNvSpPr/>
           <p:nvPr/>
         </p:nvSpPr>
         <p:spPr>
           <a:xfrm>
-            <a:off x="548640" y="3160776"/>
-            <a:ext cx="11064240" cy="762000"/>
+            <a:off x="548640" y="3931920"/>
+            <a:ext cx="11064240" cy="1097280"/>
           </a:xfrm>
           <a:prstGeom prst="roundRect">
             <a:avLst>
-              <a:gd name="adj" fmla="val 14400"/>
+              <a:gd name="adj" fmla="val 10000"/>
             </a:avLst>
           </a:prstGeom>
           <a:solidFill>
-            <a:srgbClr val="FFFFFF">
-              <a:alpha val="88000"/>
-            </a:srgbClr>
+            <a:srgbClr val="F7EFE6"/>
           </a:solidFill>
           <a:ln w="12700">
             <a:solidFill>
-              <a:srgbClr val="FFFFFF">
-                <a:alpha val="88000"/>
-              </a:srgbClr>
+              <a:srgbClr val="F7EFE6"/>
             </a:solidFill>
             <a:prstDash val="solid"/>
           </a:ln>
@@ -10876,102 +11413,24 @@
       </p:sp>
       <p:sp>
         <p:nvSpPr>
-          <p:cNvPr id="11" name="Text 8"/>
-          <p:cNvSpPr txBox="1"/>
-          <p:nvPr/>
-        </p:nvSpPr>
-        <p:spPr>
-          <a:xfrm>
-            <a:off x="731520" y="3160776"/>
-            <a:ext cx="548640" cy="762000"/>
-          </a:xfrm>
-          <a:prstGeom prst="rect">
-            <a:avLst/>
-          </a:prstGeom>
-          <a:noFill/>
-          <a:ln/>
-        </p:spPr>
-        <p:txBody>
-          <a:bodyPr wrap="square" lIns="0" tIns="0" rIns="0" bIns="0" rtlCol="0" anchor="ctr"/>
-          <a:lstStyle/>
-          <a:p>
-            <a:pPr algn="ctr" indent="0" marL="0">
-              <a:buNone/>
-            </a:pPr>
-            <a:r>
-              <a:rPr lang="en-US" sz="2400" b="1" dirty="0">
-                <a:solidFill>
-                  <a:srgbClr val="6D3B6E"/>
-                </a:solidFill>
-              </a:rPr>
-              <a:t>✓</a:t>
-            </a:r>
-            <a:endParaRPr lang="en-US" sz="2400" dirty="0"/>
-          </a:p>
-        </p:txBody>
-      </p:sp>
-      <p:sp>
-        <p:nvSpPr>
-          <p:cNvPr id="12" name="Text 9"/>
-          <p:cNvSpPr txBox="1"/>
-          <p:nvPr/>
-        </p:nvSpPr>
-        <p:spPr>
-          <a:xfrm>
-            <a:off x="1463040" y="3160776"/>
-            <a:ext cx="9966960" cy="762000"/>
-          </a:xfrm>
-          <a:prstGeom prst="rect">
-            <a:avLst/>
-          </a:prstGeom>
-          <a:noFill/>
-          <a:ln/>
-        </p:spPr>
-        <p:txBody>
-          <a:bodyPr wrap="square" lIns="0" tIns="0" rIns="0" bIns="0" rtlCol="0" anchor="ctr"/>
-          <a:lstStyle/>
-          <a:p>
-            <a:pPr indent="0" marL="0">
-              <a:buNone/>
-            </a:pPr>
-            <a:r>
-              <a:rPr lang="en-US" sz="1800" b="1" dirty="0">
-                <a:solidFill>
-                  <a:srgbClr val="3B2A2A"/>
-                </a:solidFill>
-              </a:rPr>
-              <a:t>Rubricas valem antes e durante a tarefa, com critérios observáveis</a:t>
-            </a:r>
-            <a:endParaRPr lang="en-US" sz="1800" dirty="0"/>
-          </a:p>
-        </p:txBody>
-      </p:sp>
-      <p:sp>
-        <p:nvSpPr>
           <p:cNvPr id="13" name="Shape 10"/>
           <p:cNvSpPr/>
           <p:nvPr/>
         </p:nvSpPr>
         <p:spPr>
           <a:xfrm>
-            <a:off x="548640" y="4032504"/>
-            <a:ext cx="11064240" cy="762000"/>
-          </a:xfrm>
-          <a:prstGeom prst="roundRect">
-            <a:avLst>
-              <a:gd name="adj" fmla="val 14400"/>
-            </a:avLst>
+            <a:off x="777240" y="4206240"/>
+            <a:ext cx="548640" cy="548640"/>
+          </a:xfrm>
+          <a:prstGeom prst="ellipse">
+            <a:avLst/>
           </a:prstGeom>
           <a:solidFill>
-            <a:srgbClr val="FFFFFF">
-              <a:alpha val="88000"/>
-            </a:srgbClr>
+            <a:srgbClr val="6D3B6E"/>
           </a:solidFill>
           <a:ln w="12700">
             <a:solidFill>
-              <a:srgbClr val="FFFFFF">
-                <a:alpha val="88000"/>
-              </a:srgbClr>
+              <a:srgbClr val="6D3B6E"/>
             </a:solidFill>
             <a:prstDash val="solid"/>
           </a:ln>
@@ -10985,8 +11444,8 @@
         </p:nvSpPr>
         <p:spPr>
           <a:xfrm>
-            <a:off x="731520" y="4032504"/>
-            <a:ext cx="548640" cy="762000"/>
+            <a:off x="777240" y="4206240"/>
+            <a:ext cx="548640" cy="548640"/>
           </a:xfrm>
           <a:prstGeom prst="rect">
             <a:avLst/>
@@ -11002,14 +11461,17 @@
               <a:buNone/>
             </a:pPr>
             <a:r>
-              <a:rPr lang="en-US" sz="2400" b="1" dirty="0">
-                <a:solidFill>
-                  <a:srgbClr val="6D3B6E"/>
-                </a:solidFill>
-              </a:rPr>
-              <a:t>✓</a:t>
-            </a:r>
-            <a:endParaRPr lang="en-US" sz="2400" dirty="0"/>
+              <a:rPr lang="en-US" sz="1600" b="1" dirty="0">
+                <a:solidFill>
+                  <a:srgbClr val="FFFFFF"/>
+                </a:solidFill>
+                <a:latin typeface="Cambria" pitchFamily="34" charset="0"/>
+                <a:ea typeface="Cambria" pitchFamily="34" charset="-122"/>
+                <a:cs typeface="Cambria" pitchFamily="34" charset="-120"/>
+              </a:rPr>
+              <a:t>?</a:t>
+            </a:r>
+            <a:endParaRPr lang="en-US" sz="1600" dirty="0"/>
           </a:p>
         </p:txBody>
       </p:sp>
@@ -11021,8 +11483,8 @@
         </p:nvSpPr>
         <p:spPr>
           <a:xfrm>
-            <a:off x="1463040" y="4032504"/>
-            <a:ext cx="9966960" cy="762000"/>
+            <a:off x="1600200" y="3931920"/>
+            <a:ext cx="9784080" cy="1097280"/>
           </a:xfrm>
           <a:prstGeom prst="rect">
             <a:avLst/>
@@ -11038,14 +11500,14 @@
               <a:buNone/>
             </a:pPr>
             <a:r>
-              <a:rPr lang="en-US" sz="1800" b="1" dirty="0">
+              <a:rPr lang="en-US" sz="2000" dirty="0">
                 <a:solidFill>
                   <a:srgbClr val="3B2A2A"/>
                 </a:solidFill>
               </a:rPr>
-              <a:t>Feedback indica o próximo passo; a IA rascunha, você assina</a:t>
-            </a:r>
-            <a:endParaRPr lang="en-US" sz="1800" dirty="0"/>
+              <a:t>Que parte do seu feedback poderia ser rascunhada com segurança?</a:t>
+            </a:r>
+            <a:endParaRPr lang="en-US" sz="2000" dirty="0"/>
           </a:p>
         </p:txBody>
       </p:sp>
@@ -11057,24 +11519,20 @@
         </p:nvSpPr>
         <p:spPr>
           <a:xfrm>
-            <a:off x="548640" y="4904232"/>
-            <a:ext cx="11064240" cy="762000"/>
+            <a:off x="548640" y="5166360"/>
+            <a:ext cx="11064240" cy="1097280"/>
           </a:xfrm>
           <a:prstGeom prst="roundRect">
             <a:avLst>
-              <a:gd name="adj" fmla="val 14400"/>
+              <a:gd name="adj" fmla="val 10000"/>
             </a:avLst>
           </a:prstGeom>
           <a:solidFill>
-            <a:srgbClr val="FFFFFF">
-              <a:alpha val="88000"/>
-            </a:srgbClr>
+            <a:srgbClr val="F7EFE6"/>
           </a:solidFill>
           <a:ln w="12700">
             <a:solidFill>
-              <a:srgbClr val="FFFFFF">
-                <a:alpha val="88000"/>
-              </a:srgbClr>
+              <a:srgbClr val="F7EFE6"/>
             </a:solidFill>
             <a:prstDash val="solid"/>
           </a:ln>
@@ -11082,102 +11540,24 @@
       </p:sp>
       <p:sp>
         <p:nvSpPr>
-          <p:cNvPr id="17" name="Text 14"/>
-          <p:cNvSpPr txBox="1"/>
-          <p:nvPr/>
-        </p:nvSpPr>
-        <p:spPr>
-          <a:xfrm>
-            <a:off x="731520" y="4904232"/>
-            <a:ext cx="548640" cy="762000"/>
-          </a:xfrm>
-          <a:prstGeom prst="rect">
-            <a:avLst/>
-          </a:prstGeom>
-          <a:noFill/>
-          <a:ln/>
-        </p:spPr>
-        <p:txBody>
-          <a:bodyPr wrap="square" lIns="0" tIns="0" rIns="0" bIns="0" rtlCol="0" anchor="ctr"/>
-          <a:lstStyle/>
-          <a:p>
-            <a:pPr algn="ctr" indent="0" marL="0">
-              <a:buNone/>
-            </a:pPr>
-            <a:r>
-              <a:rPr lang="en-US" sz="2400" b="1" dirty="0">
-                <a:solidFill>
-                  <a:srgbClr val="6D3B6E"/>
-                </a:solidFill>
-              </a:rPr>
-              <a:t>✓</a:t>
-            </a:r>
-            <a:endParaRPr lang="en-US" sz="2400" dirty="0"/>
-          </a:p>
-        </p:txBody>
-      </p:sp>
-      <p:sp>
-        <p:nvSpPr>
-          <p:cNvPr id="18" name="Text 15"/>
-          <p:cNvSpPr txBox="1"/>
-          <p:nvPr/>
-        </p:nvSpPr>
-        <p:spPr>
-          <a:xfrm>
-            <a:off x="1463040" y="4904232"/>
-            <a:ext cx="9966960" cy="762000"/>
-          </a:xfrm>
-          <a:prstGeom prst="rect">
-            <a:avLst/>
-          </a:prstGeom>
-          <a:noFill/>
-          <a:ln/>
-        </p:spPr>
-        <p:txBody>
-          <a:bodyPr wrap="square" lIns="0" tIns="0" rIns="0" bIns="0" rtlCol="0" anchor="ctr"/>
-          <a:lstStyle/>
-          <a:p>
-            <a:pPr indent="0" marL="0">
-              <a:buNone/>
-            </a:pPr>
-            <a:r>
-              <a:rPr lang="en-US" sz="1800" b="1" dirty="0">
-                <a:solidFill>
-                  <a:srgbClr val="3B2A2A"/>
-                </a:solidFill>
-              </a:rPr>
-              <a:t>Não delegue notas; detectores não são prova isolada</a:t>
-            </a:r>
-            <a:endParaRPr lang="en-US" sz="1800" dirty="0"/>
-          </a:p>
-        </p:txBody>
-      </p:sp>
-      <p:sp>
-        <p:nvSpPr>
-          <p:cNvPr id="19" name="Shape 16"/>
+          <p:cNvPr id="17" name="Shape 14"/>
           <p:cNvSpPr/>
           <p:nvPr/>
         </p:nvSpPr>
         <p:spPr>
           <a:xfrm>
-            <a:off x="548640" y="5775960"/>
-            <a:ext cx="11064240" cy="762000"/>
-          </a:xfrm>
-          <a:prstGeom prst="roundRect">
-            <a:avLst>
-              <a:gd name="adj" fmla="val 14400"/>
-            </a:avLst>
+            <a:off x="777240" y="5440680"/>
+            <a:ext cx="548640" cy="548640"/>
+          </a:xfrm>
+          <a:prstGeom prst="ellipse">
+            <a:avLst/>
           </a:prstGeom>
           <a:solidFill>
-            <a:srgbClr val="FFFFFF">
-              <a:alpha val="88000"/>
-            </a:srgbClr>
+            <a:srgbClr val="6D3B6E"/>
           </a:solidFill>
           <a:ln w="12700">
             <a:solidFill>
-              <a:srgbClr val="FFFFFF">
-                <a:alpha val="88000"/>
-              </a:srgbClr>
+              <a:srgbClr val="6D3B6E"/>
             </a:solidFill>
             <a:prstDash val="solid"/>
           </a:ln>
@@ -11185,79 +11565,82 @@
       </p:sp>
       <p:sp>
         <p:nvSpPr>
+          <p:cNvPr id="18" name="Text 15"/>
+          <p:cNvSpPr txBox="1"/>
+          <p:nvPr/>
+        </p:nvSpPr>
+        <p:spPr>
+          <a:xfrm>
+            <a:off x="777240" y="5440680"/>
+            <a:ext cx="548640" cy="548640"/>
+          </a:xfrm>
+          <a:prstGeom prst="rect">
+            <a:avLst/>
+          </a:prstGeom>
+          <a:noFill/>
+          <a:ln/>
+        </p:spPr>
+        <p:txBody>
+          <a:bodyPr wrap="square" lIns="0" tIns="0" rIns="0" bIns="0" rtlCol="0" anchor="ctr"/>
+          <a:lstStyle/>
+          <a:p>
+            <a:pPr algn="ctr" indent="0" marL="0">
+              <a:buNone/>
+            </a:pPr>
+            <a:r>
+              <a:rPr lang="en-US" sz="1600" b="1" dirty="0">
+                <a:solidFill>
+                  <a:srgbClr val="FFFFFF"/>
+                </a:solidFill>
+                <a:latin typeface="Cambria" pitchFamily="34" charset="0"/>
+                <a:ea typeface="Cambria" pitchFamily="34" charset="-122"/>
+                <a:cs typeface="Cambria" pitchFamily="34" charset="-120"/>
+              </a:rPr>
+              <a:t>?</a:t>
+            </a:r>
+            <a:endParaRPr lang="en-US" sz="1600" dirty="0"/>
+          </a:p>
+        </p:txBody>
+      </p:sp>
+      <p:sp>
+        <p:nvSpPr>
+          <p:cNvPr id="19" name="Text 16"/>
+          <p:cNvSpPr txBox="1"/>
+          <p:nvPr/>
+        </p:nvSpPr>
+        <p:spPr>
+          <a:xfrm>
+            <a:off x="1600200" y="5166360"/>
+            <a:ext cx="9784080" cy="1097280"/>
+          </a:xfrm>
+          <a:prstGeom prst="rect">
+            <a:avLst/>
+          </a:prstGeom>
+          <a:noFill/>
+          <a:ln/>
+        </p:spPr>
+        <p:txBody>
+          <a:bodyPr wrap="square" lIns="0" tIns="0" rIns="0" bIns="0" rtlCol="0" anchor="ctr"/>
+          <a:lstStyle/>
+          <a:p>
+            <a:pPr indent="0" marL="0">
+              <a:buNone/>
+            </a:pPr>
+            <a:r>
+              <a:rPr lang="en-US" sz="2000" dirty="0">
+                <a:solidFill>
+                  <a:srgbClr val="3B2A2A"/>
+                </a:solidFill>
+              </a:rPr>
+              <a:t>Que regras sobre IA nas avaliações você combinaria com a turma?</a:t>
+            </a:r>
+            <a:endParaRPr lang="en-US" sz="2000" dirty="0"/>
+          </a:p>
+        </p:txBody>
+      </p:sp>
+      <p:sp>
+        <p:nvSpPr>
           <p:cNvPr id="20" name="Text 17"/>
-          <p:cNvSpPr txBox="1"/>
-          <p:nvPr/>
-        </p:nvSpPr>
-        <p:spPr>
-          <a:xfrm>
-            <a:off x="731520" y="5775960"/>
-            <a:ext cx="548640" cy="762000"/>
-          </a:xfrm>
-          <a:prstGeom prst="rect">
-            <a:avLst/>
-          </a:prstGeom>
-          <a:noFill/>
-          <a:ln/>
-        </p:spPr>
-        <p:txBody>
-          <a:bodyPr wrap="square" lIns="0" tIns="0" rIns="0" bIns="0" rtlCol="0" anchor="ctr"/>
-          <a:lstStyle/>
-          <a:p>
-            <a:pPr algn="ctr" indent="0" marL="0">
-              <a:buNone/>
-            </a:pPr>
-            <a:r>
-              <a:rPr lang="en-US" sz="2400" b="1" dirty="0">
-                <a:solidFill>
-                  <a:srgbClr val="6D3B6E"/>
-                </a:solidFill>
-              </a:rPr>
-              <a:t>✓</a:t>
-            </a:r>
-            <a:endParaRPr lang="en-US" sz="2400" dirty="0"/>
-          </a:p>
-        </p:txBody>
-      </p:sp>
-      <p:sp>
-        <p:nvSpPr>
-          <p:cNvPr id="21" name="Text 18"/>
-          <p:cNvSpPr txBox="1"/>
-          <p:nvPr/>
-        </p:nvSpPr>
-        <p:spPr>
-          <a:xfrm>
-            <a:off x="1463040" y="5775960"/>
-            <a:ext cx="9966960" cy="762000"/>
-          </a:xfrm>
-          <a:prstGeom prst="rect">
-            <a:avLst/>
-          </a:prstGeom>
-          <a:noFill/>
-          <a:ln/>
-        </p:spPr>
-        <p:txBody>
-          <a:bodyPr wrap="square" lIns="0" tIns="0" rIns="0" bIns="0" rtlCol="0" anchor="ctr"/>
-          <a:lstStyle/>
-          <a:p>
-            <a:pPr indent="0" marL="0">
-              <a:buNone/>
-            </a:pPr>
-            <a:r>
-              <a:rPr lang="en-US" sz="1800" b="1" dirty="0">
-                <a:solidFill>
-                  <a:srgbClr val="3B2A2A"/>
-                </a:solidFill>
-              </a:rPr>
-              <a:t>Proteja dados: anonimize e siga a LGPD e a escola</a:t>
-            </a:r>
-            <a:endParaRPr lang="en-US" sz="1800" dirty="0"/>
-          </a:p>
-        </p:txBody>
-      </p:sp>
-      <p:sp>
-        <p:nvSpPr>
-          <p:cNvPr id="22" name="Text 19"/>
           <p:cNvSpPr txBox="1"/>
           <p:nvPr/>
         </p:nvSpPr>
@@ -11282,7 +11665,7 @@
             <a:r>
               <a:rPr lang="en-US" sz="1000" dirty="0">
                 <a:solidFill>
-                  <a:srgbClr val="E9D9C8"/>
+                  <a:srgbClr val="6B5F59"/>
                 </a:solidFill>
                 <a:latin typeface="Calibri" pitchFamily="34" charset="0"/>
                 <a:ea typeface="Calibri" pitchFamily="34" charset="-122"/>
@@ -11305,624 +11688,6 @@
 <file path=ppt/slides/slide24.xml><?xml version="1.0" encoding="utf-8"?>
 <p:sld xmlns:a="http://schemas.openxmlformats.org/drawingml/2006/main" xmlns:r="http://schemas.openxmlformats.org/officeDocument/2006/relationships" xmlns:p="http://schemas.openxmlformats.org/presentationml/2006/main">
   <p:cSld name="Slide 24">
-    <p:bg>
-      <p:bgPr>
-        <a:solidFill>
-          <a:srgbClr val="FFFFFF"/>
-        </a:solidFill>
-      </p:bgPr>
-    </p:bg>
-    <p:spTree>
-      <p:nvGrpSpPr>
-        <p:cNvPr id="1" name=""/>
-        <p:cNvGrpSpPr/>
-        <p:nvPr/>
-      </p:nvGrpSpPr>
-      <p:grpSpPr>
-        <a:xfrm>
-          <a:off x="0" y="0"/>
-          <a:ext cx="0" cy="0"/>
-          <a:chOff x="0" y="0"/>
-          <a:chExt cx="0" cy="0"/>
-        </a:xfrm>
-      </p:grpSpPr>
-      <p:sp>
-        <p:nvSpPr>
-          <p:cNvPr id="3" name="Text 0"/>
-          <p:cNvSpPr txBox="1"/>
-          <p:nvPr/>
-        </p:nvSpPr>
-        <p:spPr>
-          <a:xfrm>
-            <a:off x="548640" y="365760"/>
-            <a:ext cx="11064240" cy="822960"/>
-          </a:xfrm>
-          <a:prstGeom prst="rect">
-            <a:avLst/>
-          </a:prstGeom>
-          <a:noFill/>
-          <a:ln/>
-        </p:spPr>
-        <p:txBody>
-          <a:bodyPr wrap="square" lIns="0" tIns="0" rIns="0" bIns="0" rtlCol="0" anchor="t"/>
-          <a:lstStyle/>
-          <a:p>
-            <a:pPr indent="0" marL="0">
-              <a:buNone/>
-            </a:pPr>
-            <a:r>
-              <a:rPr lang="en-US" sz="3400" b="1" dirty="0">
-                <a:solidFill>
-                  <a:srgbClr val="5A2E2A"/>
-                </a:solidFill>
-                <a:latin typeface="Cambria" pitchFamily="34" charset="0"/>
-                <a:ea typeface="Cambria" pitchFamily="34" charset="-122"/>
-                <a:cs typeface="Cambria" pitchFamily="34" charset="-120"/>
-              </a:rPr>
-              <a:t>Para pensar na sua prática</a:t>
-            </a:r>
-            <a:endParaRPr lang="en-US" sz="3400" dirty="0"/>
-          </a:p>
-        </p:txBody>
-      </p:sp>
-      <p:sp>
-        <p:nvSpPr>
-          <p:cNvPr id="4" name="Shape 1"/>
-          <p:cNvSpPr/>
-          <p:nvPr/>
-        </p:nvSpPr>
-        <p:spPr>
-          <a:xfrm>
-            <a:off x="548640" y="1463040"/>
-            <a:ext cx="11064240" cy="1097280"/>
-          </a:xfrm>
-          <a:prstGeom prst="roundRect">
-            <a:avLst>
-              <a:gd name="adj" fmla="val 10000"/>
-            </a:avLst>
-          </a:prstGeom>
-          <a:solidFill>
-            <a:srgbClr val="F7EFE6"/>
-          </a:solidFill>
-          <a:ln w="12700">
-            <a:solidFill>
-              <a:srgbClr val="F7EFE6"/>
-            </a:solidFill>
-            <a:prstDash val="solid"/>
-          </a:ln>
-        </p:spPr>
-      </p:sp>
-      <p:sp>
-        <p:nvSpPr>
-          <p:cNvPr id="5" name="Shape 2"/>
-          <p:cNvSpPr/>
-          <p:nvPr/>
-        </p:nvSpPr>
-        <p:spPr>
-          <a:xfrm>
-            <a:off x="777240" y="1737360"/>
-            <a:ext cx="548640" cy="548640"/>
-          </a:xfrm>
-          <a:prstGeom prst="ellipse">
-            <a:avLst/>
-          </a:prstGeom>
-          <a:solidFill>
-            <a:srgbClr val="6D3B6E"/>
-          </a:solidFill>
-          <a:ln w="12700">
-            <a:solidFill>
-              <a:srgbClr val="6D3B6E"/>
-            </a:solidFill>
-            <a:prstDash val="solid"/>
-          </a:ln>
-        </p:spPr>
-      </p:sp>
-      <p:sp>
-        <p:nvSpPr>
-          <p:cNvPr id="6" name="Text 3"/>
-          <p:cNvSpPr txBox="1"/>
-          <p:nvPr/>
-        </p:nvSpPr>
-        <p:spPr>
-          <a:xfrm>
-            <a:off x="777240" y="1737360"/>
-            <a:ext cx="548640" cy="548640"/>
-          </a:xfrm>
-          <a:prstGeom prst="rect">
-            <a:avLst/>
-          </a:prstGeom>
-          <a:noFill/>
-          <a:ln/>
-        </p:spPr>
-        <p:txBody>
-          <a:bodyPr wrap="square" lIns="0" tIns="0" rIns="0" bIns="0" rtlCol="0" anchor="ctr"/>
-          <a:lstStyle/>
-          <a:p>
-            <a:pPr algn="ctr" indent="0" marL="0">
-              <a:buNone/>
-            </a:pPr>
-            <a:r>
-              <a:rPr lang="en-US" sz="1600" b="1" dirty="0">
-                <a:solidFill>
-                  <a:srgbClr val="FFFFFF"/>
-                </a:solidFill>
-                <a:latin typeface="Cambria" pitchFamily="34" charset="0"/>
-                <a:ea typeface="Cambria" pitchFamily="34" charset="-122"/>
-                <a:cs typeface="Cambria" pitchFamily="34" charset="-120"/>
-              </a:rPr>
-              <a:t>?</a:t>
-            </a:r>
-            <a:endParaRPr lang="en-US" sz="1600" dirty="0"/>
-          </a:p>
-        </p:txBody>
-      </p:sp>
-      <p:sp>
-        <p:nvSpPr>
-          <p:cNvPr id="7" name="Text 4"/>
-          <p:cNvSpPr txBox="1"/>
-          <p:nvPr/>
-        </p:nvSpPr>
-        <p:spPr>
-          <a:xfrm>
-            <a:off x="1600200" y="1463040"/>
-            <a:ext cx="9784080" cy="1097280"/>
-          </a:xfrm>
-          <a:prstGeom prst="rect">
-            <a:avLst/>
-          </a:prstGeom>
-          <a:noFill/>
-          <a:ln/>
-        </p:spPr>
-        <p:txBody>
-          <a:bodyPr wrap="square" lIns="0" tIns="0" rIns="0" bIns="0" rtlCol="0" anchor="ctr"/>
-          <a:lstStyle/>
-          <a:p>
-            <a:pPr indent="0" marL="0">
-              <a:buNone/>
-            </a:pPr>
-            <a:r>
-              <a:rPr lang="en-US" sz="2000" dirty="0">
-                <a:solidFill>
-                  <a:srgbClr val="3B2A2A"/>
-                </a:solidFill>
-              </a:rPr>
-              <a:t>Que decisão de ensino você já mudou por causa de uma evidência da turma?</a:t>
-            </a:r>
-            <a:endParaRPr lang="en-US" sz="2000" dirty="0"/>
-          </a:p>
-        </p:txBody>
-      </p:sp>
-      <p:sp>
-        <p:nvSpPr>
-          <p:cNvPr id="8" name="Shape 5"/>
-          <p:cNvSpPr/>
-          <p:nvPr/>
-        </p:nvSpPr>
-        <p:spPr>
-          <a:xfrm>
-            <a:off x="548640" y="2697480"/>
-            <a:ext cx="11064240" cy="1097280"/>
-          </a:xfrm>
-          <a:prstGeom prst="roundRect">
-            <a:avLst>
-              <a:gd name="adj" fmla="val 10000"/>
-            </a:avLst>
-          </a:prstGeom>
-          <a:solidFill>
-            <a:srgbClr val="F7EFE6"/>
-          </a:solidFill>
-          <a:ln w="12700">
-            <a:solidFill>
-              <a:srgbClr val="F7EFE6"/>
-            </a:solidFill>
-            <a:prstDash val="solid"/>
-          </a:ln>
-        </p:spPr>
-      </p:sp>
-      <p:sp>
-        <p:nvSpPr>
-          <p:cNvPr id="9" name="Shape 6"/>
-          <p:cNvSpPr/>
-          <p:nvPr/>
-        </p:nvSpPr>
-        <p:spPr>
-          <a:xfrm>
-            <a:off x="777240" y="2971800"/>
-            <a:ext cx="548640" cy="548640"/>
-          </a:xfrm>
-          <a:prstGeom prst="ellipse">
-            <a:avLst/>
-          </a:prstGeom>
-          <a:solidFill>
-            <a:srgbClr val="6D3B6E"/>
-          </a:solidFill>
-          <a:ln w="12700">
-            <a:solidFill>
-              <a:srgbClr val="6D3B6E"/>
-            </a:solidFill>
-            <a:prstDash val="solid"/>
-          </a:ln>
-        </p:spPr>
-      </p:sp>
-      <p:sp>
-        <p:nvSpPr>
-          <p:cNvPr id="10" name="Text 7"/>
-          <p:cNvSpPr txBox="1"/>
-          <p:nvPr/>
-        </p:nvSpPr>
-        <p:spPr>
-          <a:xfrm>
-            <a:off x="777240" y="2971800"/>
-            <a:ext cx="548640" cy="548640"/>
-          </a:xfrm>
-          <a:prstGeom prst="rect">
-            <a:avLst/>
-          </a:prstGeom>
-          <a:noFill/>
-          <a:ln/>
-        </p:spPr>
-        <p:txBody>
-          <a:bodyPr wrap="square" lIns="0" tIns="0" rIns="0" bIns="0" rtlCol="0" anchor="ctr"/>
-          <a:lstStyle/>
-          <a:p>
-            <a:pPr algn="ctr" indent="0" marL="0">
-              <a:buNone/>
-            </a:pPr>
-            <a:r>
-              <a:rPr lang="en-US" sz="1600" b="1" dirty="0">
-                <a:solidFill>
-                  <a:srgbClr val="FFFFFF"/>
-                </a:solidFill>
-                <a:latin typeface="Cambria" pitchFamily="34" charset="0"/>
-                <a:ea typeface="Cambria" pitchFamily="34" charset="-122"/>
-                <a:cs typeface="Cambria" pitchFamily="34" charset="-120"/>
-              </a:rPr>
-              <a:t>?</a:t>
-            </a:r>
-            <a:endParaRPr lang="en-US" sz="1600" dirty="0"/>
-          </a:p>
-        </p:txBody>
-      </p:sp>
-      <p:sp>
-        <p:nvSpPr>
-          <p:cNvPr id="11" name="Text 8"/>
-          <p:cNvSpPr txBox="1"/>
-          <p:nvPr/>
-        </p:nvSpPr>
-        <p:spPr>
-          <a:xfrm>
-            <a:off x="1600200" y="2697480"/>
-            <a:ext cx="9784080" cy="1097280"/>
-          </a:xfrm>
-          <a:prstGeom prst="rect">
-            <a:avLst/>
-          </a:prstGeom>
-          <a:noFill/>
-          <a:ln/>
-        </p:spPr>
-        <p:txBody>
-          <a:bodyPr wrap="square" lIns="0" tIns="0" rIns="0" bIns="0" rtlCol="0" anchor="ctr"/>
-          <a:lstStyle/>
-          <a:p>
-            <a:pPr indent="0" marL="0">
-              <a:buNone/>
-            </a:pPr>
-            <a:r>
-              <a:rPr lang="en-US" sz="2000" dirty="0">
-                <a:solidFill>
-                  <a:srgbClr val="3B2A2A"/>
-                </a:solidFill>
-              </a:rPr>
-              <a:t>Que critérios das suas avaliações os estudantes explicam com suas palavras?</a:t>
-            </a:r>
-            <a:endParaRPr lang="en-US" sz="2000" dirty="0"/>
-          </a:p>
-        </p:txBody>
-      </p:sp>
-      <p:sp>
-        <p:nvSpPr>
-          <p:cNvPr id="12" name="Shape 9"/>
-          <p:cNvSpPr/>
-          <p:nvPr/>
-        </p:nvSpPr>
-        <p:spPr>
-          <a:xfrm>
-            <a:off x="548640" y="3931920"/>
-            <a:ext cx="11064240" cy="1097280"/>
-          </a:xfrm>
-          <a:prstGeom prst="roundRect">
-            <a:avLst>
-              <a:gd name="adj" fmla="val 10000"/>
-            </a:avLst>
-          </a:prstGeom>
-          <a:solidFill>
-            <a:srgbClr val="F7EFE6"/>
-          </a:solidFill>
-          <a:ln w="12700">
-            <a:solidFill>
-              <a:srgbClr val="F7EFE6"/>
-            </a:solidFill>
-            <a:prstDash val="solid"/>
-          </a:ln>
-        </p:spPr>
-      </p:sp>
-      <p:sp>
-        <p:nvSpPr>
-          <p:cNvPr id="13" name="Shape 10"/>
-          <p:cNvSpPr/>
-          <p:nvPr/>
-        </p:nvSpPr>
-        <p:spPr>
-          <a:xfrm>
-            <a:off x="777240" y="4206240"/>
-            <a:ext cx="548640" cy="548640"/>
-          </a:xfrm>
-          <a:prstGeom prst="ellipse">
-            <a:avLst/>
-          </a:prstGeom>
-          <a:solidFill>
-            <a:srgbClr val="6D3B6E"/>
-          </a:solidFill>
-          <a:ln w="12700">
-            <a:solidFill>
-              <a:srgbClr val="6D3B6E"/>
-            </a:solidFill>
-            <a:prstDash val="solid"/>
-          </a:ln>
-        </p:spPr>
-      </p:sp>
-      <p:sp>
-        <p:nvSpPr>
-          <p:cNvPr id="14" name="Text 11"/>
-          <p:cNvSpPr txBox="1"/>
-          <p:nvPr/>
-        </p:nvSpPr>
-        <p:spPr>
-          <a:xfrm>
-            <a:off x="777240" y="4206240"/>
-            <a:ext cx="548640" cy="548640"/>
-          </a:xfrm>
-          <a:prstGeom prst="rect">
-            <a:avLst/>
-          </a:prstGeom>
-          <a:noFill/>
-          <a:ln/>
-        </p:spPr>
-        <p:txBody>
-          <a:bodyPr wrap="square" lIns="0" tIns="0" rIns="0" bIns="0" rtlCol="0" anchor="ctr"/>
-          <a:lstStyle/>
-          <a:p>
-            <a:pPr algn="ctr" indent="0" marL="0">
-              <a:buNone/>
-            </a:pPr>
-            <a:r>
-              <a:rPr lang="en-US" sz="1600" b="1" dirty="0">
-                <a:solidFill>
-                  <a:srgbClr val="FFFFFF"/>
-                </a:solidFill>
-                <a:latin typeface="Cambria" pitchFamily="34" charset="0"/>
-                <a:ea typeface="Cambria" pitchFamily="34" charset="-122"/>
-                <a:cs typeface="Cambria" pitchFamily="34" charset="-120"/>
-              </a:rPr>
-              <a:t>?</a:t>
-            </a:r>
-            <a:endParaRPr lang="en-US" sz="1600" dirty="0"/>
-          </a:p>
-        </p:txBody>
-      </p:sp>
-      <p:sp>
-        <p:nvSpPr>
-          <p:cNvPr id="15" name="Text 12"/>
-          <p:cNvSpPr txBox="1"/>
-          <p:nvPr/>
-        </p:nvSpPr>
-        <p:spPr>
-          <a:xfrm>
-            <a:off x="1600200" y="3931920"/>
-            <a:ext cx="9784080" cy="1097280"/>
-          </a:xfrm>
-          <a:prstGeom prst="rect">
-            <a:avLst/>
-          </a:prstGeom>
-          <a:noFill/>
-          <a:ln/>
-        </p:spPr>
-        <p:txBody>
-          <a:bodyPr wrap="square" lIns="0" tIns="0" rIns="0" bIns="0" rtlCol="0" anchor="ctr"/>
-          <a:lstStyle/>
-          <a:p>
-            <a:pPr indent="0" marL="0">
-              <a:buNone/>
-            </a:pPr>
-            <a:r>
-              <a:rPr lang="en-US" sz="2000" dirty="0">
-                <a:solidFill>
-                  <a:srgbClr val="3B2A2A"/>
-                </a:solidFill>
-              </a:rPr>
-              <a:t>Que parte do seu feedback poderia ser rascunhada com segurança?</a:t>
-            </a:r>
-            <a:endParaRPr lang="en-US" sz="2000" dirty="0"/>
-          </a:p>
-        </p:txBody>
-      </p:sp>
-      <p:sp>
-        <p:nvSpPr>
-          <p:cNvPr id="16" name="Shape 13"/>
-          <p:cNvSpPr/>
-          <p:nvPr/>
-        </p:nvSpPr>
-        <p:spPr>
-          <a:xfrm>
-            <a:off x="548640" y="5166360"/>
-            <a:ext cx="11064240" cy="1097280"/>
-          </a:xfrm>
-          <a:prstGeom prst="roundRect">
-            <a:avLst>
-              <a:gd name="adj" fmla="val 10000"/>
-            </a:avLst>
-          </a:prstGeom>
-          <a:solidFill>
-            <a:srgbClr val="F7EFE6"/>
-          </a:solidFill>
-          <a:ln w="12700">
-            <a:solidFill>
-              <a:srgbClr val="F7EFE6"/>
-            </a:solidFill>
-            <a:prstDash val="solid"/>
-          </a:ln>
-        </p:spPr>
-      </p:sp>
-      <p:sp>
-        <p:nvSpPr>
-          <p:cNvPr id="17" name="Shape 14"/>
-          <p:cNvSpPr/>
-          <p:nvPr/>
-        </p:nvSpPr>
-        <p:spPr>
-          <a:xfrm>
-            <a:off x="777240" y="5440680"/>
-            <a:ext cx="548640" cy="548640"/>
-          </a:xfrm>
-          <a:prstGeom prst="ellipse">
-            <a:avLst/>
-          </a:prstGeom>
-          <a:solidFill>
-            <a:srgbClr val="6D3B6E"/>
-          </a:solidFill>
-          <a:ln w="12700">
-            <a:solidFill>
-              <a:srgbClr val="6D3B6E"/>
-            </a:solidFill>
-            <a:prstDash val="solid"/>
-          </a:ln>
-        </p:spPr>
-      </p:sp>
-      <p:sp>
-        <p:nvSpPr>
-          <p:cNvPr id="18" name="Text 15"/>
-          <p:cNvSpPr txBox="1"/>
-          <p:nvPr/>
-        </p:nvSpPr>
-        <p:spPr>
-          <a:xfrm>
-            <a:off x="777240" y="5440680"/>
-            <a:ext cx="548640" cy="548640"/>
-          </a:xfrm>
-          <a:prstGeom prst="rect">
-            <a:avLst/>
-          </a:prstGeom>
-          <a:noFill/>
-          <a:ln/>
-        </p:spPr>
-        <p:txBody>
-          <a:bodyPr wrap="square" lIns="0" tIns="0" rIns="0" bIns="0" rtlCol="0" anchor="ctr"/>
-          <a:lstStyle/>
-          <a:p>
-            <a:pPr algn="ctr" indent="0" marL="0">
-              <a:buNone/>
-            </a:pPr>
-            <a:r>
-              <a:rPr lang="en-US" sz="1600" b="1" dirty="0">
-                <a:solidFill>
-                  <a:srgbClr val="FFFFFF"/>
-                </a:solidFill>
-                <a:latin typeface="Cambria" pitchFamily="34" charset="0"/>
-                <a:ea typeface="Cambria" pitchFamily="34" charset="-122"/>
-                <a:cs typeface="Cambria" pitchFamily="34" charset="-120"/>
-              </a:rPr>
-              <a:t>?</a:t>
-            </a:r>
-            <a:endParaRPr lang="en-US" sz="1600" dirty="0"/>
-          </a:p>
-        </p:txBody>
-      </p:sp>
-      <p:sp>
-        <p:nvSpPr>
-          <p:cNvPr id="19" name="Text 16"/>
-          <p:cNvSpPr txBox="1"/>
-          <p:nvPr/>
-        </p:nvSpPr>
-        <p:spPr>
-          <a:xfrm>
-            <a:off x="1600200" y="5166360"/>
-            <a:ext cx="9784080" cy="1097280"/>
-          </a:xfrm>
-          <a:prstGeom prst="rect">
-            <a:avLst/>
-          </a:prstGeom>
-          <a:noFill/>
-          <a:ln/>
-        </p:spPr>
-        <p:txBody>
-          <a:bodyPr wrap="square" lIns="0" tIns="0" rIns="0" bIns="0" rtlCol="0" anchor="ctr"/>
-          <a:lstStyle/>
-          <a:p>
-            <a:pPr indent="0" marL="0">
-              <a:buNone/>
-            </a:pPr>
-            <a:r>
-              <a:rPr lang="en-US" sz="2000" dirty="0">
-                <a:solidFill>
-                  <a:srgbClr val="3B2A2A"/>
-                </a:solidFill>
-              </a:rPr>
-              <a:t>Que regras sobre IA nas avaliações você combinaria com a turma?</a:t>
-            </a:r>
-            <a:endParaRPr lang="en-US" sz="2000" dirty="0"/>
-          </a:p>
-        </p:txBody>
-      </p:sp>
-      <p:sp>
-        <p:nvSpPr>
-          <p:cNvPr id="20" name="Text 17"/>
-          <p:cNvSpPr txBox="1"/>
-          <p:nvPr/>
-        </p:nvSpPr>
-        <p:spPr>
-          <a:xfrm>
-            <a:off x="548640" y="6446520"/>
-            <a:ext cx="5486400" cy="274320"/>
-          </a:xfrm>
-          <a:prstGeom prst="rect">
-            <a:avLst/>
-          </a:prstGeom>
-          <a:noFill/>
-          <a:ln/>
-        </p:spPr>
-        <p:txBody>
-          <a:bodyPr wrap="square" lIns="0" tIns="0" rIns="0" bIns="0" rtlCol="0" anchor="ctr"/>
-          <a:lstStyle/>
-          <a:p>
-            <a:pPr indent="0" marL="0">
-              <a:buNone/>
-            </a:pPr>
-            <a:r>
-              <a:rPr lang="en-US" sz="1000" dirty="0">
-                <a:solidFill>
-                  <a:srgbClr val="6B5F59"/>
-                </a:solidFill>
-                <a:latin typeface="Calibri" pitchFamily="34" charset="0"/>
-                <a:ea typeface="Calibri" pitchFamily="34" charset="-122"/>
-                <a:cs typeface="Calibri" pitchFamily="34" charset="-120"/>
-              </a:rPr>
-              <a:t>IA aplicada à Educação · Cap. 22</a:t>
-            </a:r>
-            <a:endParaRPr lang="en-US" sz="1000" dirty="0"/>
-          </a:p>
-        </p:txBody>
-      </p:sp>
-    </p:spTree>
-  </p:cSld>
-  <p:clrMapOvr>
-    <a:masterClrMapping/>
-  </p:clrMapOvr>
-</p:sld>
-</file>
-
-<file path=ppt/slides/slide25.xml><?xml version="1.0" encoding="utf-8"?>
-<p:sld xmlns:a="http://schemas.openxmlformats.org/drawingml/2006/main" xmlns:r="http://schemas.openxmlformats.org/officeDocument/2006/relationships" xmlns:p="http://schemas.openxmlformats.org/presentationml/2006/main">
-  <p:cSld name="Slide 25">
     <p:bg>
       <p:bgPr>
         <a:solidFill>

--- a/livro_ia_educacao/saida/pptx/Cap22_slides.pptx
+++ b/livro_ia_educacao/saida/pptx/Cap22_slides.pptx
@@ -10411,11 +10411,11 @@
         <p:spPr>
           <a:xfrm>
             <a:off x="548640" y="1417320"/>
-            <a:ext cx="11064240" cy="762000"/>
+            <a:ext cx="11064240" cy="682752"/>
           </a:xfrm>
           <a:prstGeom prst="roundRect">
             <a:avLst>
-              <a:gd name="adj" fmla="val 14400"/>
+              <a:gd name="adj" fmla="val 16071"/>
             </a:avLst>
           </a:prstGeom>
           <a:solidFill>
@@ -10442,7 +10442,7 @@
         <p:spPr>
           <a:xfrm>
             <a:off x="731520" y="1417320"/>
-            <a:ext cx="548640" cy="762000"/>
+            <a:ext cx="548640" cy="682752"/>
           </a:xfrm>
           <a:prstGeom prst="rect">
             <a:avLst/>
@@ -10478,7 +10478,7 @@
         <p:spPr>
           <a:xfrm>
             <a:off x="1463040" y="1417320"/>
-            <a:ext cx="9966960" cy="762000"/>
+            <a:ext cx="9966960" cy="682752"/>
           </a:xfrm>
           <a:prstGeom prst="rect">
             <a:avLst/>
@@ -10513,12 +10513,12 @@
         </p:nvSpPr>
         <p:spPr>
           <a:xfrm>
-            <a:off x="548640" y="2289048"/>
-            <a:ext cx="11064240" cy="762000"/>
+            <a:off x="548640" y="2209800"/>
+            <a:ext cx="11064240" cy="682752"/>
           </a:xfrm>
           <a:prstGeom prst="roundRect">
             <a:avLst>
-              <a:gd name="adj" fmla="val 14400"/>
+              <a:gd name="adj" fmla="val 16071"/>
             </a:avLst>
           </a:prstGeom>
           <a:solidFill>
@@ -10544,8 +10544,8 @@
         </p:nvSpPr>
         <p:spPr>
           <a:xfrm>
-            <a:off x="731520" y="2289048"/>
-            <a:ext cx="548640" cy="762000"/>
+            <a:off x="731520" y="2209800"/>
+            <a:ext cx="548640" cy="682752"/>
           </a:xfrm>
           <a:prstGeom prst="rect">
             <a:avLst/>
@@ -10580,8 +10580,8 @@
         </p:nvSpPr>
         <p:spPr>
           <a:xfrm>
-            <a:off x="1463040" y="2289048"/>
-            <a:ext cx="9966960" cy="762000"/>
+            <a:off x="1463040" y="2209800"/>
+            <a:ext cx="9966960" cy="682752"/>
           </a:xfrm>
           <a:prstGeom prst="rect">
             <a:avLst/>
@@ -10616,12 +10616,12 @@
         </p:nvSpPr>
         <p:spPr>
           <a:xfrm>
-            <a:off x="548640" y="3160776"/>
-            <a:ext cx="11064240" cy="762000"/>
+            <a:off x="548640" y="3002280"/>
+            <a:ext cx="11064240" cy="682752"/>
           </a:xfrm>
           <a:prstGeom prst="roundRect">
             <a:avLst>
-              <a:gd name="adj" fmla="val 14400"/>
+              <a:gd name="adj" fmla="val 16071"/>
             </a:avLst>
           </a:prstGeom>
           <a:solidFill>
@@ -10647,8 +10647,8 @@
         </p:nvSpPr>
         <p:spPr>
           <a:xfrm>
-            <a:off x="731520" y="3160776"/>
-            <a:ext cx="548640" cy="762000"/>
+            <a:off x="731520" y="3002280"/>
+            <a:ext cx="548640" cy="682752"/>
           </a:xfrm>
           <a:prstGeom prst="rect">
             <a:avLst/>
@@ -10683,8 +10683,8 @@
         </p:nvSpPr>
         <p:spPr>
           <a:xfrm>
-            <a:off x="1463040" y="3160776"/>
-            <a:ext cx="9966960" cy="762000"/>
+            <a:off x="1463040" y="3002280"/>
+            <a:ext cx="9966960" cy="682752"/>
           </a:xfrm>
           <a:prstGeom prst="rect">
             <a:avLst/>
@@ -10719,12 +10719,12 @@
         </p:nvSpPr>
         <p:spPr>
           <a:xfrm>
-            <a:off x="548640" y="4032504"/>
-            <a:ext cx="11064240" cy="762000"/>
+            <a:off x="548640" y="3794760"/>
+            <a:ext cx="11064240" cy="682752"/>
           </a:xfrm>
           <a:prstGeom prst="roundRect">
             <a:avLst>
-              <a:gd name="adj" fmla="val 14400"/>
+              <a:gd name="adj" fmla="val 16071"/>
             </a:avLst>
           </a:prstGeom>
           <a:solidFill>
@@ -10750,8 +10750,8 @@
         </p:nvSpPr>
         <p:spPr>
           <a:xfrm>
-            <a:off x="731520" y="4032504"/>
-            <a:ext cx="548640" cy="762000"/>
+            <a:off x="731520" y="3794760"/>
+            <a:ext cx="548640" cy="682752"/>
           </a:xfrm>
           <a:prstGeom prst="rect">
             <a:avLst/>
@@ -10786,8 +10786,8 @@
         </p:nvSpPr>
         <p:spPr>
           <a:xfrm>
-            <a:off x="1463040" y="4032504"/>
-            <a:ext cx="9966960" cy="762000"/>
+            <a:off x="1463040" y="3794760"/>
+            <a:ext cx="9966960" cy="682752"/>
           </a:xfrm>
           <a:prstGeom prst="rect">
             <a:avLst/>
@@ -10822,12 +10822,12 @@
         </p:nvSpPr>
         <p:spPr>
           <a:xfrm>
-            <a:off x="548640" y="4904232"/>
-            <a:ext cx="11064240" cy="762000"/>
+            <a:off x="548640" y="4587240"/>
+            <a:ext cx="11064240" cy="682752"/>
           </a:xfrm>
           <a:prstGeom prst="roundRect">
             <a:avLst>
-              <a:gd name="adj" fmla="val 14400"/>
+              <a:gd name="adj" fmla="val 16071"/>
             </a:avLst>
           </a:prstGeom>
           <a:solidFill>
@@ -10853,8 +10853,8 @@
         </p:nvSpPr>
         <p:spPr>
           <a:xfrm>
-            <a:off x="731520" y="4904232"/>
-            <a:ext cx="548640" cy="762000"/>
+            <a:off x="731520" y="4587240"/>
+            <a:ext cx="548640" cy="682752"/>
           </a:xfrm>
           <a:prstGeom prst="rect">
             <a:avLst/>
@@ -10889,8 +10889,8 @@
         </p:nvSpPr>
         <p:spPr>
           <a:xfrm>
-            <a:off x="1463040" y="4904232"/>
-            <a:ext cx="9966960" cy="762000"/>
+            <a:off x="1463040" y="4587240"/>
+            <a:ext cx="9966960" cy="682752"/>
           </a:xfrm>
           <a:prstGeom prst="rect">
             <a:avLst/>
@@ -10925,12 +10925,12 @@
         </p:nvSpPr>
         <p:spPr>
           <a:xfrm>
-            <a:off x="548640" y="5775960"/>
-            <a:ext cx="11064240" cy="762000"/>
+            <a:off x="548640" y="5379720"/>
+            <a:ext cx="11064240" cy="682752"/>
           </a:xfrm>
           <a:prstGeom prst="roundRect">
             <a:avLst>
-              <a:gd name="adj" fmla="val 14400"/>
+              <a:gd name="adj" fmla="val 16071"/>
             </a:avLst>
           </a:prstGeom>
           <a:solidFill>
@@ -10956,8 +10956,8 @@
         </p:nvSpPr>
         <p:spPr>
           <a:xfrm>
-            <a:off x="731520" y="5775960"/>
-            <a:ext cx="548640" cy="762000"/>
+            <a:off x="731520" y="5379720"/>
+            <a:ext cx="548640" cy="682752"/>
           </a:xfrm>
           <a:prstGeom prst="rect">
             <a:avLst/>
@@ -10992,8 +10992,8 @@
         </p:nvSpPr>
         <p:spPr>
           <a:xfrm>
-            <a:off x="1463040" y="5775960"/>
-            <a:ext cx="9966960" cy="762000"/>
+            <a:off x="1463040" y="5379720"/>
+            <a:ext cx="9966960" cy="682752"/>
           </a:xfrm>
           <a:prstGeom prst="rect">
             <a:avLst/>
